--- a/reports/slides/HousingPricePrediction.pptx
+++ b/reports/slides/HousingPricePrediction.pptx
@@ -4,6 +4,9 @@
   <p:sldMasterIdLst>
     <p:sldMasterId id="2147483648" r:id="rId1"/>
   </p:sldMasterIdLst>
+  <p:notesMasterIdLst>
+    <p:notesMasterId r:id="rId13"/>
+  </p:notesMasterIdLst>
   <p:sldIdLst>
     <p:sldId id="256" r:id="rId2"/>
     <p:sldId id="257" r:id="rId3"/>
@@ -17,10 +20,7 @@
     <p:sldId id="265" r:id="rId11"/>
     <p:sldId id="266" r:id="rId12"/>
   </p:sldIdLst>
-  <p:notesMasterIdLst>
-    <p:notesMasterId r:id="rId13"/>
-  </p:notesMasterIdLst>
-  <p:sldSz cx="9144000" cy="5143500"/>
+  <p:sldSz cx="9144000" cy="5143500" type="screen16x9"/>
   <p:notesSz cx="5143500" cy="9144000"/>
   <p:defaultTextStyle>
     <a:lvl1pPr marL="0" algn="l" defTabSz="914400" rtl="0" eaLnBrk="1" latinLnBrk="0" hangingPunct="1">
@@ -114,6 +114,11 @@
       </a:defRPr>
     </a:lvl9pPr>
   </p:defaultTextStyle>
+  <p:extLst>
+    <p:ext uri="{EFAFB233-063F-42B5-8137-9DF3F51BA10A}">
+      <p15:sldGuideLst xmlns:p15="http://schemas.microsoft.com/office/powerpoint/2012/main"/>
+    </p:ext>
+  </p:extLst>
 </p:presentation>
 </file>
 
@@ -139,234 +144,10 @@
           <a:chExt cx="0" cy="0"/>
         </a:xfrm>
       </p:grpSpPr>
-      <p:sp>
-        <p:nvSpPr>
-          <p:cNvPr id="2" name="Header Placeholder 1"/>
-          <p:cNvSpPr>
-            <a:spLocks noGrp="1"/>
-          </p:cNvSpPr>
-          <p:nvPr>
-            <p:ph type="hdr" sz="quarter"/>
-          </p:nvPr>
-        </p:nvSpPr>
-        <p:spPr>
-          <a:xfrm>
-            <a:off x="0" y="0"/>
-            <a:ext cx="2971800" cy="458788"/>
-          </a:xfrm>
-          <a:prstGeom prst="rect">
-            <a:avLst/>
-          </a:prstGeom>
-        </p:spPr>
-        <p:txBody>
-          <a:bodyPr vert="horz" lIns="91440" tIns="45720" rIns="91440" bIns="45720" rtlCol="0"/>
-          <a:lstStyle>
-            <a:lvl1pPr algn="l">
-              <a:defRPr sz="1200"/>
-            </a:lvl1pPr>
-          </a:lstStyle>
-          <a:p>
-            <a:endParaRPr lang="en-US"/>
-          </a:p>
-        </p:txBody>
-      </p:sp>
-      <p:sp>
-        <p:nvSpPr>
-          <p:cNvPr id="3" name="Date Placeholder 2"/>
-          <p:cNvSpPr>
-            <a:spLocks noGrp="1"/>
-          </p:cNvSpPr>
-          <p:nvPr>
-            <p:ph type="dt" idx="1"/>
-          </p:nvPr>
-        </p:nvSpPr>
-        <p:spPr>
-          <a:xfrm>
-            <a:off x="3884613" y="0"/>
-            <a:ext cx="2971800" cy="458788"/>
-          </a:xfrm>
-          <a:prstGeom prst="rect">
-            <a:avLst/>
-          </a:prstGeom>
-        </p:spPr>
-        <p:txBody>
-          <a:bodyPr vert="horz" lIns="91440" tIns="45720" rIns="91440" bIns="45720" rtlCol="0"/>
-          <a:lstStyle>
-            <a:lvl1pPr algn="r">
-              <a:defRPr sz="1200"/>
-            </a:lvl1pPr>
-          </a:lstStyle>
-          <a:p>
-            <a:fld id="{5282F153-3F37-0F45-9E97-73ACFA13230C}" type="datetimeFigureOut">
-              <a:rPr lang="en-US"/>
-              <a:t>7/23/19</a:t>
-            </a:fld>
-            <a:endParaRPr lang="en-US"/>
-          </a:p>
-        </p:txBody>
-      </p:sp>
-      <p:sp>
-        <p:nvSpPr>
-          <p:cNvPr id="4" name="Slide Image Placeholder 3"/>
-          <p:cNvSpPr>
-            <a:spLocks noGrp="1" noRot="1" noChangeAspect="1"/>
-          </p:cNvSpPr>
-          <p:nvPr>
-            <p:ph type="sldImg" idx="2"/>
-          </p:nvPr>
-        </p:nvSpPr>
-        <p:spPr>
-          <a:xfrm>
-            <a:off x="685800" y="1143000"/>
-            <a:ext cx="5486400" cy="3086100"/>
-          </a:xfrm>
-          <a:prstGeom prst="rect">
-            <a:avLst/>
-          </a:prstGeom>
-          <a:noFill/>
-          <a:ln w="12700">
-            <a:solidFill>
-              <a:prstClr val="black"/>
-            </a:solidFill>
-          </a:ln>
-        </p:spPr>
-        <p:txBody>
-          <a:bodyPr vert="horz" lIns="91440" tIns="45720" rIns="91440" bIns="45720" rtlCol="0" anchor="ctr"/>
-          <a:lstStyle/>
-          <a:p>
-            <a:endParaRPr lang="en-US"/>
-          </a:p>
-        </p:txBody>
-      </p:sp>
-      <p:sp>
-        <p:nvSpPr>
-          <p:cNvPr id="5" name="Notes Placeholder 4"/>
-          <p:cNvSpPr>
-            <a:spLocks noGrp="1"/>
-          </p:cNvSpPr>
-          <p:nvPr>
-            <p:ph type="body" sz="quarter" idx="3"/>
-          </p:nvPr>
-        </p:nvSpPr>
-        <p:spPr>
-          <a:xfrm>
-            <a:off x="685800" y="4400550"/>
-            <a:ext cx="5486400" cy="3600450"/>
-          </a:xfrm>
-          <a:prstGeom prst="rect">
-            <a:avLst/>
-          </a:prstGeom>
-        </p:spPr>
-        <p:txBody>
-          <a:bodyPr vert="horz" lIns="91440" tIns="45720" rIns="91440" bIns="45720" rtlCol="0"/>
-          <a:lstStyle/>
-          <a:p>
-            <a:pPr lvl="0"/>
-            <a:r>
-              <a:rPr lang="en-US"/>
-              <a:t>Click to edit Master text styles</a:t>
-            </a:r>
-          </a:p>
-          <a:p>
-            <a:pPr lvl="1"/>
-            <a:r>
-              <a:rPr lang="en-US"/>
-              <a:t>Second level</a:t>
-            </a:r>
-          </a:p>
-          <a:p>
-            <a:pPr lvl="2"/>
-            <a:r>
-              <a:rPr lang="en-US"/>
-              <a:t>Third level</a:t>
-            </a:r>
-          </a:p>
-          <a:p>
-            <a:pPr lvl="3"/>
-            <a:r>
-              <a:rPr lang="en-US"/>
-              <a:t>Fourth level</a:t>
-            </a:r>
-          </a:p>
-          <a:p>
-            <a:pPr lvl="4"/>
-            <a:r>
-              <a:rPr lang="en-US"/>
-              <a:t>Fifth level</a:t>
-            </a:r>
-          </a:p>
-        </p:txBody>
-      </p:sp>
-      <p:sp>
-        <p:nvSpPr>
-          <p:cNvPr id="6" name="Footer Placeholder 5"/>
-          <p:cNvSpPr>
-            <a:spLocks noGrp="1"/>
-          </p:cNvSpPr>
-          <p:nvPr>
-            <p:ph type="ftr" sz="quarter" idx="4"/>
-          </p:nvPr>
-        </p:nvSpPr>
-        <p:spPr>
-          <a:xfrm>
-            <a:off x="0" y="8685213"/>
-            <a:ext cx="2971800" cy="458787"/>
-          </a:xfrm>
-          <a:prstGeom prst="rect">
-            <a:avLst/>
-          </a:prstGeom>
-        </p:spPr>
-        <p:txBody>
-          <a:bodyPr vert="horz" lIns="91440" tIns="45720" rIns="91440" bIns="45720" rtlCol="0" anchor="b"/>
-          <a:lstStyle>
-            <a:lvl1pPr algn="l">
-              <a:defRPr sz="1200"/>
-            </a:lvl1pPr>
-          </a:lstStyle>
-          <a:p>
-            <a:endParaRPr lang="en-US"/>
-          </a:p>
-        </p:txBody>
-      </p:sp>
-      <p:sp>
-        <p:nvSpPr>
-          <p:cNvPr id="7" name="Slide Number Placeholder 6"/>
-          <p:cNvSpPr>
-            <a:spLocks noGrp="1"/>
-          </p:cNvSpPr>
-          <p:nvPr>
-            <p:ph type="sldNum" sz="quarter" idx="5"/>
-          </p:nvPr>
-        </p:nvSpPr>
-        <p:spPr>
-          <a:xfrm>
-            <a:off x="3884613" y="8685213"/>
-            <a:ext cx="2971800" cy="458787"/>
-          </a:xfrm>
-          <a:prstGeom prst="rect">
-            <a:avLst/>
-          </a:prstGeom>
-        </p:spPr>
-        <p:txBody>
-          <a:bodyPr vert="horz" lIns="91440" tIns="45720" rIns="91440" bIns="45720" rtlCol="0" anchor="b"/>
-          <a:lstStyle>
-            <a:lvl1pPr algn="r">
-              <a:defRPr sz="1200"/>
-            </a:lvl1pPr>
-          </a:lstStyle>
-          <a:p>
-            <a:fld id="{CE5E9CC1-C706-0F49-92D6-E571CC5EEA8F}" type="slidenum">
-              <a:rPr lang="en-US"/>
-              <a:t>‹#›</a:t>
-            </a:fld>
-            <a:endParaRPr lang="en-US"/>
-          </a:p>
-        </p:txBody>
-      </p:sp>
     </p:spTree>
     <p:extLst>
       <p:ext uri="{BB962C8B-B14F-4D97-AF65-F5344CB8AC3E}">
-        <p14:creationId xmlns:p14="http://schemas.microsoft.com/office/powerpoint/2010/main" val="1024086991"/>
+        <p14:creationId xmlns:p14="http://schemas.microsoft.com/office/powerpoint/2010/main" val="1615872346"/>
       </p:ext>
     </p:extLst>
   </p:cSld>
@@ -510,10 +291,6 @@
           <a:bodyPr/>
           <a:lstStyle/>
           <a:p>
-            <a:r>
-              <a:rPr lang="en-US" dirty="0"/>
-              <a:t/>
-            </a:r>
             <a:endParaRPr lang="en-US" dirty="0"/>
           </a:p>
         </p:txBody>
@@ -598,10 +375,6 @@
           <a:bodyPr/>
           <a:lstStyle/>
           <a:p>
-            <a:r>
-              <a:rPr lang="en-US" dirty="0"/>
-              <a:t/>
-            </a:r>
             <a:endParaRPr lang="en-US" dirty="0"/>
           </a:p>
         </p:txBody>
@@ -686,10 +459,6 @@
           <a:bodyPr/>
           <a:lstStyle/>
           <a:p>
-            <a:r>
-              <a:rPr lang="en-US" dirty="0"/>
-              <a:t/>
-            </a:r>
             <a:endParaRPr lang="en-US" dirty="0"/>
           </a:p>
         </p:txBody>
@@ -774,10 +543,6 @@
           <a:bodyPr/>
           <a:lstStyle/>
           <a:p>
-            <a:r>
-              <a:rPr lang="en-US" dirty="0"/>
-              <a:t/>
-            </a:r>
             <a:endParaRPr lang="en-US" dirty="0"/>
           </a:p>
         </p:txBody>
@@ -862,10 +627,6 @@
           <a:bodyPr/>
           <a:lstStyle/>
           <a:p>
-            <a:r>
-              <a:rPr lang="en-US" dirty="0"/>
-              <a:t/>
-            </a:r>
             <a:endParaRPr lang="en-US" dirty="0"/>
           </a:p>
         </p:txBody>
@@ -950,10 +711,6 @@
           <a:bodyPr/>
           <a:lstStyle/>
           <a:p>
-            <a:r>
-              <a:rPr lang="en-US" dirty="0"/>
-              <a:t/>
-            </a:r>
             <a:endParaRPr lang="en-US" dirty="0"/>
           </a:p>
         </p:txBody>
@@ -1038,10 +795,6 @@
           <a:bodyPr/>
           <a:lstStyle/>
           <a:p>
-            <a:r>
-              <a:rPr lang="en-US" dirty="0"/>
-              <a:t/>
-            </a:r>
             <a:endParaRPr lang="en-US" dirty="0"/>
           </a:p>
         </p:txBody>
@@ -1126,10 +879,6 @@
           <a:bodyPr/>
           <a:lstStyle/>
           <a:p>
-            <a:r>
-              <a:rPr lang="en-US" dirty="0"/>
-              <a:t/>
-            </a:r>
             <a:endParaRPr lang="en-US" dirty="0"/>
           </a:p>
         </p:txBody>
@@ -1214,10 +963,6 @@
           <a:bodyPr/>
           <a:lstStyle/>
           <a:p>
-            <a:r>
-              <a:rPr lang="en-US" dirty="0"/>
-              <a:t/>
-            </a:r>
             <a:endParaRPr lang="en-US" dirty="0"/>
           </a:p>
         </p:txBody>
@@ -1302,10 +1047,6 @@
           <a:bodyPr/>
           <a:lstStyle/>
           <a:p>
-            <a:r>
-              <a:rPr lang="en-US" dirty="0"/>
-              <a:t/>
-            </a:r>
             <a:endParaRPr lang="en-US" dirty="0"/>
           </a:p>
         </p:txBody>
@@ -1390,10 +1131,6 @@
           <a:bodyPr/>
           <a:lstStyle/>
           <a:p>
-            <a:r>
-              <a:rPr lang="en-US" dirty="0"/>
-              <a:t/>
-            </a:r>
             <a:endParaRPr lang="en-US" dirty="0"/>
           </a:p>
         </p:txBody>
@@ -1467,6 +1204,11 @@
 <file path=ppt/slideMasters/slideMaster1.xml><?xml version="1.0" encoding="utf-8"?>
 <p:sldMaster xmlns:a="http://schemas.openxmlformats.org/drawingml/2006/main" xmlns:r="http://schemas.openxmlformats.org/officeDocument/2006/relationships" xmlns:p="http://schemas.openxmlformats.org/presentationml/2006/main">
   <p:cSld>
+    <p:bg>
+      <p:bgRef idx="1001">
+        <a:schemeClr val="bg1"/>
+      </p:bgRef>
+    </p:bg>
     <p:spTree>
       <p:nvGrpSpPr>
         <p:cNvPr id="1" name=""/>
@@ -1749,6 +1491,7 @@
         <a:solidFill>
           <a:srgbClr val="1A2E4A"/>
         </a:solidFill>
+        <a:effectLst/>
       </p:bgPr>
     </p:bg>
     <p:spTree>
@@ -1789,6 +1532,13 @@
             <a:prstDash val="solid"/>
           </a:ln>
         </p:spPr>
+        <p:txBody>
+          <a:bodyPr/>
+          <a:lstStyle/>
+          <a:p>
+            <a:endParaRPr lang="en-US"/>
+          </a:p>
+        </p:txBody>
       </p:sp>
       <p:sp>
         <p:nvSpPr>
@@ -1816,6 +1566,13 @@
             <a:prstDash val="solid"/>
           </a:ln>
         </p:spPr>
+        <p:txBody>
+          <a:bodyPr/>
+          <a:lstStyle/>
+          <a:p>
+            <a:endParaRPr lang="en-US"/>
+          </a:p>
+        </p:txBody>
       </p:sp>
       <p:sp>
         <p:nvSpPr>
@@ -1838,7 +1595,7 @@
           <a:bodyPr wrap="square" lIns="0" tIns="0" rIns="0" bIns="0" rtlCol="0" anchor="ctr"/>
           <a:lstStyle/>
           <a:p>
-            <a:pPr algn="ctr" indent="0" marL="0">
+            <a:pPr marL="0" indent="0" algn="ctr">
               <a:buNone/>
             </a:pPr>
             <a:r>
@@ -1847,7 +1604,15 @@
                   <a:srgbClr val="FFFFFF"/>
                 </a:solidFill>
               </a:rPr>
-              <a:t>DATA SCIENCE PROJECT</a:t>
+              <a:t>DATA </a:t>
+            </a:r>
+            <a:r>
+              <a:rPr lang="en-US" sz="900" b="1">
+                <a:solidFill>
+                  <a:srgbClr val="FFFFFF"/>
+                </a:solidFill>
+              </a:rPr>
+              <a:t>SCIENCE CASE STUDY</a:t>
             </a:r>
             <a:endParaRPr lang="en-US" sz="900" dirty="0"/>
           </a:p>
@@ -1874,7 +1639,7 @@
           <a:bodyPr wrap="square" lIns="0" tIns="0" rIns="0" bIns="0" rtlCol="0" anchor="ctr"/>
           <a:lstStyle/>
           <a:p>
-            <a:pPr algn="l" indent="0" marL="0">
+            <a:pPr marL="0" indent="0" algn="l">
               <a:buNone/>
             </a:pPr>
             <a:r>
@@ -1913,7 +1678,7 @@
           <a:bodyPr wrap="square" lIns="0" tIns="0" rIns="0" bIns="0" rtlCol="0" anchor="ctr"/>
           <a:lstStyle/>
           <a:p>
-            <a:pPr algn="l" indent="0" marL="0">
+            <a:pPr marL="0" indent="0" algn="l">
               <a:buNone/>
             </a:pPr>
             <a:r>
@@ -1957,6 +1722,13 @@
             <a:prstDash val="solid"/>
           </a:ln>
         </p:spPr>
+        <p:txBody>
+          <a:bodyPr/>
+          <a:lstStyle/>
+          <a:p>
+            <a:endParaRPr lang="en-US"/>
+          </a:p>
+        </p:txBody>
       </p:sp>
       <p:sp>
         <p:nvSpPr>
@@ -1979,16 +1751,16 @@
           <a:bodyPr wrap="square" lIns="0" tIns="0" rIns="0" bIns="0" rtlCol="0" anchor="ctr"/>
           <a:lstStyle/>
           <a:p>
-            <a:pPr algn="ctr" indent="0" marL="0">
+            <a:pPr marL="0" indent="0" algn="ctr">
               <a:buNone/>
             </a:pPr>
             <a:r>
-              <a:rPr lang="en-US" sz="900" b="1" dirty="0">
+              <a:rPr lang="en-US" sz="900" b="1">
                 <a:solidFill>
                   <a:srgbClr val="FFFFFF"/>
                 </a:solidFill>
               </a:rPr>
-              <a:t>Domain: Real Estate</a:t>
+              <a:t>Lĩnh vực: Bất động sản</a:t>
             </a:r>
             <a:endParaRPr lang="en-US" sz="900" dirty="0"/>
           </a:p>
@@ -2018,6 +1790,13 @@
             <a:prstDash val="solid"/>
           </a:ln>
         </p:spPr>
+        <p:txBody>
+          <a:bodyPr/>
+          <a:lstStyle/>
+          <a:p>
+            <a:endParaRPr lang="en-US"/>
+          </a:p>
+        </p:txBody>
       </p:sp>
       <p:sp>
         <p:nvSpPr>
@@ -2040,7 +1819,7 @@
           <a:bodyPr wrap="square" lIns="0" tIns="0" rIns="0" bIns="0" rtlCol="0" anchor="ctr"/>
           <a:lstStyle/>
           <a:p>
-            <a:pPr algn="l" indent="0" marL="0">
+            <a:pPr marL="0" indent="0" algn="l">
               <a:buNone/>
             </a:pPr>
             <a:r>
@@ -2076,7 +1855,7 @@
           <a:bodyPr wrap="square" lIns="0" tIns="0" rIns="0" bIns="0" rtlCol="0" anchor="ctr"/>
           <a:lstStyle/>
           <a:p>
-            <a:pPr algn="l" indent="0" marL="0">
+            <a:pPr marL="0" indent="0" algn="l">
               <a:buNone/>
             </a:pPr>
             <a:r>
@@ -2090,7 +1869,7 @@
             <a:endParaRPr lang="en-US" sz="1400" dirty="0"/>
           </a:p>
           <a:p>
-            <a:pPr algn="l" indent="0" marL="0">
+            <a:pPr marL="0" indent="0" algn="l">
               <a:buNone/>
             </a:pPr>
             <a:r>
@@ -2129,13 +1908,20 @@
             <a:prstDash val="solid"/>
           </a:ln>
           <a:effectLst>
-            <a:outerShdw sx="100000" sy="100000" kx="0" ky="0" algn="bl" rotWithShape="0" blurRad="63500" dist="25400" dir="8100000">
+            <a:outerShdw blurRad="63500" dist="25400" dir="8100000" algn="bl" rotWithShape="0">
               <a:srgbClr val="000000">
                 <a:alpha val="10000"/>
               </a:srgbClr>
             </a:outerShdw>
           </a:effectLst>
         </p:spPr>
+        <p:txBody>
+          <a:bodyPr/>
+          <a:lstStyle/>
+          <a:p>
+            <a:endParaRPr lang="en-US"/>
+          </a:p>
+        </p:txBody>
       </p:sp>
       <p:sp>
         <p:nvSpPr>
@@ -2158,7 +1944,7 @@
           <a:bodyPr wrap="square" lIns="0" tIns="0" rIns="0" bIns="0" rtlCol="0" anchor="ctr"/>
           <a:lstStyle/>
           <a:p>
-            <a:pPr algn="l" indent="0" marL="0">
+            <a:pPr marL="0" indent="0" algn="l">
               <a:buNone/>
             </a:pPr>
             <a:r>
@@ -2194,7 +1980,7 @@
           <a:bodyPr wrap="square" lIns="0" tIns="0" rIns="0" bIns="0" rtlCol="0" anchor="ctr"/>
           <a:lstStyle/>
           <a:p>
-            <a:pPr algn="l" indent="0" marL="0">
+            <a:pPr marL="0" indent="0" algn="l">
               <a:buNone/>
             </a:pPr>
             <a:r>
@@ -2208,7 +1994,7 @@
             <a:endParaRPr lang="en-US" sz="1300" dirty="0"/>
           </a:p>
           <a:p>
-            <a:pPr algn="l" indent="0" marL="0">
+            <a:pPr marL="0" indent="0" algn="l">
               <a:buNone/>
             </a:pPr>
             <a:r>
@@ -2222,7 +2008,7 @@
             <a:endParaRPr lang="en-US" sz="1300" dirty="0"/>
           </a:p>
           <a:p>
-            <a:pPr algn="l" indent="0" marL="0">
+            <a:pPr marL="0" indent="0" algn="l">
               <a:buNone/>
             </a:pPr>
             <a:r>
@@ -2253,6 +2039,7 @@
         <a:solidFill>
           <a:srgbClr val="F4F6F9"/>
         </a:solidFill>
+        <a:effectLst/>
       </p:bgPr>
     </p:bg>
     <p:spTree>
@@ -2290,7 +2077,7 @@
           <a:bodyPr wrap="square" lIns="0" tIns="0" rIns="0" bIns="0" rtlCol="0" anchor="ctr"/>
           <a:lstStyle/>
           <a:p>
-            <a:pPr algn="l" indent="0" marL="0">
+            <a:pPr marL="0" indent="0" algn="l">
               <a:buNone/>
             </a:pPr>
             <a:r>
@@ -2329,7 +2116,7 @@
           <a:bodyPr wrap="square" lIns="0" tIns="0" rIns="0" bIns="0" rtlCol="0" anchor="ctr"/>
           <a:lstStyle/>
           <a:p>
-            <a:pPr algn="l" indent="0" marL="0">
+            <a:pPr marL="0" indent="0" algn="l">
               <a:buNone/>
             </a:pPr>
             <a:r>
@@ -2368,6 +2155,13 @@
             <a:prstDash val="solid"/>
           </a:ln>
         </p:spPr>
+        <p:txBody>
+          <a:bodyPr/>
+          <a:lstStyle/>
+          <a:p>
+            <a:endParaRPr lang="en-US"/>
+          </a:p>
+        </p:txBody>
       </p:sp>
       <p:sp>
         <p:nvSpPr>
@@ -2395,6 +2189,13 @@
             <a:prstDash val="solid"/>
           </a:ln>
         </p:spPr>
+        <p:txBody>
+          <a:bodyPr/>
+          <a:lstStyle/>
+          <a:p>
+            <a:endParaRPr lang="en-US"/>
+          </a:p>
+        </p:txBody>
       </p:sp>
       <p:sp>
         <p:nvSpPr>
@@ -2417,7 +2218,7 @@
           <a:bodyPr wrap="square" lIns="0" tIns="0" rIns="0" bIns="0" rtlCol="0" anchor="ctr"/>
           <a:lstStyle/>
           <a:p>
-            <a:pPr algn="ctr" indent="0" marL="0">
+            <a:pPr marL="0" indent="0" algn="ctr">
               <a:buNone/>
             </a:pPr>
             <a:r>
@@ -2434,15 +2235,15 @@
       </p:sp>
       <p:pic>
         <p:nvPicPr>
-          <p:cNvPr id="7" name="Image 0" descr="preencoded.png">    </p:cNvPr>
+          <p:cNvPr id="7" name="Image 0" descr="preencoded.png"/>
           <p:cNvPicPr>
             <a:picLocks noChangeAspect="1"/>
           </p:cNvPicPr>
           <p:nvPr/>
         </p:nvPicPr>
         <p:blipFill>
-          <a:blip r:embed="rId1"/>
-          <a:srcRect l="0" r="0" t="0" b="0"/>
+          <a:blip r:embed="rId3"/>
+          <a:srcRect/>
           <a:stretch/>
         </p:blipFill>
         <p:spPr>
@@ -2479,13 +2280,20 @@
             <a:prstDash val="solid"/>
           </a:ln>
           <a:effectLst>
-            <a:outerShdw sx="100000" sy="100000" kx="0" ky="0" algn="bl" rotWithShape="0" blurRad="63500" dist="25400" dir="8100000">
+            <a:outerShdw blurRad="63500" dist="25400" dir="8100000" algn="bl" rotWithShape="0">
               <a:srgbClr val="000000">
                 <a:alpha val="10000"/>
               </a:srgbClr>
             </a:outerShdw>
           </a:effectLst>
         </p:spPr>
+        <p:txBody>
+          <a:bodyPr/>
+          <a:lstStyle/>
+          <a:p>
+            <a:endParaRPr lang="en-US"/>
+          </a:p>
+        </p:txBody>
       </p:sp>
       <p:sp>
         <p:nvSpPr>
@@ -2511,6 +2319,13 @@
             <a:prstDash val="solid"/>
           </a:ln>
         </p:spPr>
+        <p:txBody>
+          <a:bodyPr/>
+          <a:lstStyle/>
+          <a:p>
+            <a:endParaRPr lang="en-US"/>
+          </a:p>
+        </p:txBody>
       </p:sp>
       <p:sp>
         <p:nvSpPr>
@@ -2533,7 +2348,7 @@
           <a:bodyPr wrap="square" lIns="0" tIns="0" rIns="0" bIns="0" rtlCol="0" anchor="ctr"/>
           <a:lstStyle/>
           <a:p>
-            <a:pPr indent="0" marL="0">
+            <a:pPr marL="0" indent="0">
               <a:buNone/>
             </a:pPr>
             <a:r>
@@ -2569,7 +2384,7 @@
           <a:bodyPr wrap="square" lIns="0" tIns="0" rIns="0" bIns="0" rtlCol="0" anchor="ctr"/>
           <a:lstStyle/>
           <a:p>
-            <a:pPr indent="0" marL="0">
+            <a:pPr marL="0" indent="0">
               <a:buNone/>
             </a:pPr>
             <a:r>
@@ -2608,13 +2423,20 @@
             <a:prstDash val="solid"/>
           </a:ln>
           <a:effectLst>
-            <a:outerShdw sx="100000" sy="100000" kx="0" ky="0" algn="bl" rotWithShape="0" blurRad="63500" dist="25400" dir="8100000">
+            <a:outerShdw blurRad="63500" dist="25400" dir="8100000" algn="bl" rotWithShape="0">
               <a:srgbClr val="000000">
                 <a:alpha val="10000"/>
               </a:srgbClr>
             </a:outerShdw>
           </a:effectLst>
         </p:spPr>
+        <p:txBody>
+          <a:bodyPr/>
+          <a:lstStyle/>
+          <a:p>
+            <a:endParaRPr lang="en-US"/>
+          </a:p>
+        </p:txBody>
       </p:sp>
       <p:sp>
         <p:nvSpPr>
@@ -2640,6 +2462,13 @@
             <a:prstDash val="solid"/>
           </a:ln>
         </p:spPr>
+        <p:txBody>
+          <a:bodyPr/>
+          <a:lstStyle/>
+          <a:p>
+            <a:endParaRPr lang="en-US"/>
+          </a:p>
+        </p:txBody>
       </p:sp>
       <p:sp>
         <p:nvSpPr>
@@ -2662,7 +2491,7 @@
           <a:bodyPr wrap="square" lIns="0" tIns="0" rIns="0" bIns="0" rtlCol="0" anchor="ctr"/>
           <a:lstStyle/>
           <a:p>
-            <a:pPr indent="0" marL="0">
+            <a:pPr marL="0" indent="0">
               <a:buNone/>
             </a:pPr>
             <a:r>
@@ -2698,7 +2527,7 @@
           <a:bodyPr wrap="square" lIns="0" tIns="0" rIns="0" bIns="0" rtlCol="0" anchor="ctr"/>
           <a:lstStyle/>
           <a:p>
-            <a:pPr indent="0" marL="0">
+            <a:pPr marL="0" indent="0">
               <a:buNone/>
             </a:pPr>
             <a:r>
@@ -2737,13 +2566,20 @@
             <a:prstDash val="solid"/>
           </a:ln>
           <a:effectLst>
-            <a:outerShdw sx="100000" sy="100000" kx="0" ky="0" algn="bl" rotWithShape="0" blurRad="63500" dist="25400" dir="8100000">
+            <a:outerShdw blurRad="63500" dist="25400" dir="8100000" algn="bl" rotWithShape="0">
               <a:srgbClr val="000000">
                 <a:alpha val="10000"/>
               </a:srgbClr>
             </a:outerShdw>
           </a:effectLst>
         </p:spPr>
+        <p:txBody>
+          <a:bodyPr/>
+          <a:lstStyle/>
+          <a:p>
+            <a:endParaRPr lang="en-US"/>
+          </a:p>
+        </p:txBody>
       </p:sp>
       <p:sp>
         <p:nvSpPr>
@@ -2769,6 +2605,13 @@
             <a:prstDash val="solid"/>
           </a:ln>
         </p:spPr>
+        <p:txBody>
+          <a:bodyPr/>
+          <a:lstStyle/>
+          <a:p>
+            <a:endParaRPr lang="en-US"/>
+          </a:p>
+        </p:txBody>
       </p:sp>
       <p:sp>
         <p:nvSpPr>
@@ -2791,7 +2634,7 @@
           <a:bodyPr wrap="square" lIns="0" tIns="0" rIns="0" bIns="0" rtlCol="0" anchor="ctr"/>
           <a:lstStyle/>
           <a:p>
-            <a:pPr indent="0" marL="0">
+            <a:pPr marL="0" indent="0">
               <a:buNone/>
             </a:pPr>
             <a:r>
@@ -2827,7 +2670,7 @@
           <a:bodyPr wrap="square" lIns="0" tIns="0" rIns="0" bIns="0" rtlCol="0" anchor="ctr"/>
           <a:lstStyle/>
           <a:p>
-            <a:pPr indent="0" marL="0">
+            <a:pPr marL="0" indent="0">
               <a:buNone/>
             </a:pPr>
             <a:r>
@@ -2858,6 +2701,7 @@
         <a:solidFill>
           <a:srgbClr val="1A2E4A"/>
         </a:solidFill>
+        <a:effectLst/>
       </p:bgPr>
     </p:bg>
     <p:spTree>
@@ -2895,7 +2739,7 @@
           <a:bodyPr wrap="square" lIns="0" tIns="0" rIns="0" bIns="0" rtlCol="0" anchor="ctr"/>
           <a:lstStyle/>
           <a:p>
-            <a:pPr algn="l" indent="0" marL="0">
+            <a:pPr marL="0" indent="0" algn="l">
               <a:buNone/>
             </a:pPr>
             <a:r>
@@ -2934,13 +2778,20 @@
             <a:prstDash val="solid"/>
           </a:ln>
           <a:effectLst>
-            <a:outerShdw sx="100000" sy="100000" kx="0" ky="0" algn="bl" rotWithShape="0" blurRad="63500" dist="25400" dir="8100000">
+            <a:outerShdw blurRad="63500" dist="25400" dir="8100000" algn="bl" rotWithShape="0">
               <a:srgbClr val="000000">
                 <a:alpha val="10000"/>
               </a:srgbClr>
             </a:outerShdw>
           </a:effectLst>
         </p:spPr>
+        <p:txBody>
+          <a:bodyPr/>
+          <a:lstStyle/>
+          <a:p>
+            <a:endParaRPr lang="en-US"/>
+          </a:p>
+        </p:txBody>
       </p:sp>
       <p:sp>
         <p:nvSpPr>
@@ -2963,7 +2814,7 @@
           <a:bodyPr wrap="square" lIns="0" tIns="0" rIns="0" bIns="0" rtlCol="0" anchor="ctr"/>
           <a:lstStyle/>
           <a:p>
-            <a:pPr indent="0" marL="0">
+            <a:pPr marL="0" indent="0">
               <a:buNone/>
             </a:pPr>
             <a:r>
@@ -3002,13 +2853,20 @@
             <a:prstDash val="solid"/>
           </a:ln>
           <a:effectLst>
-            <a:outerShdw sx="100000" sy="100000" kx="0" ky="0" algn="bl" rotWithShape="0" blurRad="63500" dist="25400" dir="8100000">
+            <a:outerShdw blurRad="63500" dist="25400" dir="8100000" algn="bl" rotWithShape="0">
               <a:srgbClr val="000000">
                 <a:alpha val="10000"/>
               </a:srgbClr>
             </a:outerShdw>
           </a:effectLst>
         </p:spPr>
+        <p:txBody>
+          <a:bodyPr/>
+          <a:lstStyle/>
+          <a:p>
+            <a:endParaRPr lang="en-US"/>
+          </a:p>
+        </p:txBody>
       </p:sp>
       <p:sp>
         <p:nvSpPr>
@@ -3034,6 +2892,13 @@
             <a:prstDash val="solid"/>
           </a:ln>
         </p:spPr>
+        <p:txBody>
+          <a:bodyPr/>
+          <a:lstStyle/>
+          <a:p>
+            <a:endParaRPr lang="en-US"/>
+          </a:p>
+        </p:txBody>
       </p:sp>
       <p:sp>
         <p:nvSpPr>
@@ -3056,7 +2921,7 @@
           <a:bodyPr wrap="square" lIns="0" tIns="0" rIns="0" bIns="0" rtlCol="0" anchor="ctr"/>
           <a:lstStyle/>
           <a:p>
-            <a:pPr algn="ctr" indent="0" marL="0">
+            <a:pPr marL="0" indent="0" algn="ctr">
               <a:buNone/>
             </a:pPr>
             <a:r>
@@ -3092,7 +2957,7 @@
           <a:bodyPr wrap="square" lIns="0" tIns="0" rIns="0" bIns="0" rtlCol="0" anchor="ctr"/>
           <a:lstStyle/>
           <a:p>
-            <a:pPr indent="0" marL="0">
+            <a:pPr marL="0" indent="0">
               <a:buNone/>
             </a:pPr>
             <a:r>
@@ -3131,13 +2996,20 @@
             <a:prstDash val="solid"/>
           </a:ln>
           <a:effectLst>
-            <a:outerShdw sx="100000" sy="100000" kx="0" ky="0" algn="bl" rotWithShape="0" blurRad="63500" dist="25400" dir="8100000">
+            <a:outerShdw blurRad="63500" dist="25400" dir="8100000" algn="bl" rotWithShape="0">
               <a:srgbClr val="000000">
                 <a:alpha val="10000"/>
               </a:srgbClr>
             </a:outerShdw>
           </a:effectLst>
         </p:spPr>
+        <p:txBody>
+          <a:bodyPr/>
+          <a:lstStyle/>
+          <a:p>
+            <a:endParaRPr lang="en-US"/>
+          </a:p>
+        </p:txBody>
       </p:sp>
       <p:sp>
         <p:nvSpPr>
@@ -3163,6 +3035,13 @@
             <a:prstDash val="solid"/>
           </a:ln>
         </p:spPr>
+        <p:txBody>
+          <a:bodyPr/>
+          <a:lstStyle/>
+          <a:p>
+            <a:endParaRPr lang="en-US"/>
+          </a:p>
+        </p:txBody>
       </p:sp>
       <p:sp>
         <p:nvSpPr>
@@ -3185,7 +3064,7 @@
           <a:bodyPr wrap="square" lIns="0" tIns="0" rIns="0" bIns="0" rtlCol="0" anchor="ctr"/>
           <a:lstStyle/>
           <a:p>
-            <a:pPr algn="ctr" indent="0" marL="0">
+            <a:pPr marL="0" indent="0" algn="ctr">
               <a:buNone/>
             </a:pPr>
             <a:r>
@@ -3221,7 +3100,7 @@
           <a:bodyPr wrap="square" lIns="0" tIns="0" rIns="0" bIns="0" rtlCol="0" anchor="ctr"/>
           <a:lstStyle/>
           <a:p>
-            <a:pPr indent="0" marL="0">
+            <a:pPr marL="0" indent="0">
               <a:buNone/>
             </a:pPr>
             <a:r>
@@ -3230,7 +3109,23 @@
                   <a:srgbClr val="FFFFFF"/>
                 </a:solidFill>
               </a:rPr>
-              <a:t>RMSE = 982,410 VND — sai số ở mức baseline chấp nhận được</a:t>
+              <a:t>RMSE </a:t>
+            </a:r>
+            <a:r>
+              <a:rPr lang="en-US" sz="950">
+                <a:solidFill>
+                  <a:srgbClr val="FFFFFF"/>
+                </a:solidFill>
+              </a:rPr>
+              <a:t>= 982,410 </a:t>
+            </a:r>
+            <a:r>
+              <a:rPr lang="en-US" sz="950" dirty="0">
+                <a:solidFill>
+                  <a:srgbClr val="FFFFFF"/>
+                </a:solidFill>
+              </a:rPr>
+              <a:t>— sai số ở mức baseline chấp nhận được</a:t>
             </a:r>
             <a:endParaRPr lang="en-US" sz="950" dirty="0"/>
           </a:p>
@@ -3260,13 +3155,20 @@
             <a:prstDash val="solid"/>
           </a:ln>
           <a:effectLst>
-            <a:outerShdw sx="100000" sy="100000" kx="0" ky="0" algn="bl" rotWithShape="0" blurRad="63500" dist="25400" dir="8100000">
+            <a:outerShdw blurRad="63500" dist="25400" dir="8100000" algn="bl" rotWithShape="0">
               <a:srgbClr val="000000">
                 <a:alpha val="10000"/>
               </a:srgbClr>
             </a:outerShdw>
           </a:effectLst>
         </p:spPr>
+        <p:txBody>
+          <a:bodyPr/>
+          <a:lstStyle/>
+          <a:p>
+            <a:endParaRPr lang="en-US"/>
+          </a:p>
+        </p:txBody>
       </p:sp>
       <p:sp>
         <p:nvSpPr>
@@ -3292,6 +3194,13 @@
             <a:prstDash val="solid"/>
           </a:ln>
         </p:spPr>
+        <p:txBody>
+          <a:bodyPr/>
+          <a:lstStyle/>
+          <a:p>
+            <a:endParaRPr lang="en-US"/>
+          </a:p>
+        </p:txBody>
       </p:sp>
       <p:sp>
         <p:nvSpPr>
@@ -3314,7 +3223,7 @@
           <a:bodyPr wrap="square" lIns="0" tIns="0" rIns="0" bIns="0" rtlCol="0" anchor="ctr"/>
           <a:lstStyle/>
           <a:p>
-            <a:pPr algn="ctr" indent="0" marL="0">
+            <a:pPr marL="0" indent="0" algn="ctr">
               <a:buNone/>
             </a:pPr>
             <a:r>
@@ -3350,7 +3259,7 @@
           <a:bodyPr wrap="square" lIns="0" tIns="0" rIns="0" bIns="0" rtlCol="0" anchor="ctr"/>
           <a:lstStyle/>
           <a:p>
-            <a:pPr indent="0" marL="0">
+            <a:pPr marL="0" indent="0">
               <a:buNone/>
             </a:pPr>
             <a:r>
@@ -3389,13 +3298,20 @@
             <a:prstDash val="solid"/>
           </a:ln>
           <a:effectLst>
-            <a:outerShdw sx="100000" sy="100000" kx="0" ky="0" algn="bl" rotWithShape="0" blurRad="63500" dist="25400" dir="8100000">
+            <a:outerShdw blurRad="63500" dist="25400" dir="8100000" algn="bl" rotWithShape="0">
               <a:srgbClr val="000000">
                 <a:alpha val="10000"/>
               </a:srgbClr>
             </a:outerShdw>
           </a:effectLst>
         </p:spPr>
+        <p:txBody>
+          <a:bodyPr/>
+          <a:lstStyle/>
+          <a:p>
+            <a:endParaRPr lang="en-US"/>
+          </a:p>
+        </p:txBody>
       </p:sp>
       <p:sp>
         <p:nvSpPr>
@@ -3421,6 +3337,13 @@
             <a:prstDash val="solid"/>
           </a:ln>
         </p:spPr>
+        <p:txBody>
+          <a:bodyPr/>
+          <a:lstStyle/>
+          <a:p>
+            <a:endParaRPr lang="en-US"/>
+          </a:p>
+        </p:txBody>
       </p:sp>
       <p:sp>
         <p:nvSpPr>
@@ -3443,7 +3366,7 @@
           <a:bodyPr wrap="square" lIns="0" tIns="0" rIns="0" bIns="0" rtlCol="0" anchor="ctr"/>
           <a:lstStyle/>
           <a:p>
-            <a:pPr algn="ctr" indent="0" marL="0">
+            <a:pPr marL="0" indent="0" algn="ctr">
               <a:buNone/>
             </a:pPr>
             <a:r>
@@ -3479,7 +3402,7 @@
           <a:bodyPr wrap="square" lIns="0" tIns="0" rIns="0" bIns="0" rtlCol="0" anchor="ctr"/>
           <a:lstStyle/>
           <a:p>
-            <a:pPr indent="0" marL="0">
+            <a:pPr marL="0" indent="0">
               <a:buNone/>
             </a:pPr>
             <a:r>
@@ -3518,13 +3441,20 @@
             <a:prstDash val="solid"/>
           </a:ln>
           <a:effectLst>
-            <a:outerShdw sx="100000" sy="100000" kx="0" ky="0" algn="bl" rotWithShape="0" blurRad="63500" dist="25400" dir="8100000">
+            <a:outerShdw blurRad="63500" dist="25400" dir="8100000" algn="bl" rotWithShape="0">
               <a:srgbClr val="000000">
                 <a:alpha val="10000"/>
               </a:srgbClr>
             </a:outerShdw>
           </a:effectLst>
         </p:spPr>
+        <p:txBody>
+          <a:bodyPr/>
+          <a:lstStyle/>
+          <a:p>
+            <a:endParaRPr lang="en-US"/>
+          </a:p>
+        </p:txBody>
       </p:sp>
       <p:sp>
         <p:nvSpPr>
@@ -3550,6 +3480,13 @@
             <a:prstDash val="solid"/>
           </a:ln>
         </p:spPr>
+        <p:txBody>
+          <a:bodyPr/>
+          <a:lstStyle/>
+          <a:p>
+            <a:endParaRPr lang="en-US"/>
+          </a:p>
+        </p:txBody>
       </p:sp>
       <p:sp>
         <p:nvSpPr>
@@ -3572,7 +3509,7 @@
           <a:bodyPr wrap="square" lIns="0" tIns="0" rIns="0" bIns="0" rtlCol="0" anchor="ctr"/>
           <a:lstStyle/>
           <a:p>
-            <a:pPr algn="ctr" indent="0" marL="0">
+            <a:pPr marL="0" indent="0" algn="ctr">
               <a:buNone/>
             </a:pPr>
             <a:r>
@@ -3608,7 +3545,7 @@
           <a:bodyPr wrap="square" lIns="0" tIns="0" rIns="0" bIns="0" rtlCol="0" anchor="ctr"/>
           <a:lstStyle/>
           <a:p>
-            <a:pPr indent="0" marL="0">
+            <a:pPr marL="0" indent="0">
               <a:buNone/>
             </a:pPr>
             <a:r>
@@ -3647,13 +3584,20 @@
             <a:prstDash val="solid"/>
           </a:ln>
           <a:effectLst>
-            <a:outerShdw sx="100000" sy="100000" kx="0" ky="0" algn="bl" rotWithShape="0" blurRad="63500" dist="25400" dir="8100000">
+            <a:outerShdw blurRad="63500" dist="25400" dir="8100000" algn="bl" rotWithShape="0">
               <a:srgbClr val="000000">
                 <a:alpha val="10000"/>
               </a:srgbClr>
             </a:outerShdw>
           </a:effectLst>
         </p:spPr>
+        <p:txBody>
+          <a:bodyPr/>
+          <a:lstStyle/>
+          <a:p>
+            <a:endParaRPr lang="en-US"/>
+          </a:p>
+        </p:txBody>
       </p:sp>
       <p:sp>
         <p:nvSpPr>
@@ -3676,7 +3620,7 @@
           <a:bodyPr wrap="square" lIns="0" tIns="0" rIns="0" bIns="0" rtlCol="0" anchor="ctr"/>
           <a:lstStyle/>
           <a:p>
-            <a:pPr indent="0" marL="0">
+            <a:pPr marL="0" indent="0">
               <a:buNone/>
             </a:pPr>
             <a:r>
@@ -3712,46 +3656,43 @@
           <a:bodyPr wrap="square" lIns="0" tIns="0" rIns="0" bIns="0" rtlCol="0" anchor="ctr"/>
           <a:lstStyle/>
           <a:p>
-            <a:pPr indent="0" marL="0">
+            <a:pPr marL="0" indent="0">
               <a:buNone/>
             </a:pPr>
             <a:r>
               <a:rPr lang="en-US" sz="1050" dirty="0">
                 <a:solidFill>
-                  <a:srgbClr val="000000"/>
+                  <a:schemeClr val="bg1"/>
                 </a:solidFill>
               </a:rPr>
               <a:t>• Dataset nhỏ — 545 records</a:t>
             </a:r>
-            <a:endParaRPr lang="en-US" sz="1050" dirty="0"/>
-          </a:p>
-          <a:p>
-            <a:pPr indent="0" marL="0">
+          </a:p>
+          <a:p>
+            <a:pPr marL="0" indent="0">
               <a:buNone/>
             </a:pPr>
             <a:r>
               <a:rPr lang="en-US" sz="1050" dirty="0">
                 <a:solidFill>
-                  <a:srgbClr val="000000"/>
+                  <a:schemeClr val="bg1"/>
                 </a:solidFill>
               </a:rPr>
               <a:t>• Giả định quan hệ tuyến tính</a:t>
             </a:r>
-            <a:endParaRPr lang="en-US" sz="1050" dirty="0"/>
-          </a:p>
-          <a:p>
-            <a:pPr indent="0" marL="0">
+          </a:p>
+          <a:p>
+            <a:pPr marL="0" indent="0">
               <a:buNone/>
             </a:pPr>
             <a:r>
               <a:rPr lang="en-US" sz="1050" dirty="0">
                 <a:solidFill>
-                  <a:srgbClr val="000000"/>
+                  <a:schemeClr val="bg1"/>
                 </a:solidFill>
               </a:rPr>
               <a:t>• Chưa bắt được quan hệ phi tuyến</a:t>
             </a:r>
-            <a:endParaRPr lang="en-US" sz="1050" dirty="0"/>
           </a:p>
         </p:txBody>
       </p:sp>
@@ -3779,13 +3720,20 @@
             <a:prstDash val="solid"/>
           </a:ln>
           <a:effectLst>
-            <a:outerShdw sx="100000" sy="100000" kx="0" ky="0" algn="bl" rotWithShape="0" blurRad="63500" dist="25400" dir="8100000">
+            <a:outerShdw blurRad="63500" dist="25400" dir="8100000" algn="bl" rotWithShape="0">
               <a:srgbClr val="000000">
                 <a:alpha val="10000"/>
               </a:srgbClr>
             </a:outerShdw>
           </a:effectLst>
         </p:spPr>
+        <p:txBody>
+          <a:bodyPr/>
+          <a:lstStyle/>
+          <a:p>
+            <a:endParaRPr lang="en-US"/>
+          </a:p>
+        </p:txBody>
       </p:sp>
       <p:sp>
         <p:nvSpPr>
@@ -3808,7 +3756,7 @@
           <a:bodyPr wrap="square" lIns="0" tIns="0" rIns="0" bIns="0" rtlCol="0" anchor="ctr"/>
           <a:lstStyle/>
           <a:p>
-            <a:pPr indent="0" marL="0">
+            <a:pPr marL="0" indent="0">
               <a:buNone/>
             </a:pPr>
             <a:r>
@@ -3844,60 +3792,56 @@
           <a:bodyPr wrap="square" lIns="0" tIns="0" rIns="0" bIns="0" rtlCol="0" anchor="ctr"/>
           <a:lstStyle/>
           <a:p>
-            <a:pPr indent="0" marL="0">
+            <a:pPr marL="0" indent="0">
               <a:buNone/>
             </a:pPr>
             <a:r>
               <a:rPr lang="en-US" sz="1050" dirty="0">
                 <a:solidFill>
-                  <a:srgbClr val="A8C4D8"/>
+                  <a:schemeClr val="bg1"/>
                 </a:solidFill>
               </a:rPr>
               <a:t>→ Cross-validation cho đánh giá bền vững hơn</a:t>
             </a:r>
-            <a:endParaRPr lang="en-US" sz="1050" dirty="0"/>
-          </a:p>
-          <a:p>
-            <a:pPr indent="0" marL="0">
+          </a:p>
+          <a:p>
+            <a:pPr marL="0" indent="0">
               <a:buNone/>
             </a:pPr>
             <a:r>
               <a:rPr lang="en-US" sz="1050" dirty="0">
                 <a:solidFill>
-                  <a:srgbClr val="A8C4D8"/>
+                  <a:schemeClr val="bg1"/>
                 </a:solidFill>
               </a:rPr>
               <a:t>→ Feature engineering nâng cao</a:t>
             </a:r>
-            <a:endParaRPr lang="en-US" sz="1050" dirty="0"/>
-          </a:p>
-          <a:p>
-            <a:pPr indent="0" marL="0">
+          </a:p>
+          <a:p>
+            <a:pPr marL="0" indent="0">
               <a:buNone/>
             </a:pPr>
             <a:r>
               <a:rPr lang="en-US" sz="1050" dirty="0">
                 <a:solidFill>
-                  <a:srgbClr val="A8C4D8"/>
+                  <a:schemeClr val="bg1"/>
                 </a:solidFill>
               </a:rPr>
               <a:t>→ So sánh: Random Forest, Gradient Boosting</a:t>
             </a:r>
-            <a:endParaRPr lang="en-US" sz="1050" dirty="0"/>
-          </a:p>
-          <a:p>
-            <a:pPr indent="0" marL="0">
+          </a:p>
+          <a:p>
+            <a:pPr marL="0" indent="0">
               <a:buNone/>
             </a:pPr>
             <a:r>
               <a:rPr lang="en-US" sz="1050" dirty="0">
                 <a:solidFill>
-                  <a:srgbClr val="A8C4D8"/>
+                  <a:schemeClr val="bg1"/>
                 </a:solidFill>
               </a:rPr>
               <a:t>→ Hyperparameter tuning</a:t>
             </a:r>
-            <a:endParaRPr lang="en-US" sz="1050" dirty="0"/>
           </a:p>
         </p:txBody>
       </p:sp>
@@ -3917,6 +3861,7 @@
         <a:solidFill>
           <a:srgbClr val="F4F6F9"/>
         </a:solidFill>
+        <a:effectLst/>
       </p:bgPr>
     </p:bg>
     <p:spTree>
@@ -3954,7 +3899,7 @@
           <a:bodyPr wrap="square" lIns="0" tIns="0" rIns="0" bIns="0" rtlCol="0" anchor="ctr"/>
           <a:lstStyle/>
           <a:p>
-            <a:pPr algn="l" indent="0" marL="0">
+            <a:pPr marL="0" indent="0" algn="l">
               <a:buNone/>
             </a:pPr>
             <a:r>
@@ -3996,6 +3941,13 @@
             <a:prstDash val="solid"/>
           </a:ln>
         </p:spPr>
+        <p:txBody>
+          <a:bodyPr/>
+          <a:lstStyle/>
+          <a:p>
+            <a:endParaRPr lang="en-US"/>
+          </a:p>
+        </p:txBody>
       </p:sp>
       <p:sp>
         <p:nvSpPr>
@@ -4023,6 +3975,13 @@
             <a:prstDash val="solid"/>
           </a:ln>
         </p:spPr>
+        <p:txBody>
+          <a:bodyPr/>
+          <a:lstStyle/>
+          <a:p>
+            <a:endParaRPr lang="en-US"/>
+          </a:p>
+        </p:txBody>
       </p:sp>
       <p:sp>
         <p:nvSpPr>
@@ -4045,7 +4004,7 @@
           <a:bodyPr wrap="square" lIns="0" tIns="0" rIns="0" bIns="0" rtlCol="0" anchor="ctr"/>
           <a:lstStyle/>
           <a:p>
-            <a:pPr algn="ctr" indent="0" marL="0">
+            <a:pPr marL="0" indent="0" algn="ctr">
               <a:buNone/>
             </a:pPr>
             <a:r>
@@ -4084,13 +4043,20 @@
             <a:prstDash val="solid"/>
           </a:ln>
           <a:effectLst>
-            <a:outerShdw sx="100000" sy="100000" kx="0" ky="0" algn="bl" rotWithShape="0" blurRad="63500" dist="25400" dir="8100000">
+            <a:outerShdw blurRad="63500" dist="25400" dir="8100000" algn="bl" rotWithShape="0">
               <a:srgbClr val="000000">
                 <a:alpha val="10000"/>
               </a:srgbClr>
             </a:outerShdw>
           </a:effectLst>
         </p:spPr>
+        <p:txBody>
+          <a:bodyPr/>
+          <a:lstStyle/>
+          <a:p>
+            <a:endParaRPr lang="en-US"/>
+          </a:p>
+        </p:txBody>
       </p:sp>
       <p:sp>
         <p:nvSpPr>
@@ -4113,7 +4079,7 @@
           <a:bodyPr wrap="square" lIns="0" tIns="0" rIns="0" bIns="0" rtlCol="0" anchor="ctr"/>
           <a:lstStyle/>
           <a:p>
-            <a:pPr algn="ctr" indent="0" marL="0">
+            <a:pPr marL="0" indent="0" algn="ctr">
               <a:buNone/>
             </a:pPr>
             <a:r>
@@ -4149,7 +4115,7 @@
           <a:bodyPr wrap="square" lIns="0" tIns="0" rIns="0" bIns="0" rtlCol="0" anchor="t"/>
           <a:lstStyle/>
           <a:p>
-            <a:pPr algn="ctr" indent="0" marL="0">
+            <a:pPr marL="0" indent="0" algn="ctr">
               <a:buNone/>
             </a:pPr>
             <a:r>
@@ -4188,13 +4154,20 @@
             <a:prstDash val="solid"/>
           </a:ln>
           <a:effectLst>
-            <a:outerShdw sx="100000" sy="100000" kx="0" ky="0" algn="bl" rotWithShape="0" blurRad="63500" dist="25400" dir="8100000">
+            <a:outerShdw blurRad="63500" dist="25400" dir="8100000" algn="bl" rotWithShape="0">
               <a:srgbClr val="000000">
                 <a:alpha val="10000"/>
               </a:srgbClr>
             </a:outerShdw>
           </a:effectLst>
         </p:spPr>
+        <p:txBody>
+          <a:bodyPr/>
+          <a:lstStyle/>
+          <a:p>
+            <a:endParaRPr lang="en-US"/>
+          </a:p>
+        </p:txBody>
       </p:sp>
       <p:sp>
         <p:nvSpPr>
@@ -4217,7 +4190,7 @@
           <a:bodyPr wrap="square" lIns="0" tIns="0" rIns="0" bIns="0" rtlCol="0" anchor="ctr"/>
           <a:lstStyle/>
           <a:p>
-            <a:pPr algn="ctr" indent="0" marL="0">
+            <a:pPr marL="0" indent="0" algn="ctr">
               <a:buNone/>
             </a:pPr>
             <a:r>
@@ -4253,7 +4226,7 @@
           <a:bodyPr wrap="square" lIns="0" tIns="0" rIns="0" bIns="0" rtlCol="0" anchor="t"/>
           <a:lstStyle/>
           <a:p>
-            <a:pPr algn="ctr" indent="0" marL="0">
+            <a:pPr marL="0" indent="0" algn="ctr">
               <a:buNone/>
             </a:pPr>
             <a:r>
@@ -4292,13 +4265,20 @@
             <a:prstDash val="solid"/>
           </a:ln>
           <a:effectLst>
-            <a:outerShdw sx="100000" sy="100000" kx="0" ky="0" algn="bl" rotWithShape="0" blurRad="63500" dist="25400" dir="8100000">
+            <a:outerShdw blurRad="63500" dist="25400" dir="8100000" algn="bl" rotWithShape="0">
               <a:srgbClr val="000000">
                 <a:alpha val="10000"/>
               </a:srgbClr>
             </a:outerShdw>
           </a:effectLst>
         </p:spPr>
+        <p:txBody>
+          <a:bodyPr/>
+          <a:lstStyle/>
+          <a:p>
+            <a:endParaRPr lang="en-US"/>
+          </a:p>
+        </p:txBody>
       </p:sp>
       <p:sp>
         <p:nvSpPr>
@@ -4321,7 +4301,7 @@
           <a:bodyPr wrap="square" lIns="0" tIns="0" rIns="0" bIns="0" rtlCol="0" anchor="ctr"/>
           <a:lstStyle/>
           <a:p>
-            <a:pPr algn="ctr" indent="0" marL="0">
+            <a:pPr marL="0" indent="0" algn="ctr">
               <a:buNone/>
             </a:pPr>
             <a:r>
@@ -4357,7 +4337,7 @@
           <a:bodyPr wrap="square" lIns="0" tIns="0" rIns="0" bIns="0" rtlCol="0" anchor="t"/>
           <a:lstStyle/>
           <a:p>
-            <a:pPr algn="ctr" indent="0" marL="0">
+            <a:pPr marL="0" indent="0" algn="ctr">
               <a:buNone/>
             </a:pPr>
             <a:r>
@@ -4396,13 +4376,20 @@
             <a:prstDash val="solid"/>
           </a:ln>
           <a:effectLst>
-            <a:outerShdw sx="100000" sy="100000" kx="0" ky="0" algn="bl" rotWithShape="0" blurRad="63500" dist="25400" dir="8100000">
+            <a:outerShdw blurRad="63500" dist="25400" dir="8100000" algn="bl" rotWithShape="0">
               <a:srgbClr val="000000">
                 <a:alpha val="10000"/>
               </a:srgbClr>
             </a:outerShdw>
           </a:effectLst>
         </p:spPr>
+        <p:txBody>
+          <a:bodyPr/>
+          <a:lstStyle/>
+          <a:p>
+            <a:endParaRPr lang="en-US"/>
+          </a:p>
+        </p:txBody>
       </p:sp>
       <p:sp>
         <p:nvSpPr>
@@ -4425,7 +4412,7 @@
           <a:bodyPr wrap="square" lIns="0" tIns="0" rIns="0" bIns="0" rtlCol="0" anchor="ctr"/>
           <a:lstStyle/>
           <a:p>
-            <a:pPr algn="ctr" indent="0" marL="0">
+            <a:pPr marL="0" indent="0" algn="ctr">
               <a:buNone/>
             </a:pPr>
             <a:r>
@@ -4461,7 +4448,7 @@
           <a:bodyPr wrap="square" lIns="0" tIns="0" rIns="0" bIns="0" rtlCol="0" anchor="t"/>
           <a:lstStyle/>
           <a:p>
-            <a:pPr algn="ctr" indent="0" marL="0">
+            <a:pPr marL="0" indent="0" algn="ctr">
               <a:buNone/>
             </a:pPr>
             <a:r>
@@ -4484,8 +4471,8 @@
         </p:nvSpPr>
         <p:spPr>
           <a:xfrm>
-            <a:off x="365760" y="2331720"/>
-            <a:ext cx="3931920" cy="2468880"/>
+            <a:off x="365760" y="2331721"/>
+            <a:ext cx="3931920" cy="1915668"/>
           </a:xfrm>
           <a:prstGeom prst="rect">
             <a:avLst/>
@@ -4500,13 +4487,20 @@
             <a:prstDash val="solid"/>
           </a:ln>
           <a:effectLst>
-            <a:outerShdw sx="100000" sy="100000" kx="0" ky="0" algn="bl" rotWithShape="0" blurRad="63500" dist="25400" dir="8100000">
+            <a:outerShdw blurRad="63500" dist="25400" dir="8100000" algn="bl" rotWithShape="0">
               <a:srgbClr val="000000">
                 <a:alpha val="10000"/>
               </a:srgbClr>
             </a:outerShdw>
           </a:effectLst>
         </p:spPr>
+        <p:txBody>
+          <a:bodyPr/>
+          <a:lstStyle/>
+          <a:p>
+            <a:endParaRPr lang="en-US"/>
+          </a:p>
+        </p:txBody>
       </p:sp>
       <p:sp>
         <p:nvSpPr>
@@ -4529,7 +4523,7 @@
           <a:bodyPr wrap="square" lIns="0" tIns="0" rIns="0" bIns="0" rtlCol="0" anchor="ctr"/>
           <a:lstStyle/>
           <a:p>
-            <a:pPr indent="0" marL="0">
+            <a:pPr marL="0" indent="0">
               <a:buNone/>
             </a:pPr>
             <a:r>
@@ -4553,7 +4547,7 @@
         <p:spPr>
           <a:xfrm>
             <a:off x="548640" y="2743200"/>
-            <a:ext cx="3657600" cy="1828800"/>
+            <a:ext cx="3657600" cy="1348740"/>
           </a:xfrm>
           <a:prstGeom prst="rect">
             <a:avLst/>
@@ -4565,7 +4559,7 @@
           <a:bodyPr wrap="square" lIns="0" tIns="0" rIns="0" bIns="0" rtlCol="0" anchor="ctr"/>
           <a:lstStyle/>
           <a:p>
-            <a:pPr indent="0" marL="0">
+            <a:pPr marL="0" indent="0">
               <a:buNone/>
             </a:pPr>
             <a:r>
@@ -4579,7 +4573,7 @@
             <a:endParaRPr lang="en-US" sz="1200" dirty="0"/>
           </a:p>
           <a:p>
-            <a:pPr indent="0" marL="0">
+            <a:pPr marL="0" indent="0">
               <a:buNone/>
             </a:pPr>
             <a:r>
@@ -4603,7 +4597,7 @@
         <p:spPr>
           <a:xfrm>
             <a:off x="4572000" y="2331720"/>
-            <a:ext cx="4206240" cy="2468880"/>
+            <a:ext cx="4206240" cy="1915669"/>
           </a:xfrm>
           <a:prstGeom prst="rect">
             <a:avLst/>
@@ -4618,13 +4612,20 @@
             <a:prstDash val="solid"/>
           </a:ln>
           <a:effectLst>
-            <a:outerShdw sx="100000" sy="100000" kx="0" ky="0" algn="bl" rotWithShape="0" blurRad="63500" dist="25400" dir="8100000">
+            <a:outerShdw blurRad="63500" dist="25400" dir="8100000" algn="bl" rotWithShape="0">
               <a:srgbClr val="000000">
                 <a:alpha val="10000"/>
               </a:srgbClr>
             </a:outerShdw>
           </a:effectLst>
         </p:spPr>
+        <p:txBody>
+          <a:bodyPr/>
+          <a:lstStyle/>
+          <a:p>
+            <a:endParaRPr lang="en-US"/>
+          </a:p>
+        </p:txBody>
       </p:sp>
       <p:sp>
         <p:nvSpPr>
@@ -4647,7 +4648,7 @@
           <a:bodyPr wrap="square" lIns="0" tIns="0" rIns="0" bIns="0" rtlCol="0" anchor="ctr"/>
           <a:lstStyle/>
           <a:p>
-            <a:pPr indent="0" marL="0">
+            <a:pPr marL="0" indent="0">
               <a:buNone/>
             </a:pPr>
             <a:r>
@@ -4670,8 +4671,8 @@
         </p:nvSpPr>
         <p:spPr>
           <a:xfrm>
-            <a:off x="4709160" y="2743200"/>
-            <a:ext cx="3931920" cy="1828800"/>
+            <a:off x="4781005" y="2730138"/>
+            <a:ext cx="3931920" cy="1264615"/>
           </a:xfrm>
           <a:prstGeom prst="rect">
             <a:avLst/>
@@ -4683,7 +4684,7 @@
           <a:bodyPr wrap="square" lIns="0" tIns="0" rIns="0" bIns="0" rtlCol="0" anchor="ctr"/>
           <a:lstStyle/>
           <a:p>
-            <a:pPr indent="0" marL="0">
+            <a:pPr marL="0" indent="0">
               <a:buNone/>
             </a:pPr>
             <a:r>
@@ -4692,44 +4693,52 @@
                   <a:srgbClr val="2C3E50"/>
                 </a:solidFill>
               </a:rPr>
-              <a:t>bedrooms, bathrooms, stories, parking</a:t>
-            </a:r>
-            <a:endParaRPr lang="en-US" sz="1150" dirty="0"/>
-          </a:p>
-          <a:p>
-            <a:pPr indent="0" marL="0">
+              <a:t>bedrooms, bathrooms, stories</a:t>
+            </a:r>
+            <a:r>
+              <a:rPr lang="en-US" sz="1150">
+                <a:solidFill>
+                  <a:srgbClr val="2C3E50"/>
+                </a:solidFill>
+              </a:rPr>
+              <a:t>, parking</a:t>
+            </a:r>
+            <a:endParaRPr lang="en-US" sz="1150"/>
+          </a:p>
+          <a:p>
+            <a:pPr marL="0" indent="0">
               <a:buNone/>
             </a:pPr>
             <a:r>
-              <a:rPr lang="en-US" sz="1150" dirty="0">
+              <a:rPr lang="en-US" sz="1150">
                 <a:solidFill>
                   <a:srgbClr val="2C3E50"/>
                 </a:solidFill>
               </a:rPr>
               <a:t>mainroad, guestroom, basement</a:t>
             </a:r>
-            <a:endParaRPr lang="en-US" sz="1150" dirty="0"/>
-          </a:p>
-          <a:p>
-            <a:pPr indent="0" marL="0">
+            <a:endParaRPr lang="en-US" sz="1150"/>
+          </a:p>
+          <a:p>
+            <a:pPr marL="0" indent="0">
               <a:buNone/>
             </a:pPr>
             <a:r>
-              <a:rPr lang="en-US" sz="1150" dirty="0">
+              <a:rPr lang="en-US" sz="1150">
                 <a:solidFill>
                   <a:srgbClr val="2C3E50"/>
                 </a:solidFill>
               </a:rPr>
               <a:t>hotwaterheating, airconditioning</a:t>
             </a:r>
-            <a:endParaRPr lang="en-US" sz="1150" dirty="0"/>
-          </a:p>
-          <a:p>
-            <a:pPr indent="0" marL="0">
+            <a:endParaRPr lang="en-US" sz="1150"/>
+          </a:p>
+          <a:p>
+            <a:pPr marL="0" indent="0">
               <a:buNone/>
             </a:pPr>
             <a:r>
-              <a:rPr lang="en-US" sz="1150" dirty="0">
+              <a:rPr lang="en-US" sz="1150">
                 <a:solidFill>
                   <a:srgbClr val="2C3E50"/>
                 </a:solidFill>
@@ -4748,7 +4757,7 @@
         </p:nvSpPr>
         <p:spPr>
           <a:xfrm>
-            <a:off x="365760" y="4800600"/>
+            <a:off x="372291" y="4784599"/>
             <a:ext cx="8412480" cy="228600"/>
           </a:xfrm>
           <a:prstGeom prst="rect">
@@ -4761,7 +4770,7 @@
           <a:bodyPr wrap="square" lIns="0" tIns="0" rIns="0" bIns="0" rtlCol="0" anchor="ctr"/>
           <a:lstStyle/>
           <a:p>
-            <a:pPr algn="ctr" indent="0" marL="0">
+            <a:pPr marL="0" indent="0" algn="ctr">
               <a:buNone/>
             </a:pPr>
             <a:r>
@@ -4770,7 +4779,23 @@
                   <a:srgbClr val="8FA0B2"/>
                 </a:solidFill>
               </a:rPr>
-              <a:t>⚙️  Train-Test Split: 80% / 20%  |  Feature Scaling: StandardScaler</a:t>
+              <a:t>⚙️  </a:t>
+            </a:r>
+            <a:r>
+              <a:rPr lang="en-US" sz="1000" b="1" i="1" dirty="0">
+                <a:solidFill>
+                  <a:srgbClr val="8FA0B2"/>
+                </a:solidFill>
+              </a:rPr>
+              <a:t>Train-Test Split: 80% / 20%  </a:t>
+            </a:r>
+            <a:r>
+              <a:rPr lang="en-US" sz="1000" i="1" dirty="0">
+                <a:solidFill>
+                  <a:srgbClr val="8FA0B2"/>
+                </a:solidFill>
+              </a:rPr>
+              <a:t>|  Feature Scaling: StandardScaler</a:t>
             </a:r>
             <a:endParaRPr lang="en-US" sz="1000" dirty="0"/>
           </a:p>
@@ -4792,6 +4817,7 @@
         <a:solidFill>
           <a:srgbClr val="1A2E4A"/>
         </a:solidFill>
+        <a:effectLst/>
       </p:bgPr>
     </p:bg>
     <p:spTree>
@@ -4834,6 +4860,13 @@
             <a:prstDash val="solid"/>
           </a:ln>
         </p:spPr>
+        <p:txBody>
+          <a:bodyPr/>
+          <a:lstStyle/>
+          <a:p>
+            <a:endParaRPr lang="en-US"/>
+          </a:p>
+        </p:txBody>
       </p:sp>
       <p:sp>
         <p:nvSpPr>
@@ -4856,7 +4889,7 @@
           <a:bodyPr wrap="square" lIns="0" tIns="0" rIns="0" bIns="0" rtlCol="0" anchor="ctr"/>
           <a:lstStyle/>
           <a:p>
-            <a:pPr algn="ctr" indent="0" marL="0">
+            <a:pPr marL="0" indent="0" algn="ctr">
               <a:buNone/>
             </a:pPr>
             <a:r>
@@ -4892,7 +4925,7 @@
           <a:bodyPr wrap="square" lIns="0" tIns="0" rIns="0" bIns="0" rtlCol="0" anchor="ctr"/>
           <a:lstStyle/>
           <a:p>
-            <a:pPr algn="l" indent="0" marL="0">
+            <a:pPr marL="0" indent="0" algn="l">
               <a:buNone/>
             </a:pPr>
             <a:r>
@@ -4931,13 +4964,20 @@
             <a:prstDash val="solid"/>
           </a:ln>
           <a:effectLst>
-            <a:outerShdw sx="100000" sy="100000" kx="0" ky="0" algn="bl" rotWithShape="0" blurRad="63500" dist="25400" dir="8100000">
+            <a:outerShdw blurRad="63500" dist="25400" dir="8100000" algn="bl" rotWithShape="0">
               <a:srgbClr val="000000">
                 <a:alpha val="10000"/>
               </a:srgbClr>
             </a:outerShdw>
           </a:effectLst>
         </p:spPr>
+        <p:txBody>
+          <a:bodyPr/>
+          <a:lstStyle/>
+          <a:p>
+            <a:endParaRPr lang="en-US"/>
+          </a:p>
+        </p:txBody>
       </p:sp>
       <p:sp>
         <p:nvSpPr>
@@ -4963,6 +5003,13 @@
             <a:prstDash val="solid"/>
           </a:ln>
         </p:spPr>
+        <p:txBody>
+          <a:bodyPr/>
+          <a:lstStyle/>
+          <a:p>
+            <a:endParaRPr lang="en-US"/>
+          </a:p>
+        </p:txBody>
       </p:sp>
       <p:sp>
         <p:nvSpPr>
@@ -4985,7 +5032,7 @@
           <a:bodyPr wrap="square" lIns="0" tIns="0" rIns="0" bIns="0" rtlCol="0" anchor="ctr"/>
           <a:lstStyle/>
           <a:p>
-            <a:pPr algn="ctr" indent="0" marL="0">
+            <a:pPr marL="0" indent="0" algn="ctr">
               <a:buNone/>
             </a:pPr>
             <a:r>
@@ -5021,7 +5068,7 @@
           <a:bodyPr wrap="square" lIns="0" tIns="0" rIns="0" bIns="0" rtlCol="0" anchor="ctr"/>
           <a:lstStyle/>
           <a:p>
-            <a:pPr algn="ctr" indent="0" marL="0">
+            <a:pPr marL="0" indent="0" algn="ctr">
               <a:buNone/>
             </a:pPr>
             <a:r>
@@ -5057,7 +5104,7 @@
           <a:bodyPr wrap="square" lIns="0" tIns="0" rIns="0" bIns="0" rtlCol="0" anchor="ctr"/>
           <a:lstStyle/>
           <a:p>
-            <a:pPr algn="ctr" indent="0" marL="0">
+            <a:pPr marL="0" indent="0" algn="ctr">
               <a:buNone/>
             </a:pPr>
             <a:r>
@@ -5095,6 +5142,13 @@
             <a:tailEnd type="arrow"/>
           </a:ln>
         </p:spPr>
+        <p:txBody>
+          <a:bodyPr/>
+          <a:lstStyle/>
+          <a:p>
+            <a:endParaRPr lang="en-US"/>
+          </a:p>
+        </p:txBody>
       </p:sp>
       <p:sp>
         <p:nvSpPr>
@@ -5120,13 +5174,20 @@
             <a:prstDash val="solid"/>
           </a:ln>
           <a:effectLst>
-            <a:outerShdw sx="100000" sy="100000" kx="0" ky="0" algn="bl" rotWithShape="0" blurRad="63500" dist="25400" dir="8100000">
+            <a:outerShdw blurRad="63500" dist="25400" dir="8100000" algn="bl" rotWithShape="0">
               <a:srgbClr val="000000">
                 <a:alpha val="10000"/>
               </a:srgbClr>
             </a:outerShdw>
           </a:effectLst>
         </p:spPr>
+        <p:txBody>
+          <a:bodyPr/>
+          <a:lstStyle/>
+          <a:p>
+            <a:endParaRPr lang="en-US"/>
+          </a:p>
+        </p:txBody>
       </p:sp>
       <p:sp>
         <p:nvSpPr>
@@ -5152,6 +5213,13 @@
             <a:prstDash val="solid"/>
           </a:ln>
         </p:spPr>
+        <p:txBody>
+          <a:bodyPr/>
+          <a:lstStyle/>
+          <a:p>
+            <a:endParaRPr lang="en-US"/>
+          </a:p>
+        </p:txBody>
       </p:sp>
       <p:sp>
         <p:nvSpPr>
@@ -5174,7 +5242,7 @@
           <a:bodyPr wrap="square" lIns="0" tIns="0" rIns="0" bIns="0" rtlCol="0" anchor="ctr"/>
           <a:lstStyle/>
           <a:p>
-            <a:pPr algn="ctr" indent="0" marL="0">
+            <a:pPr marL="0" indent="0" algn="ctr">
               <a:buNone/>
             </a:pPr>
             <a:r>
@@ -5210,7 +5278,7 @@
           <a:bodyPr wrap="square" lIns="0" tIns="0" rIns="0" bIns="0" rtlCol="0" anchor="ctr"/>
           <a:lstStyle/>
           <a:p>
-            <a:pPr algn="ctr" indent="0" marL="0">
+            <a:pPr marL="0" indent="0" algn="ctr">
               <a:buNone/>
             </a:pPr>
             <a:r>
@@ -5246,7 +5314,7 @@
           <a:bodyPr wrap="square" lIns="0" tIns="0" rIns="0" bIns="0" rtlCol="0" anchor="ctr"/>
           <a:lstStyle/>
           <a:p>
-            <a:pPr algn="ctr" indent="0" marL="0">
+            <a:pPr marL="0" indent="0" algn="ctr">
               <a:buNone/>
             </a:pPr>
             <a:r>
@@ -5284,6 +5352,13 @@
             <a:tailEnd type="arrow"/>
           </a:ln>
         </p:spPr>
+        <p:txBody>
+          <a:bodyPr/>
+          <a:lstStyle/>
+          <a:p>
+            <a:endParaRPr lang="en-US"/>
+          </a:p>
+        </p:txBody>
       </p:sp>
       <p:sp>
         <p:nvSpPr>
@@ -5309,13 +5384,20 @@
             <a:prstDash val="solid"/>
           </a:ln>
           <a:effectLst>
-            <a:outerShdw sx="100000" sy="100000" kx="0" ky="0" algn="bl" rotWithShape="0" blurRad="63500" dist="25400" dir="8100000">
+            <a:outerShdw blurRad="63500" dist="25400" dir="8100000" algn="bl" rotWithShape="0">
               <a:srgbClr val="000000">
                 <a:alpha val="10000"/>
               </a:srgbClr>
             </a:outerShdw>
           </a:effectLst>
         </p:spPr>
+        <p:txBody>
+          <a:bodyPr/>
+          <a:lstStyle/>
+          <a:p>
+            <a:endParaRPr lang="en-US"/>
+          </a:p>
+        </p:txBody>
       </p:sp>
       <p:sp>
         <p:nvSpPr>
@@ -5341,6 +5423,13 @@
             <a:prstDash val="solid"/>
           </a:ln>
         </p:spPr>
+        <p:txBody>
+          <a:bodyPr/>
+          <a:lstStyle/>
+          <a:p>
+            <a:endParaRPr lang="en-US"/>
+          </a:p>
+        </p:txBody>
       </p:sp>
       <p:sp>
         <p:nvSpPr>
@@ -5363,7 +5452,7 @@
           <a:bodyPr wrap="square" lIns="0" tIns="0" rIns="0" bIns="0" rtlCol="0" anchor="ctr"/>
           <a:lstStyle/>
           <a:p>
-            <a:pPr algn="ctr" indent="0" marL="0">
+            <a:pPr marL="0" indent="0" algn="ctr">
               <a:buNone/>
             </a:pPr>
             <a:r>
@@ -5399,7 +5488,7 @@
           <a:bodyPr wrap="square" lIns="0" tIns="0" rIns="0" bIns="0" rtlCol="0" anchor="ctr"/>
           <a:lstStyle/>
           <a:p>
-            <a:pPr algn="ctr" indent="0" marL="0">
+            <a:pPr marL="0" indent="0" algn="ctr">
               <a:buNone/>
             </a:pPr>
             <a:r>
@@ -5435,7 +5524,7 @@
           <a:bodyPr wrap="square" lIns="0" tIns="0" rIns="0" bIns="0" rtlCol="0" anchor="ctr"/>
           <a:lstStyle/>
           <a:p>
-            <a:pPr algn="ctr" indent="0" marL="0">
+            <a:pPr marL="0" indent="0" algn="ctr">
               <a:buNone/>
             </a:pPr>
             <a:r>
@@ -5473,6 +5562,13 @@
             <a:tailEnd type="arrow"/>
           </a:ln>
         </p:spPr>
+        <p:txBody>
+          <a:bodyPr/>
+          <a:lstStyle/>
+          <a:p>
+            <a:endParaRPr lang="en-US"/>
+          </a:p>
+        </p:txBody>
       </p:sp>
       <p:sp>
         <p:nvSpPr>
@@ -5498,13 +5594,20 @@
             <a:prstDash val="solid"/>
           </a:ln>
           <a:effectLst>
-            <a:outerShdw sx="100000" sy="100000" kx="0" ky="0" algn="bl" rotWithShape="0" blurRad="63500" dist="25400" dir="8100000">
+            <a:outerShdw blurRad="63500" dist="25400" dir="8100000" algn="bl" rotWithShape="0">
               <a:srgbClr val="000000">
                 <a:alpha val="10000"/>
               </a:srgbClr>
             </a:outerShdw>
           </a:effectLst>
         </p:spPr>
+        <p:txBody>
+          <a:bodyPr/>
+          <a:lstStyle/>
+          <a:p>
+            <a:endParaRPr lang="en-US"/>
+          </a:p>
+        </p:txBody>
       </p:sp>
       <p:sp>
         <p:nvSpPr>
@@ -5530,6 +5633,13 @@
             <a:prstDash val="solid"/>
           </a:ln>
         </p:spPr>
+        <p:txBody>
+          <a:bodyPr/>
+          <a:lstStyle/>
+          <a:p>
+            <a:endParaRPr lang="en-US"/>
+          </a:p>
+        </p:txBody>
       </p:sp>
       <p:sp>
         <p:nvSpPr>
@@ -5552,7 +5662,7 @@
           <a:bodyPr wrap="square" lIns="0" tIns="0" rIns="0" bIns="0" rtlCol="0" anchor="ctr"/>
           <a:lstStyle/>
           <a:p>
-            <a:pPr algn="ctr" indent="0" marL="0">
+            <a:pPr marL="0" indent="0" algn="ctr">
               <a:buNone/>
             </a:pPr>
             <a:r>
@@ -5588,7 +5698,7 @@
           <a:bodyPr wrap="square" lIns="0" tIns="0" rIns="0" bIns="0" rtlCol="0" anchor="ctr"/>
           <a:lstStyle/>
           <a:p>
-            <a:pPr algn="ctr" indent="0" marL="0">
+            <a:pPr marL="0" indent="0" algn="ctr">
               <a:buNone/>
             </a:pPr>
             <a:r>
@@ -5624,7 +5734,7 @@
           <a:bodyPr wrap="square" lIns="0" tIns="0" rIns="0" bIns="0" rtlCol="0" anchor="ctr"/>
           <a:lstStyle/>
           <a:p>
-            <a:pPr algn="ctr" indent="0" marL="0">
+            <a:pPr marL="0" indent="0" algn="ctr">
               <a:buNone/>
             </a:pPr>
             <a:r>
@@ -5662,6 +5772,13 @@
             <a:tailEnd type="arrow"/>
           </a:ln>
         </p:spPr>
+        <p:txBody>
+          <a:bodyPr/>
+          <a:lstStyle/>
+          <a:p>
+            <a:endParaRPr lang="en-US"/>
+          </a:p>
+        </p:txBody>
       </p:sp>
       <p:sp>
         <p:nvSpPr>
@@ -5687,13 +5804,20 @@
             <a:prstDash val="solid"/>
           </a:ln>
           <a:effectLst>
-            <a:outerShdw sx="100000" sy="100000" kx="0" ky="0" algn="bl" rotWithShape="0" blurRad="63500" dist="25400" dir="8100000">
+            <a:outerShdw blurRad="63500" dist="25400" dir="8100000" algn="bl" rotWithShape="0">
               <a:srgbClr val="000000">
                 <a:alpha val="10000"/>
               </a:srgbClr>
             </a:outerShdw>
           </a:effectLst>
         </p:spPr>
+        <p:txBody>
+          <a:bodyPr/>
+          <a:lstStyle/>
+          <a:p>
+            <a:endParaRPr lang="en-US"/>
+          </a:p>
+        </p:txBody>
       </p:sp>
       <p:sp>
         <p:nvSpPr>
@@ -5719,6 +5843,13 @@
             <a:prstDash val="solid"/>
           </a:ln>
         </p:spPr>
+        <p:txBody>
+          <a:bodyPr/>
+          <a:lstStyle/>
+          <a:p>
+            <a:endParaRPr lang="en-US"/>
+          </a:p>
+        </p:txBody>
       </p:sp>
       <p:sp>
         <p:nvSpPr>
@@ -5741,7 +5872,7 @@
           <a:bodyPr wrap="square" lIns="0" tIns="0" rIns="0" bIns="0" rtlCol="0" anchor="ctr"/>
           <a:lstStyle/>
           <a:p>
-            <a:pPr algn="ctr" indent="0" marL="0">
+            <a:pPr marL="0" indent="0" algn="ctr">
               <a:buNone/>
             </a:pPr>
             <a:r>
@@ -5777,7 +5908,7 @@
           <a:bodyPr wrap="square" lIns="0" tIns="0" rIns="0" bIns="0" rtlCol="0" anchor="ctr"/>
           <a:lstStyle/>
           <a:p>
-            <a:pPr algn="ctr" indent="0" marL="0">
+            <a:pPr marL="0" indent="0" algn="ctr">
               <a:buNone/>
             </a:pPr>
             <a:r>
@@ -5813,7 +5944,7 @@
           <a:bodyPr wrap="square" lIns="0" tIns="0" rIns="0" bIns="0" rtlCol="0" anchor="ctr"/>
           <a:lstStyle/>
           <a:p>
-            <a:pPr algn="ctr" indent="0" marL="0">
+            <a:pPr marL="0" indent="0" algn="ctr">
               <a:buNone/>
             </a:pPr>
             <a:r>
@@ -5851,6 +5982,13 @@
             <a:tailEnd type="arrow"/>
           </a:ln>
         </p:spPr>
+        <p:txBody>
+          <a:bodyPr/>
+          <a:lstStyle/>
+          <a:p>
+            <a:endParaRPr lang="en-US"/>
+          </a:p>
+        </p:txBody>
       </p:sp>
       <p:sp>
         <p:nvSpPr>
@@ -5876,13 +6014,20 @@
             <a:prstDash val="solid"/>
           </a:ln>
           <a:effectLst>
-            <a:outerShdw sx="100000" sy="100000" kx="0" ky="0" algn="bl" rotWithShape="0" blurRad="63500" dist="25400" dir="8100000">
+            <a:outerShdw blurRad="63500" dist="25400" dir="8100000" algn="bl" rotWithShape="0">
               <a:srgbClr val="000000">
                 <a:alpha val="10000"/>
               </a:srgbClr>
             </a:outerShdw>
           </a:effectLst>
         </p:spPr>
+        <p:txBody>
+          <a:bodyPr/>
+          <a:lstStyle/>
+          <a:p>
+            <a:endParaRPr lang="en-US"/>
+          </a:p>
+        </p:txBody>
       </p:sp>
       <p:sp>
         <p:nvSpPr>
@@ -5908,6 +6053,13 @@
             <a:prstDash val="solid"/>
           </a:ln>
         </p:spPr>
+        <p:txBody>
+          <a:bodyPr/>
+          <a:lstStyle/>
+          <a:p>
+            <a:endParaRPr lang="en-US"/>
+          </a:p>
+        </p:txBody>
       </p:sp>
       <p:sp>
         <p:nvSpPr>
@@ -5930,7 +6082,7 @@
           <a:bodyPr wrap="square" lIns="0" tIns="0" rIns="0" bIns="0" rtlCol="0" anchor="ctr"/>
           <a:lstStyle/>
           <a:p>
-            <a:pPr algn="ctr" indent="0" marL="0">
+            <a:pPr marL="0" indent="0" algn="ctr">
               <a:buNone/>
             </a:pPr>
             <a:r>
@@ -5966,7 +6118,7 @@
           <a:bodyPr wrap="square" lIns="0" tIns="0" rIns="0" bIns="0" rtlCol="0" anchor="ctr"/>
           <a:lstStyle/>
           <a:p>
-            <a:pPr algn="ctr" indent="0" marL="0">
+            <a:pPr marL="0" indent="0" algn="ctr">
               <a:buNone/>
             </a:pPr>
             <a:r>
@@ -6002,7 +6154,7 @@
           <a:bodyPr wrap="square" lIns="0" tIns="0" rIns="0" bIns="0" rtlCol="0" anchor="ctr"/>
           <a:lstStyle/>
           <a:p>
-            <a:pPr algn="ctr" indent="0" marL="0">
+            <a:pPr marL="0" indent="0" algn="ctr">
               <a:buNone/>
             </a:pPr>
             <a:r>
@@ -6040,6 +6192,13 @@
             <a:tailEnd type="arrow"/>
           </a:ln>
         </p:spPr>
+        <p:txBody>
+          <a:bodyPr/>
+          <a:lstStyle/>
+          <a:p>
+            <a:endParaRPr lang="en-US"/>
+          </a:p>
+        </p:txBody>
       </p:sp>
       <p:sp>
         <p:nvSpPr>
@@ -6065,13 +6224,20 @@
             <a:prstDash val="solid"/>
           </a:ln>
           <a:effectLst>
-            <a:outerShdw sx="100000" sy="100000" kx="0" ky="0" algn="bl" rotWithShape="0" blurRad="63500" dist="25400" dir="8100000">
+            <a:outerShdw blurRad="63500" dist="25400" dir="8100000" algn="bl" rotWithShape="0">
               <a:srgbClr val="000000">
                 <a:alpha val="10000"/>
               </a:srgbClr>
             </a:outerShdw>
           </a:effectLst>
         </p:spPr>
+        <p:txBody>
+          <a:bodyPr/>
+          <a:lstStyle/>
+          <a:p>
+            <a:endParaRPr lang="en-US"/>
+          </a:p>
+        </p:txBody>
       </p:sp>
       <p:sp>
         <p:nvSpPr>
@@ -6097,6 +6263,13 @@
             <a:prstDash val="solid"/>
           </a:ln>
         </p:spPr>
+        <p:txBody>
+          <a:bodyPr/>
+          <a:lstStyle/>
+          <a:p>
+            <a:endParaRPr lang="en-US"/>
+          </a:p>
+        </p:txBody>
       </p:sp>
       <p:sp>
         <p:nvSpPr>
@@ -6119,7 +6292,7 @@
           <a:bodyPr wrap="square" lIns="0" tIns="0" rIns="0" bIns="0" rtlCol="0" anchor="ctr"/>
           <a:lstStyle/>
           <a:p>
-            <a:pPr algn="ctr" indent="0" marL="0">
+            <a:pPr marL="0" indent="0" algn="ctr">
               <a:buNone/>
             </a:pPr>
             <a:r>
@@ -6155,7 +6328,7 @@
           <a:bodyPr wrap="square" lIns="0" tIns="0" rIns="0" bIns="0" rtlCol="0" anchor="ctr"/>
           <a:lstStyle/>
           <a:p>
-            <a:pPr algn="ctr" indent="0" marL="0">
+            <a:pPr marL="0" indent="0" algn="ctr">
               <a:buNone/>
             </a:pPr>
             <a:r>
@@ -6191,7 +6364,7 @@
           <a:bodyPr wrap="square" lIns="0" tIns="0" rIns="0" bIns="0" rtlCol="0" anchor="ctr"/>
           <a:lstStyle/>
           <a:p>
-            <a:pPr algn="ctr" indent="0" marL="0">
+            <a:pPr marL="0" indent="0" algn="ctr">
               <a:buNone/>
             </a:pPr>
             <a:r>
@@ -6229,6 +6402,13 @@
             <a:tailEnd type="arrow"/>
           </a:ln>
         </p:spPr>
+        <p:txBody>
+          <a:bodyPr/>
+          <a:lstStyle/>
+          <a:p>
+            <a:endParaRPr lang="en-US"/>
+          </a:p>
+        </p:txBody>
       </p:sp>
       <p:sp>
         <p:nvSpPr>
@@ -6254,13 +6434,20 @@
             <a:prstDash val="solid"/>
           </a:ln>
           <a:effectLst>
-            <a:outerShdw sx="100000" sy="100000" kx="0" ky="0" algn="bl" rotWithShape="0" blurRad="63500" dist="25400" dir="8100000">
+            <a:outerShdw blurRad="63500" dist="25400" dir="8100000" algn="bl" rotWithShape="0">
               <a:srgbClr val="000000">
                 <a:alpha val="10000"/>
               </a:srgbClr>
             </a:outerShdw>
           </a:effectLst>
         </p:spPr>
+        <p:txBody>
+          <a:bodyPr/>
+          <a:lstStyle/>
+          <a:p>
+            <a:endParaRPr lang="en-US"/>
+          </a:p>
+        </p:txBody>
       </p:sp>
       <p:sp>
         <p:nvSpPr>
@@ -6286,6 +6473,13 @@
             <a:prstDash val="solid"/>
           </a:ln>
         </p:spPr>
+        <p:txBody>
+          <a:bodyPr/>
+          <a:lstStyle/>
+          <a:p>
+            <a:endParaRPr lang="en-US"/>
+          </a:p>
+        </p:txBody>
       </p:sp>
       <p:sp>
         <p:nvSpPr>
@@ -6308,7 +6502,7 @@
           <a:bodyPr wrap="square" lIns="0" tIns="0" rIns="0" bIns="0" rtlCol="0" anchor="ctr"/>
           <a:lstStyle/>
           <a:p>
-            <a:pPr algn="ctr" indent="0" marL="0">
+            <a:pPr marL="0" indent="0" algn="ctr">
               <a:buNone/>
             </a:pPr>
             <a:r>
@@ -6344,7 +6538,7 @@
           <a:bodyPr wrap="square" lIns="0" tIns="0" rIns="0" bIns="0" rtlCol="0" anchor="ctr"/>
           <a:lstStyle/>
           <a:p>
-            <a:pPr algn="ctr" indent="0" marL="0">
+            <a:pPr marL="0" indent="0" algn="ctr">
               <a:buNone/>
             </a:pPr>
             <a:r>
@@ -6380,7 +6574,7 @@
           <a:bodyPr wrap="square" lIns="0" tIns="0" rIns="0" bIns="0" rtlCol="0" anchor="ctr"/>
           <a:lstStyle/>
           <a:p>
-            <a:pPr algn="ctr" indent="0" marL="0">
+            <a:pPr marL="0" indent="0" algn="ctr">
               <a:buNone/>
             </a:pPr>
             <a:r>
@@ -6416,7 +6610,7 @@
           <a:bodyPr wrap="square" lIns="0" tIns="0" rIns="0" bIns="0" rtlCol="0" anchor="ctr"/>
           <a:lstStyle/>
           <a:p>
-            <a:pPr algn="ctr" indent="0" marL="0">
+            <a:pPr marL="0" indent="0" algn="ctr">
               <a:buNone/>
             </a:pPr>
             <a:r>
@@ -6455,13 +6649,20 @@
             <a:prstDash val="solid"/>
           </a:ln>
           <a:effectLst>
-            <a:outerShdw sx="100000" sy="100000" kx="0" ky="0" algn="bl" rotWithShape="0" blurRad="63500" dist="25400" dir="8100000">
+            <a:outerShdw blurRad="63500" dist="25400" dir="8100000" algn="bl" rotWithShape="0">
               <a:srgbClr val="000000">
                 <a:alpha val="10000"/>
               </a:srgbClr>
             </a:outerShdw>
           </a:effectLst>
         </p:spPr>
+        <p:txBody>
+          <a:bodyPr/>
+          <a:lstStyle/>
+          <a:p>
+            <a:endParaRPr lang="en-US"/>
+          </a:p>
+        </p:txBody>
       </p:sp>
       <p:sp>
         <p:nvSpPr>
@@ -6484,7 +6685,7 @@
           <a:bodyPr wrap="square" lIns="0" tIns="0" rIns="0" bIns="0" rtlCol="0" anchor="ctr"/>
           <a:lstStyle/>
           <a:p>
-            <a:pPr algn="ctr" indent="0" marL="0">
+            <a:pPr marL="0" indent="0" algn="ctr">
               <a:buNone/>
             </a:pPr>
             <a:r>
@@ -6520,7 +6721,7 @@
           <a:bodyPr wrap="square" lIns="0" tIns="0" rIns="0" bIns="0" rtlCol="0" anchor="ctr"/>
           <a:lstStyle/>
           <a:p>
-            <a:pPr algn="ctr" indent="0" marL="0">
+            <a:pPr marL="0" indent="0" algn="ctr">
               <a:buNone/>
             </a:pPr>
             <a:r>
@@ -6556,7 +6757,7 @@
           <a:bodyPr wrap="square" lIns="0" tIns="0" rIns="0" bIns="0" rtlCol="0" anchor="ctr"/>
           <a:lstStyle/>
           <a:p>
-            <a:pPr algn="ctr" indent="0" marL="0">
+            <a:pPr marL="0" indent="0" algn="ctr">
               <a:buNone/>
             </a:pPr>
             <a:r>
@@ -6595,13 +6796,20 @@
             <a:prstDash val="solid"/>
           </a:ln>
           <a:effectLst>
-            <a:outerShdw sx="100000" sy="100000" kx="0" ky="0" algn="bl" rotWithShape="0" blurRad="63500" dist="25400" dir="8100000">
+            <a:outerShdw blurRad="63500" dist="25400" dir="8100000" algn="bl" rotWithShape="0">
               <a:srgbClr val="000000">
                 <a:alpha val="10000"/>
               </a:srgbClr>
             </a:outerShdw>
           </a:effectLst>
         </p:spPr>
+        <p:txBody>
+          <a:bodyPr/>
+          <a:lstStyle/>
+          <a:p>
+            <a:endParaRPr lang="en-US"/>
+          </a:p>
+        </p:txBody>
       </p:sp>
       <p:sp>
         <p:nvSpPr>
@@ -6624,7 +6832,7 @@
           <a:bodyPr wrap="square" lIns="0" tIns="0" rIns="0" bIns="0" rtlCol="0" anchor="ctr"/>
           <a:lstStyle/>
           <a:p>
-            <a:pPr algn="ctr" indent="0" marL="0">
+            <a:pPr marL="0" indent="0" algn="ctr">
               <a:buNone/>
             </a:pPr>
             <a:r>
@@ -6660,7 +6868,7 @@
           <a:bodyPr wrap="square" lIns="0" tIns="0" rIns="0" bIns="0" rtlCol="0" anchor="ctr"/>
           <a:lstStyle/>
           <a:p>
-            <a:pPr algn="ctr" indent="0" marL="0">
+            <a:pPr marL="0" indent="0" algn="ctr">
               <a:buNone/>
             </a:pPr>
             <a:r>
@@ -6696,7 +6904,7 @@
           <a:bodyPr wrap="square" lIns="0" tIns="0" rIns="0" bIns="0" rtlCol="0" anchor="ctr"/>
           <a:lstStyle/>
           <a:p>
-            <a:pPr algn="ctr" indent="0" marL="0">
+            <a:pPr marL="0" indent="0" algn="ctr">
               <a:buNone/>
             </a:pPr>
             <a:r>
@@ -6735,13 +6943,20 @@
             <a:prstDash val="solid"/>
           </a:ln>
           <a:effectLst>
-            <a:outerShdw sx="100000" sy="100000" kx="0" ky="0" algn="bl" rotWithShape="0" blurRad="63500" dist="25400" dir="8100000">
+            <a:outerShdw blurRad="63500" dist="25400" dir="8100000" algn="bl" rotWithShape="0">
               <a:srgbClr val="000000">
                 <a:alpha val="10000"/>
               </a:srgbClr>
             </a:outerShdw>
           </a:effectLst>
         </p:spPr>
+        <p:txBody>
+          <a:bodyPr/>
+          <a:lstStyle/>
+          <a:p>
+            <a:endParaRPr lang="en-US"/>
+          </a:p>
+        </p:txBody>
       </p:sp>
       <p:sp>
         <p:nvSpPr>
@@ -6764,7 +6979,7 @@
           <a:bodyPr wrap="square" lIns="0" tIns="0" rIns="0" bIns="0" rtlCol="0" anchor="ctr"/>
           <a:lstStyle/>
           <a:p>
-            <a:pPr algn="ctr" indent="0" marL="0">
+            <a:pPr marL="0" indent="0" algn="ctr">
               <a:buNone/>
             </a:pPr>
             <a:r>
@@ -6800,7 +7015,7 @@
           <a:bodyPr wrap="square" lIns="0" tIns="0" rIns="0" bIns="0" rtlCol="0" anchor="ctr"/>
           <a:lstStyle/>
           <a:p>
-            <a:pPr algn="ctr" indent="0" marL="0">
+            <a:pPr marL="0" indent="0" algn="ctr">
               <a:buNone/>
             </a:pPr>
             <a:r>
@@ -6836,7 +7051,7 @@
           <a:bodyPr wrap="square" lIns="0" tIns="0" rIns="0" bIns="0" rtlCol="0" anchor="ctr"/>
           <a:lstStyle/>
           <a:p>
-            <a:pPr algn="ctr" indent="0" marL="0">
+            <a:pPr marL="0" indent="0" algn="ctr">
               <a:buNone/>
             </a:pPr>
             <a:r>
@@ -6875,13 +7090,20 @@
             <a:prstDash val="solid"/>
           </a:ln>
           <a:effectLst>
-            <a:outerShdw sx="100000" sy="100000" kx="0" ky="0" algn="bl" rotWithShape="0" blurRad="63500" dist="25400" dir="8100000">
+            <a:outerShdw blurRad="63500" dist="25400" dir="8100000" algn="bl" rotWithShape="0">
               <a:srgbClr val="000000">
                 <a:alpha val="10000"/>
               </a:srgbClr>
             </a:outerShdw>
           </a:effectLst>
         </p:spPr>
+        <p:txBody>
+          <a:bodyPr/>
+          <a:lstStyle/>
+          <a:p>
+            <a:endParaRPr lang="en-US"/>
+          </a:p>
+        </p:txBody>
       </p:sp>
       <p:sp>
         <p:nvSpPr>
@@ -6904,7 +7126,7 @@
           <a:bodyPr wrap="square" lIns="0" tIns="0" rIns="0" bIns="0" rtlCol="0" anchor="ctr"/>
           <a:lstStyle/>
           <a:p>
-            <a:pPr algn="ctr" indent="0" marL="0">
+            <a:pPr marL="0" indent="0" algn="ctr">
               <a:buNone/>
             </a:pPr>
             <a:r>
@@ -6940,7 +7162,7 @@
           <a:bodyPr wrap="square" lIns="0" tIns="0" rIns="0" bIns="0" rtlCol="0" anchor="ctr"/>
           <a:lstStyle/>
           <a:p>
-            <a:pPr algn="ctr" indent="0" marL="0">
+            <a:pPr marL="0" indent="0" algn="ctr">
               <a:buNone/>
             </a:pPr>
             <a:r>
@@ -6976,7 +7198,7 @@
           <a:bodyPr wrap="square" lIns="0" tIns="0" rIns="0" bIns="0" rtlCol="0" anchor="ctr"/>
           <a:lstStyle/>
           <a:p>
-            <a:pPr algn="ctr" indent="0" marL="0">
+            <a:pPr marL="0" indent="0" algn="ctr">
               <a:buNone/>
             </a:pPr>
             <a:r>
@@ -7007,6 +7229,7 @@
         <a:solidFill>
           <a:srgbClr val="F4F6F9"/>
         </a:solidFill>
+        <a:effectLst/>
       </p:bgPr>
     </p:bg>
     <p:spTree>
@@ -7044,7 +7267,7 @@
           <a:bodyPr wrap="square" lIns="0" tIns="0" rIns="0" bIns="0" rtlCol="0" anchor="ctr"/>
           <a:lstStyle/>
           <a:p>
-            <a:pPr algn="l" indent="0" marL="0">
+            <a:pPr marL="0" indent="0" algn="l">
               <a:buNone/>
             </a:pPr>
             <a:r>
@@ -7083,7 +7306,7 @@
           <a:bodyPr wrap="square" lIns="0" tIns="0" rIns="0" bIns="0" rtlCol="0" anchor="ctr"/>
           <a:lstStyle/>
           <a:p>
-            <a:pPr algn="l" indent="0" marL="0">
+            <a:pPr marL="0" indent="0" algn="l">
               <a:buNone/>
             </a:pPr>
             <a:r>
@@ -7122,6 +7345,13 @@
             <a:prstDash val="solid"/>
           </a:ln>
         </p:spPr>
+        <p:txBody>
+          <a:bodyPr/>
+          <a:lstStyle/>
+          <a:p>
+            <a:endParaRPr lang="en-US"/>
+          </a:p>
+        </p:txBody>
       </p:sp>
       <p:sp>
         <p:nvSpPr>
@@ -7149,6 +7379,13 @@
             <a:prstDash val="solid"/>
           </a:ln>
         </p:spPr>
+        <p:txBody>
+          <a:bodyPr/>
+          <a:lstStyle/>
+          <a:p>
+            <a:endParaRPr lang="en-US"/>
+          </a:p>
+        </p:txBody>
       </p:sp>
       <p:sp>
         <p:nvSpPr>
@@ -7171,7 +7408,7 @@
           <a:bodyPr wrap="square" lIns="0" tIns="0" rIns="0" bIns="0" rtlCol="0" anchor="ctr"/>
           <a:lstStyle/>
           <a:p>
-            <a:pPr algn="ctr" indent="0" marL="0">
+            <a:pPr marL="0" indent="0" algn="ctr">
               <a:buNone/>
             </a:pPr>
             <a:r>
@@ -7188,15 +7425,15 @@
       </p:sp>
       <p:pic>
         <p:nvPicPr>
-          <p:cNvPr id="7" name="Image 0" descr="preencoded.png">    </p:cNvPr>
+          <p:cNvPr id="7" name="Image 0" descr="preencoded.png"/>
           <p:cNvPicPr>
             <a:picLocks noChangeAspect="1"/>
           </p:cNvPicPr>
           <p:nvPr/>
         </p:nvPicPr>
         <p:blipFill>
-          <a:blip r:embed="rId1"/>
-          <a:srcRect l="0" r="0" t="0" b="0"/>
+          <a:blip r:embed="rId3"/>
+          <a:srcRect/>
           <a:stretch/>
         </p:blipFill>
         <p:spPr>
@@ -7233,13 +7470,20 @@
             <a:prstDash val="solid"/>
           </a:ln>
           <a:effectLst>
-            <a:outerShdw sx="100000" sy="100000" kx="0" ky="0" algn="bl" rotWithShape="0" blurRad="63500" dist="25400" dir="8100000">
+            <a:outerShdw blurRad="63500" dist="25400" dir="8100000" algn="bl" rotWithShape="0">
               <a:srgbClr val="000000">
                 <a:alpha val="10000"/>
               </a:srgbClr>
             </a:outerShdw>
           </a:effectLst>
         </p:spPr>
+        <p:txBody>
+          <a:bodyPr/>
+          <a:lstStyle/>
+          <a:p>
+            <a:endParaRPr lang="en-US"/>
+          </a:p>
+        </p:txBody>
       </p:sp>
       <p:sp>
         <p:nvSpPr>
@@ -7262,7 +7506,7 @@
           <a:bodyPr wrap="square" lIns="0" tIns="0" rIns="0" bIns="0" rtlCol="0" anchor="ctr"/>
           <a:lstStyle/>
           <a:p>
-            <a:pPr indent="0" marL="0">
+            <a:pPr marL="0" indent="0">
               <a:buNone/>
             </a:pPr>
             <a:r>
@@ -7301,13 +7545,20 @@
             <a:prstDash val="solid"/>
           </a:ln>
           <a:effectLst>
-            <a:outerShdw sx="100000" sy="100000" kx="0" ky="0" algn="bl" rotWithShape="0" blurRad="63500" dist="25400" dir="8100000">
+            <a:outerShdw blurRad="63500" dist="25400" dir="8100000" algn="bl" rotWithShape="0">
               <a:srgbClr val="000000">
                 <a:alpha val="10000"/>
               </a:srgbClr>
             </a:outerShdw>
           </a:effectLst>
         </p:spPr>
+        <p:txBody>
+          <a:bodyPr/>
+          <a:lstStyle/>
+          <a:p>
+            <a:endParaRPr lang="en-US"/>
+          </a:p>
+        </p:txBody>
       </p:sp>
       <p:sp>
         <p:nvSpPr>
@@ -7330,7 +7581,7 @@
           <a:bodyPr wrap="square" lIns="0" tIns="0" rIns="0" bIns="0" rtlCol="0" anchor="ctr"/>
           <a:lstStyle/>
           <a:p>
-            <a:pPr indent="0" marL="0">
+            <a:pPr marL="0" indent="0">
               <a:buNone/>
             </a:pPr>
             <a:r>
@@ -7369,13 +7620,20 @@
             <a:prstDash val="solid"/>
           </a:ln>
           <a:effectLst>
-            <a:outerShdw sx="100000" sy="100000" kx="0" ky="0" algn="bl" rotWithShape="0" blurRad="63500" dist="25400" dir="8100000">
+            <a:outerShdw blurRad="63500" dist="25400" dir="8100000" algn="bl" rotWithShape="0">
               <a:srgbClr val="000000">
                 <a:alpha val="10000"/>
               </a:srgbClr>
             </a:outerShdw>
           </a:effectLst>
         </p:spPr>
+        <p:txBody>
+          <a:bodyPr/>
+          <a:lstStyle/>
+          <a:p>
+            <a:endParaRPr lang="en-US"/>
+          </a:p>
+        </p:txBody>
       </p:sp>
       <p:sp>
         <p:nvSpPr>
@@ -7398,7 +7656,7 @@
           <a:bodyPr wrap="square" lIns="0" tIns="0" rIns="0" bIns="0" rtlCol="0" anchor="ctr"/>
           <a:lstStyle/>
           <a:p>
-            <a:pPr indent="0" marL="0">
+            <a:pPr marL="0" indent="0">
               <a:buNone/>
             </a:pPr>
             <a:r>
@@ -7437,13 +7695,20 @@
             <a:prstDash val="solid"/>
           </a:ln>
           <a:effectLst>
-            <a:outerShdw sx="100000" sy="100000" kx="0" ky="0" algn="bl" rotWithShape="0" blurRad="63500" dist="25400" dir="8100000">
+            <a:outerShdw blurRad="63500" dist="25400" dir="8100000" algn="bl" rotWithShape="0">
               <a:srgbClr val="000000">
                 <a:alpha val="10000"/>
               </a:srgbClr>
             </a:outerShdw>
           </a:effectLst>
         </p:spPr>
+        <p:txBody>
+          <a:bodyPr/>
+          <a:lstStyle/>
+          <a:p>
+            <a:endParaRPr lang="en-US"/>
+          </a:p>
+        </p:txBody>
       </p:sp>
       <p:sp>
         <p:nvSpPr>
@@ -7466,7 +7731,7 @@
           <a:bodyPr wrap="square" lIns="0" tIns="0" rIns="0" bIns="0" rtlCol="0" anchor="ctr"/>
           <a:lstStyle/>
           <a:p>
-            <a:pPr indent="0" marL="0">
+            <a:pPr marL="0" indent="0">
               <a:buNone/>
             </a:pPr>
             <a:r>
@@ -7505,13 +7770,20 @@
             <a:prstDash val="solid"/>
           </a:ln>
           <a:effectLst>
-            <a:outerShdw sx="100000" sy="100000" kx="0" ky="0" algn="bl" rotWithShape="0" blurRad="63500" dist="25400" dir="8100000">
+            <a:outerShdw blurRad="63500" dist="25400" dir="8100000" algn="bl" rotWithShape="0">
               <a:srgbClr val="000000">
                 <a:alpha val="10000"/>
               </a:srgbClr>
             </a:outerShdw>
           </a:effectLst>
         </p:spPr>
+        <p:txBody>
+          <a:bodyPr/>
+          <a:lstStyle/>
+          <a:p>
+            <a:endParaRPr lang="en-US"/>
+          </a:p>
+        </p:txBody>
       </p:sp>
       <p:sp>
         <p:nvSpPr>
@@ -7534,7 +7806,7 @@
           <a:bodyPr wrap="square" lIns="0" tIns="0" rIns="0" bIns="0" rtlCol="0" anchor="ctr"/>
           <a:lstStyle/>
           <a:p>
-            <a:pPr indent="0" marL="0">
+            <a:pPr marL="0" indent="0">
               <a:buNone/>
             </a:pPr>
             <a:r>
@@ -7565,6 +7837,7 @@
         <a:solidFill>
           <a:srgbClr val="F4F6F9"/>
         </a:solidFill>
+        <a:effectLst/>
       </p:bgPr>
     </p:bg>
     <p:spTree>
@@ -7602,7 +7875,7 @@
           <a:bodyPr wrap="square" lIns="0" tIns="0" rIns="0" bIns="0" rtlCol="0" anchor="ctr"/>
           <a:lstStyle/>
           <a:p>
-            <a:pPr algn="l" indent="0" marL="0">
+            <a:pPr marL="0" indent="0" algn="l">
               <a:buNone/>
             </a:pPr>
             <a:r>
@@ -7644,6 +7917,13 @@
             <a:prstDash val="solid"/>
           </a:ln>
         </p:spPr>
+        <p:txBody>
+          <a:bodyPr/>
+          <a:lstStyle/>
+          <a:p>
+            <a:endParaRPr lang="en-US"/>
+          </a:p>
+        </p:txBody>
       </p:sp>
       <p:sp>
         <p:nvSpPr>
@@ -7671,6 +7951,13 @@
             <a:prstDash val="solid"/>
           </a:ln>
         </p:spPr>
+        <p:txBody>
+          <a:bodyPr/>
+          <a:lstStyle/>
+          <a:p>
+            <a:endParaRPr lang="en-US"/>
+          </a:p>
+        </p:txBody>
       </p:sp>
       <p:sp>
         <p:nvSpPr>
@@ -7693,7 +7980,7 @@
           <a:bodyPr wrap="square" lIns="0" tIns="0" rIns="0" bIns="0" rtlCol="0" anchor="ctr"/>
           <a:lstStyle/>
           <a:p>
-            <a:pPr algn="ctr" indent="0" marL="0">
+            <a:pPr marL="0" indent="0" algn="ctr">
               <a:buNone/>
             </a:pPr>
             <a:r>
@@ -7732,13 +8019,20 @@
             <a:prstDash val="solid"/>
           </a:ln>
           <a:effectLst>
-            <a:outerShdw sx="100000" sy="100000" kx="0" ky="0" algn="bl" rotWithShape="0" blurRad="63500" dist="25400" dir="8100000">
+            <a:outerShdw blurRad="63500" dist="25400" dir="8100000" algn="bl" rotWithShape="0">
               <a:srgbClr val="000000">
                 <a:alpha val="10000"/>
               </a:srgbClr>
             </a:outerShdw>
           </a:effectLst>
         </p:spPr>
+        <p:txBody>
+          <a:bodyPr/>
+          <a:lstStyle/>
+          <a:p>
+            <a:endParaRPr lang="en-US"/>
+          </a:p>
+        </p:txBody>
       </p:sp>
       <p:sp>
         <p:nvSpPr>
@@ -7761,7 +8055,7 @@
           <a:bodyPr wrap="square" lIns="0" tIns="0" rIns="0" bIns="0" rtlCol="0" anchor="ctr"/>
           <a:lstStyle/>
           <a:p>
-            <a:pPr indent="0" marL="0">
+            <a:pPr marL="0" indent="0">
               <a:buNone/>
             </a:pPr>
             <a:r>
@@ -7778,15 +8072,15 @@
       </p:sp>
       <p:pic>
         <p:nvPicPr>
-          <p:cNvPr id="8" name="Image 0" descr="preencoded.png">    </p:cNvPr>
+          <p:cNvPr id="8" name="Image 0" descr="preencoded.png"/>
           <p:cNvPicPr>
             <a:picLocks noChangeAspect="1"/>
           </p:cNvPicPr>
           <p:nvPr/>
         </p:nvPicPr>
         <p:blipFill>
-          <a:blip r:embed="rId1"/>
-          <a:srcRect l="0" r="0" t="0" b="0"/>
+          <a:blip r:embed="rId3"/>
+          <a:srcRect/>
           <a:stretch/>
         </p:blipFill>
         <p:spPr>
@@ -7823,13 +8117,20 @@
             <a:prstDash val="solid"/>
           </a:ln>
           <a:effectLst>
-            <a:outerShdw sx="100000" sy="100000" kx="0" ky="0" algn="bl" rotWithShape="0" blurRad="63500" dist="25400" dir="8100000">
+            <a:outerShdw blurRad="63500" dist="25400" dir="8100000" algn="bl" rotWithShape="0">
               <a:srgbClr val="000000">
                 <a:alpha val="10000"/>
               </a:srgbClr>
             </a:outerShdw>
           </a:effectLst>
         </p:spPr>
+        <p:txBody>
+          <a:bodyPr/>
+          <a:lstStyle/>
+          <a:p>
+            <a:endParaRPr lang="en-US"/>
+          </a:p>
+        </p:txBody>
       </p:sp>
       <p:sp>
         <p:nvSpPr>
@@ -7852,7 +8153,7 @@
           <a:bodyPr wrap="square" lIns="0" tIns="0" rIns="0" bIns="0" rtlCol="0" anchor="ctr"/>
           <a:lstStyle/>
           <a:p>
-            <a:pPr indent="0" marL="0">
+            <a:pPr marL="0" indent="0">
               <a:buNone/>
             </a:pPr>
             <a:r>
@@ -7869,15 +8170,15 @@
       </p:sp>
       <p:pic>
         <p:nvPicPr>
-          <p:cNvPr id="11" name="Image 1" descr="preencoded.png">    </p:cNvPr>
+          <p:cNvPr id="11" name="Image 1" descr="preencoded.png"/>
           <p:cNvPicPr>
             <a:picLocks noChangeAspect="1"/>
           </p:cNvPicPr>
           <p:nvPr/>
         </p:nvPicPr>
         <p:blipFill>
-          <a:blip r:embed="rId2"/>
-          <a:srcRect l="0" r="0" t="0" b="0"/>
+          <a:blip r:embed="rId4"/>
+          <a:srcRect/>
           <a:stretch/>
         </p:blipFill>
         <p:spPr>
@@ -7914,13 +8215,20 @@
             <a:prstDash val="solid"/>
           </a:ln>
           <a:effectLst>
-            <a:outerShdw sx="100000" sy="100000" kx="0" ky="0" algn="bl" rotWithShape="0" blurRad="63500" dist="25400" dir="8100000">
+            <a:outerShdw blurRad="63500" dist="25400" dir="8100000" algn="bl" rotWithShape="0">
               <a:srgbClr val="000000">
                 <a:alpha val="10000"/>
               </a:srgbClr>
             </a:outerShdw>
           </a:effectLst>
         </p:spPr>
+        <p:txBody>
+          <a:bodyPr/>
+          <a:lstStyle/>
+          <a:p>
+            <a:endParaRPr lang="en-US"/>
+          </a:p>
+        </p:txBody>
       </p:sp>
       <p:sp>
         <p:nvSpPr>
@@ -7946,6 +8254,13 @@
             <a:prstDash val="solid"/>
           </a:ln>
         </p:spPr>
+        <p:txBody>
+          <a:bodyPr/>
+          <a:lstStyle/>
+          <a:p>
+            <a:endParaRPr lang="en-US"/>
+          </a:p>
+        </p:txBody>
       </p:sp>
       <p:sp>
         <p:nvSpPr>
@@ -7968,7 +8283,7 @@
           <a:bodyPr wrap="square" lIns="0" tIns="0" rIns="0" bIns="0" rtlCol="0" anchor="ctr"/>
           <a:lstStyle/>
           <a:p>
-            <a:pPr algn="ctr" indent="0" marL="0">
+            <a:pPr marL="0" indent="0" algn="ctr">
               <a:buNone/>
             </a:pPr>
             <a:r>
@@ -8004,7 +8319,7 @@
           <a:bodyPr wrap="square" lIns="0" tIns="0" rIns="0" bIns="0" rtlCol="0" anchor="ctr"/>
           <a:lstStyle/>
           <a:p>
-            <a:pPr algn="ctr" indent="0" marL="0">
+            <a:pPr marL="0" indent="0" algn="ctr">
               <a:buNone/>
             </a:pPr>
             <a:r>
@@ -8043,13 +8358,20 @@
             <a:prstDash val="solid"/>
           </a:ln>
           <a:effectLst>
-            <a:outerShdw sx="100000" sy="100000" kx="0" ky="0" algn="bl" rotWithShape="0" blurRad="63500" dist="25400" dir="8100000">
+            <a:outerShdw blurRad="63500" dist="25400" dir="8100000" algn="bl" rotWithShape="0">
               <a:srgbClr val="000000">
                 <a:alpha val="10000"/>
               </a:srgbClr>
             </a:outerShdw>
           </a:effectLst>
         </p:spPr>
+        <p:txBody>
+          <a:bodyPr/>
+          <a:lstStyle/>
+          <a:p>
+            <a:endParaRPr lang="en-US"/>
+          </a:p>
+        </p:txBody>
       </p:sp>
       <p:sp>
         <p:nvSpPr>
@@ -8075,6 +8397,13 @@
             <a:prstDash val="solid"/>
           </a:ln>
         </p:spPr>
+        <p:txBody>
+          <a:bodyPr/>
+          <a:lstStyle/>
+          <a:p>
+            <a:endParaRPr lang="en-US"/>
+          </a:p>
+        </p:txBody>
       </p:sp>
       <p:sp>
         <p:nvSpPr>
@@ -8097,7 +8426,7 @@
           <a:bodyPr wrap="square" lIns="0" tIns="0" rIns="0" bIns="0" rtlCol="0" anchor="ctr"/>
           <a:lstStyle/>
           <a:p>
-            <a:pPr algn="ctr" indent="0" marL="0">
+            <a:pPr marL="0" indent="0" algn="ctr">
               <a:buNone/>
             </a:pPr>
             <a:r>
@@ -8133,7 +8462,7 @@
           <a:bodyPr wrap="square" lIns="0" tIns="0" rIns="0" bIns="0" rtlCol="0" anchor="ctr"/>
           <a:lstStyle/>
           <a:p>
-            <a:pPr algn="ctr" indent="0" marL="0">
+            <a:pPr marL="0" indent="0" algn="ctr">
               <a:buNone/>
             </a:pPr>
             <a:r>
@@ -8172,13 +8501,20 @@
             <a:prstDash val="solid"/>
           </a:ln>
           <a:effectLst>
-            <a:outerShdw sx="100000" sy="100000" kx="0" ky="0" algn="bl" rotWithShape="0" blurRad="63500" dist="25400" dir="8100000">
+            <a:outerShdw blurRad="63500" dist="25400" dir="8100000" algn="bl" rotWithShape="0">
               <a:srgbClr val="000000">
                 <a:alpha val="10000"/>
               </a:srgbClr>
             </a:outerShdw>
           </a:effectLst>
         </p:spPr>
+        <p:txBody>
+          <a:bodyPr/>
+          <a:lstStyle/>
+          <a:p>
+            <a:endParaRPr lang="en-US"/>
+          </a:p>
+        </p:txBody>
       </p:sp>
       <p:sp>
         <p:nvSpPr>
@@ -8204,6 +8540,13 @@
             <a:prstDash val="solid"/>
           </a:ln>
         </p:spPr>
+        <p:txBody>
+          <a:bodyPr/>
+          <a:lstStyle/>
+          <a:p>
+            <a:endParaRPr lang="en-US"/>
+          </a:p>
+        </p:txBody>
       </p:sp>
       <p:sp>
         <p:nvSpPr>
@@ -8226,7 +8569,7 @@
           <a:bodyPr wrap="square" lIns="0" tIns="0" rIns="0" bIns="0" rtlCol="0" anchor="ctr"/>
           <a:lstStyle/>
           <a:p>
-            <a:pPr algn="ctr" indent="0" marL="0">
+            <a:pPr marL="0" indent="0" algn="ctr">
               <a:buNone/>
             </a:pPr>
             <a:r>
@@ -8262,7 +8605,7 @@
           <a:bodyPr wrap="square" lIns="0" tIns="0" rIns="0" bIns="0" rtlCol="0" anchor="ctr"/>
           <a:lstStyle/>
           <a:p>
-            <a:pPr algn="ctr" indent="0" marL="0">
+            <a:pPr marL="0" indent="0" algn="ctr">
               <a:buNone/>
             </a:pPr>
             <a:r>
@@ -8301,13 +8644,20 @@
             <a:prstDash val="solid"/>
           </a:ln>
           <a:effectLst>
-            <a:outerShdw sx="100000" sy="100000" kx="0" ky="0" algn="bl" rotWithShape="0" blurRad="63500" dist="25400" dir="8100000">
+            <a:outerShdw blurRad="63500" dist="25400" dir="8100000" algn="bl" rotWithShape="0">
               <a:srgbClr val="000000">
                 <a:alpha val="10000"/>
               </a:srgbClr>
             </a:outerShdw>
           </a:effectLst>
         </p:spPr>
+        <p:txBody>
+          <a:bodyPr/>
+          <a:lstStyle/>
+          <a:p>
+            <a:endParaRPr lang="en-US"/>
+          </a:p>
+        </p:txBody>
       </p:sp>
       <p:sp>
         <p:nvSpPr>
@@ -8333,6 +8683,13 @@
             <a:prstDash val="solid"/>
           </a:ln>
         </p:spPr>
+        <p:txBody>
+          <a:bodyPr/>
+          <a:lstStyle/>
+          <a:p>
+            <a:endParaRPr lang="en-US"/>
+          </a:p>
+        </p:txBody>
       </p:sp>
       <p:sp>
         <p:nvSpPr>
@@ -8355,7 +8712,7 @@
           <a:bodyPr wrap="square" lIns="0" tIns="0" rIns="0" bIns="0" rtlCol="0" anchor="ctr"/>
           <a:lstStyle/>
           <a:p>
-            <a:pPr algn="ctr" indent="0" marL="0">
+            <a:pPr marL="0" indent="0" algn="ctr">
               <a:buNone/>
             </a:pPr>
             <a:r>
@@ -8391,7 +8748,7 @@
           <a:bodyPr wrap="square" lIns="0" tIns="0" rIns="0" bIns="0" rtlCol="0" anchor="ctr"/>
           <a:lstStyle/>
           <a:p>
-            <a:pPr algn="ctr" indent="0" marL="0">
+            <a:pPr marL="0" indent="0" algn="ctr">
               <a:buNone/>
             </a:pPr>
             <a:r>
@@ -8422,6 +8779,7 @@
         <a:solidFill>
           <a:srgbClr val="F4F6F9"/>
         </a:solidFill>
+        <a:effectLst/>
       </p:bgPr>
     </p:bg>
     <p:spTree>
@@ -8459,7 +8817,7 @@
           <a:bodyPr wrap="square" lIns="0" tIns="0" rIns="0" bIns="0" rtlCol="0" anchor="ctr"/>
           <a:lstStyle/>
           <a:p>
-            <a:pPr algn="l" indent="0" marL="0">
+            <a:pPr marL="0" indent="0" algn="l">
               <a:buNone/>
             </a:pPr>
             <a:r>
@@ -8498,7 +8856,7 @@
           <a:bodyPr wrap="square" lIns="0" tIns="0" rIns="0" bIns="0" rtlCol="0" anchor="ctr"/>
           <a:lstStyle/>
           <a:p>
-            <a:pPr algn="l" indent="0" marL="0">
+            <a:pPr marL="0" indent="0" algn="l">
               <a:buNone/>
             </a:pPr>
             <a:r>
@@ -8537,6 +8895,13 @@
             <a:prstDash val="solid"/>
           </a:ln>
         </p:spPr>
+        <p:txBody>
+          <a:bodyPr/>
+          <a:lstStyle/>
+          <a:p>
+            <a:endParaRPr lang="en-US"/>
+          </a:p>
+        </p:txBody>
       </p:sp>
       <p:sp>
         <p:nvSpPr>
@@ -8564,6 +8929,13 @@
             <a:prstDash val="solid"/>
           </a:ln>
         </p:spPr>
+        <p:txBody>
+          <a:bodyPr/>
+          <a:lstStyle/>
+          <a:p>
+            <a:endParaRPr lang="en-US"/>
+          </a:p>
+        </p:txBody>
       </p:sp>
       <p:sp>
         <p:nvSpPr>
@@ -8586,7 +8958,7 @@
           <a:bodyPr wrap="square" lIns="0" tIns="0" rIns="0" bIns="0" rtlCol="0" anchor="ctr"/>
           <a:lstStyle/>
           <a:p>
-            <a:pPr algn="ctr" indent="0" marL="0">
+            <a:pPr marL="0" indent="0" algn="ctr">
               <a:buNone/>
             </a:pPr>
             <a:r>
@@ -8625,13 +8997,20 @@
             <a:prstDash val="solid"/>
           </a:ln>
           <a:effectLst>
-            <a:outerShdw sx="100000" sy="100000" kx="0" ky="0" algn="bl" rotWithShape="0" blurRad="63500" dist="25400" dir="8100000">
+            <a:outerShdw blurRad="63500" dist="25400" dir="8100000" algn="bl" rotWithShape="0">
               <a:srgbClr val="000000">
                 <a:alpha val="10000"/>
               </a:srgbClr>
             </a:outerShdw>
           </a:effectLst>
         </p:spPr>
+        <p:txBody>
+          <a:bodyPr/>
+          <a:lstStyle/>
+          <a:p>
+            <a:endParaRPr lang="en-US"/>
+          </a:p>
+        </p:txBody>
       </p:sp>
       <p:sp>
         <p:nvSpPr>
@@ -8654,7 +9033,7 @@
           <a:bodyPr wrap="square" lIns="0" tIns="0" rIns="0" bIns="0" rtlCol="0" anchor="ctr"/>
           <a:lstStyle/>
           <a:p>
-            <a:pPr indent="0" marL="0">
+            <a:pPr marL="0" indent="0">
               <a:buNone/>
             </a:pPr>
             <a:r>
@@ -8690,7 +9069,7 @@
           <a:bodyPr wrap="square" lIns="0" tIns="0" rIns="0" bIns="0" rtlCol="0" anchor="ctr"/>
           <a:lstStyle/>
           <a:p>
-            <a:pPr indent="0" marL="0">
+            <a:pPr marL="0" indent="0">
               <a:buNone/>
             </a:pPr>
             <a:r>
@@ -8707,7 +9086,7 @@
       </p:sp>
       <p:graphicFrame>
         <p:nvGraphicFramePr>
-          <p:cNvPr id="7" name="Table 0"/>
+          <p:cNvPr id="10" name="Table 0"/>
           <p:cNvGraphicFramePr>
             <a:graphicFrameLocks noGrp="1"/>
           </p:cNvGraphicFramePr>
@@ -8721,16 +9100,34 @@
         </p:nvGraphicFramePr>
         <p:xfrm>
           <a:off x="4572000" y="1051560"/>
-          <a:ext cx="4206240" cy="3840480"/>
+          <a:ext cx="4206240" cy="3712464"/>
         </p:xfrm>
         <a:graphic>
           <a:graphicData uri="http://schemas.openxmlformats.org/drawingml/2006/table">
             <a:tbl>
               <a:tblPr/>
               <a:tblGrid>
-                <a:gridCol w="2194560"/>
-                <a:gridCol w="1005840"/>
-                <a:gridCol w="1005840"/>
+                <a:gridCol w="2194560">
+                  <a:extLst>
+                    <a:ext uri="{9D8B030D-6E8A-4147-A177-3AD203B41FA5}">
+                      <a16:colId xmlns:a16="http://schemas.microsoft.com/office/drawing/2014/main" val="20000"/>
+                    </a:ext>
+                  </a:extLst>
+                </a:gridCol>
+                <a:gridCol w="1005840">
+                  <a:extLst>
+                    <a:ext uri="{9D8B030D-6E8A-4147-A177-3AD203B41FA5}">
+                      <a16:colId xmlns:a16="http://schemas.microsoft.com/office/drawing/2014/main" val="20001"/>
+                    </a:ext>
+                  </a:extLst>
+                </a:gridCol>
+                <a:gridCol w="1005840">
+                  <a:extLst>
+                    <a:ext uri="{9D8B030D-6E8A-4147-A177-3AD203B41FA5}">
+                      <a16:colId xmlns:a16="http://schemas.microsoft.com/office/drawing/2014/main" val="20002"/>
+                    </a:ext>
+                  </a:extLst>
+                </a:gridCol>
               </a:tblGrid>
               <a:tr h="265176">
                 <a:tc>
@@ -8738,7 +9135,7 @@
                     <a:bodyPr/>
                     <a:lstStyle/>
                     <a:p>
-                      <a:pPr algn="l" indent="0" marL="0">
+                      <a:pPr marL="0" indent="0" algn="l">
                         <a:buNone/>
                       </a:pPr>
                       <a:r>
@@ -8752,7 +9149,7 @@
                       <a:endParaRPr lang="en-US" sz="1000" dirty="0"/>
                     </a:p>
                   </a:txBody>
-                  <a:tcPr marL="91440" marR="91440" marT="45720" marB="45720">
+                  <a:tcPr>
                     <a:lnL w="6350" cap="flat" cmpd="sng" algn="ctr">
                       <a:solidFill>
                         <a:srgbClr val="E8EDF3"/>
@@ -8799,7 +9196,7 @@
                     <a:bodyPr/>
                     <a:lstStyle/>
                     <a:p>
-                      <a:pPr algn="ctr" indent="0" marL="0">
+                      <a:pPr marL="0" indent="0" algn="ctr">
                         <a:buNone/>
                       </a:pPr>
                       <a:r>
@@ -8813,7 +9210,7 @@
                       <a:endParaRPr lang="en-US" sz="1000" dirty="0"/>
                     </a:p>
                   </a:txBody>
-                  <a:tcPr marL="91440" marR="91440" marT="45720" marB="45720">
+                  <a:tcPr>
                     <a:lnL w="6350" cap="flat" cmpd="sng" algn="ctr">
                       <a:solidFill>
                         <a:srgbClr val="E8EDF3"/>
@@ -8860,7 +9257,7 @@
                     <a:bodyPr/>
                     <a:lstStyle/>
                     <a:p>
-                      <a:pPr algn="ctr" indent="0" marL="0">
+                      <a:pPr marL="0" indent="0" algn="ctr">
                         <a:buNone/>
                       </a:pPr>
                       <a:r>
@@ -8874,7 +9271,7 @@
                       <a:endParaRPr lang="en-US" sz="1000" dirty="0"/>
                     </a:p>
                   </a:txBody>
-                  <a:tcPr marL="91440" marR="91440" marT="45720" marB="45720">
+                  <a:tcPr>
                     <a:lnL w="6350" cap="flat" cmpd="sng" algn="ctr">
                       <a:solidFill>
                         <a:srgbClr val="E8EDF3"/>
@@ -8916,6 +9313,11 @@
                     </a:solidFill>
                   </a:tcPr>
                 </a:tc>
+                <a:extLst>
+                  <a:ext uri="{0D108BD9-81ED-4DB2-BD59-A6C34878D82A}">
+                    <a16:rowId xmlns:a16="http://schemas.microsoft.com/office/drawing/2014/main" val="10000"/>
+                  </a:ext>
+                </a:extLst>
               </a:tr>
               <a:tr h="265176">
                 <a:tc>
@@ -8923,7 +9325,7 @@
                     <a:bodyPr/>
                     <a:lstStyle/>
                     <a:p>
-                      <a:pPr algn="l" indent="0" marL="0">
+                      <a:pPr marL="0" indent="0" algn="l">
                         <a:buNone/>
                       </a:pPr>
                       <a:r>
@@ -8937,7 +9339,7 @@
                       <a:endParaRPr lang="en-US" sz="900" dirty="0"/>
                     </a:p>
                   </a:txBody>
-                  <a:tcPr marL="91440" marR="91440" marT="45720" marB="45720">
+                  <a:tcPr>
                     <a:lnL w="6350" cap="flat" cmpd="sng" algn="ctr">
                       <a:solidFill>
                         <a:srgbClr val="E8EDF3"/>
@@ -8984,7 +9386,7 @@
                     <a:bodyPr/>
                     <a:lstStyle/>
                     <a:p>
-                      <a:pPr algn="ctr" indent="0" marL="0">
+                      <a:pPr marL="0" indent="0" algn="ctr">
                         <a:buNone/>
                       </a:pPr>
                       <a:r>
@@ -8998,7 +9400,7 @@
                       <a:endParaRPr lang="en-US" sz="900" dirty="0"/>
                     </a:p>
                   </a:txBody>
-                  <a:tcPr marL="91440" marR="91440" marT="45720" marB="45720">
+                  <a:tcPr>
                     <a:lnL w="6350" cap="flat" cmpd="sng" algn="ctr">
                       <a:solidFill>
                         <a:srgbClr val="E8EDF3"/>
@@ -9045,7 +9447,7 @@
                     <a:bodyPr/>
                     <a:lstStyle/>
                     <a:p>
-                      <a:pPr algn="ctr" indent="0" marL="0">
+                      <a:pPr marL="0" indent="0" algn="ctr">
                         <a:buNone/>
                       </a:pPr>
                       <a:r>
@@ -9059,7 +9461,7 @@
                       <a:endParaRPr lang="en-US" sz="900" dirty="0"/>
                     </a:p>
                   </a:txBody>
-                  <a:tcPr marL="91440" marR="91440" marT="45720" marB="45720">
+                  <a:tcPr>
                     <a:lnL w="6350" cap="flat" cmpd="sng" algn="ctr">
                       <a:solidFill>
                         <a:srgbClr val="E8EDF3"/>
@@ -9101,6 +9503,11 @@
                     </a:solidFill>
                   </a:tcPr>
                 </a:tc>
+                <a:extLst>
+                  <a:ext uri="{0D108BD9-81ED-4DB2-BD59-A6C34878D82A}">
+                    <a16:rowId xmlns:a16="http://schemas.microsoft.com/office/drawing/2014/main" val="10001"/>
+                  </a:ext>
+                </a:extLst>
               </a:tr>
               <a:tr h="265176">
                 <a:tc>
@@ -9108,7 +9515,7 @@
                     <a:bodyPr/>
                     <a:lstStyle/>
                     <a:p>
-                      <a:pPr algn="l" indent="0" marL="0">
+                      <a:pPr marL="0" indent="0" algn="l">
                         <a:buNone/>
                       </a:pPr>
                       <a:r>
@@ -9122,7 +9529,7 @@
                       <a:endParaRPr lang="en-US" sz="900" dirty="0"/>
                     </a:p>
                   </a:txBody>
-                  <a:tcPr marL="91440" marR="91440" marT="45720" marB="45720">
+                  <a:tcPr>
                     <a:lnL w="6350" cap="flat" cmpd="sng" algn="ctr">
                       <a:solidFill>
                         <a:srgbClr val="E8EDF3"/>
@@ -9169,7 +9576,7 @@
                     <a:bodyPr/>
                     <a:lstStyle/>
                     <a:p>
-                      <a:pPr algn="ctr" indent="0" marL="0">
+                      <a:pPr marL="0" indent="0" algn="ctr">
                         <a:buNone/>
                       </a:pPr>
                       <a:r>
@@ -9183,7 +9590,7 @@
                       <a:endParaRPr lang="en-US" sz="900" dirty="0"/>
                     </a:p>
                   </a:txBody>
-                  <a:tcPr marL="91440" marR="91440" marT="45720" marB="45720">
+                  <a:tcPr>
                     <a:lnL w="6350" cap="flat" cmpd="sng" algn="ctr">
                       <a:solidFill>
                         <a:srgbClr val="E8EDF3"/>
@@ -9230,7 +9637,7 @@
                     <a:bodyPr/>
                     <a:lstStyle/>
                     <a:p>
-                      <a:pPr algn="ctr" indent="0" marL="0">
+                      <a:pPr marL="0" indent="0" algn="ctr">
                         <a:buNone/>
                       </a:pPr>
                       <a:r>
@@ -9244,7 +9651,7 @@
                       <a:endParaRPr lang="en-US" sz="900" dirty="0"/>
                     </a:p>
                   </a:txBody>
-                  <a:tcPr marL="91440" marR="91440" marT="45720" marB="45720">
+                  <a:tcPr>
                     <a:lnL w="6350" cap="flat" cmpd="sng" algn="ctr">
                       <a:solidFill>
                         <a:srgbClr val="E8EDF3"/>
@@ -9286,6 +9693,11 @@
                     </a:solidFill>
                   </a:tcPr>
                 </a:tc>
+                <a:extLst>
+                  <a:ext uri="{0D108BD9-81ED-4DB2-BD59-A6C34878D82A}">
+                    <a16:rowId xmlns:a16="http://schemas.microsoft.com/office/drawing/2014/main" val="10002"/>
+                  </a:ext>
+                </a:extLst>
               </a:tr>
               <a:tr h="265176">
                 <a:tc>
@@ -9293,7 +9705,7 @@
                     <a:bodyPr/>
                     <a:lstStyle/>
                     <a:p>
-                      <a:pPr algn="l" indent="0" marL="0">
+                      <a:pPr marL="0" indent="0" algn="l">
                         <a:buNone/>
                       </a:pPr>
                       <a:r>
@@ -9307,7 +9719,7 @@
                       <a:endParaRPr lang="en-US" sz="900" dirty="0"/>
                     </a:p>
                   </a:txBody>
-                  <a:tcPr marL="91440" marR="91440" marT="45720" marB="45720">
+                  <a:tcPr>
                     <a:lnL w="6350" cap="flat" cmpd="sng" algn="ctr">
                       <a:solidFill>
                         <a:srgbClr val="E8EDF3"/>
@@ -9354,7 +9766,7 @@
                     <a:bodyPr/>
                     <a:lstStyle/>
                     <a:p>
-                      <a:pPr algn="ctr" indent="0" marL="0">
+                      <a:pPr marL="0" indent="0" algn="ctr">
                         <a:buNone/>
                       </a:pPr>
                       <a:r>
@@ -9368,7 +9780,7 @@
                       <a:endParaRPr lang="en-US" sz="900" dirty="0"/>
                     </a:p>
                   </a:txBody>
-                  <a:tcPr marL="91440" marR="91440" marT="45720" marB="45720">
+                  <a:tcPr>
                     <a:lnL w="6350" cap="flat" cmpd="sng" algn="ctr">
                       <a:solidFill>
                         <a:srgbClr val="E8EDF3"/>
@@ -9415,7 +9827,7 @@
                     <a:bodyPr/>
                     <a:lstStyle/>
                     <a:p>
-                      <a:pPr algn="ctr" indent="0" marL="0">
+                      <a:pPr marL="0" indent="0" algn="ctr">
                         <a:buNone/>
                       </a:pPr>
                       <a:r>
@@ -9429,7 +9841,7 @@
                       <a:endParaRPr lang="en-US" sz="900" dirty="0"/>
                     </a:p>
                   </a:txBody>
-                  <a:tcPr marL="91440" marR="91440" marT="45720" marB="45720">
+                  <a:tcPr>
                     <a:lnL w="6350" cap="flat" cmpd="sng" algn="ctr">
                       <a:solidFill>
                         <a:srgbClr val="E8EDF3"/>
@@ -9471,6 +9883,11 @@
                     </a:solidFill>
                   </a:tcPr>
                 </a:tc>
+                <a:extLst>
+                  <a:ext uri="{0D108BD9-81ED-4DB2-BD59-A6C34878D82A}">
+                    <a16:rowId xmlns:a16="http://schemas.microsoft.com/office/drawing/2014/main" val="10003"/>
+                  </a:ext>
+                </a:extLst>
               </a:tr>
               <a:tr h="265176">
                 <a:tc>
@@ -9478,7 +9895,7 @@
                     <a:bodyPr/>
                     <a:lstStyle/>
                     <a:p>
-                      <a:pPr algn="l" indent="0" marL="0">
+                      <a:pPr marL="0" indent="0" algn="l">
                         <a:buNone/>
                       </a:pPr>
                       <a:r>
@@ -9492,7 +9909,7 @@
                       <a:endParaRPr lang="en-US" sz="900" dirty="0"/>
                     </a:p>
                   </a:txBody>
-                  <a:tcPr marL="91440" marR="91440" marT="45720" marB="45720">
+                  <a:tcPr>
                     <a:lnL w="6350" cap="flat" cmpd="sng" algn="ctr">
                       <a:solidFill>
                         <a:srgbClr val="E8EDF3"/>
@@ -9539,7 +9956,7 @@
                     <a:bodyPr/>
                     <a:lstStyle/>
                     <a:p>
-                      <a:pPr algn="ctr" indent="0" marL="0">
+                      <a:pPr marL="0" indent="0" algn="ctr">
                         <a:buNone/>
                       </a:pPr>
                       <a:r>
@@ -9553,7 +9970,7 @@
                       <a:endParaRPr lang="en-US" sz="900" dirty="0"/>
                     </a:p>
                   </a:txBody>
-                  <a:tcPr marL="91440" marR="91440" marT="45720" marB="45720">
+                  <a:tcPr>
                     <a:lnL w="6350" cap="flat" cmpd="sng" algn="ctr">
                       <a:solidFill>
                         <a:srgbClr val="E8EDF3"/>
@@ -9600,7 +10017,7 @@
                     <a:bodyPr/>
                     <a:lstStyle/>
                     <a:p>
-                      <a:pPr algn="ctr" indent="0" marL="0">
+                      <a:pPr marL="0" indent="0" algn="ctr">
                         <a:buNone/>
                       </a:pPr>
                       <a:r>
@@ -9614,7 +10031,7 @@
                       <a:endParaRPr lang="en-US" sz="900" dirty="0"/>
                     </a:p>
                   </a:txBody>
-                  <a:tcPr marL="91440" marR="91440" marT="45720" marB="45720">
+                  <a:tcPr>
                     <a:lnL w="6350" cap="flat" cmpd="sng" algn="ctr">
                       <a:solidFill>
                         <a:srgbClr val="E8EDF3"/>
@@ -9656,6 +10073,11 @@
                     </a:solidFill>
                   </a:tcPr>
                 </a:tc>
+                <a:extLst>
+                  <a:ext uri="{0D108BD9-81ED-4DB2-BD59-A6C34878D82A}">
+                    <a16:rowId xmlns:a16="http://schemas.microsoft.com/office/drawing/2014/main" val="10004"/>
+                  </a:ext>
+                </a:extLst>
               </a:tr>
               <a:tr h="265176">
                 <a:tc>
@@ -9663,7 +10085,7 @@
                     <a:bodyPr/>
                     <a:lstStyle/>
                     <a:p>
-                      <a:pPr algn="l" indent="0" marL="0">
+                      <a:pPr marL="0" indent="0" algn="l">
                         <a:buNone/>
                       </a:pPr>
                       <a:r>
@@ -9677,7 +10099,7 @@
                       <a:endParaRPr lang="en-US" sz="900" dirty="0"/>
                     </a:p>
                   </a:txBody>
-                  <a:tcPr marL="91440" marR="91440" marT="45720" marB="45720">
+                  <a:tcPr>
                     <a:lnL w="6350" cap="flat" cmpd="sng" algn="ctr">
                       <a:solidFill>
                         <a:srgbClr val="E8EDF3"/>
@@ -9724,7 +10146,7 @@
                     <a:bodyPr/>
                     <a:lstStyle/>
                     <a:p>
-                      <a:pPr algn="ctr" indent="0" marL="0">
+                      <a:pPr marL="0" indent="0" algn="ctr">
                         <a:buNone/>
                       </a:pPr>
                       <a:r>
@@ -9738,7 +10160,7 @@
                       <a:endParaRPr lang="en-US" sz="900" dirty="0"/>
                     </a:p>
                   </a:txBody>
-                  <a:tcPr marL="91440" marR="91440" marT="45720" marB="45720">
+                  <a:tcPr>
                     <a:lnL w="6350" cap="flat" cmpd="sng" algn="ctr">
                       <a:solidFill>
                         <a:srgbClr val="E8EDF3"/>
@@ -9785,7 +10207,7 @@
                     <a:bodyPr/>
                     <a:lstStyle/>
                     <a:p>
-                      <a:pPr algn="ctr" indent="0" marL="0">
+                      <a:pPr marL="0" indent="0" algn="ctr">
                         <a:buNone/>
                       </a:pPr>
                       <a:r>
@@ -9799,7 +10221,7 @@
                       <a:endParaRPr lang="en-US" sz="900" dirty="0"/>
                     </a:p>
                   </a:txBody>
-                  <a:tcPr marL="91440" marR="91440" marT="45720" marB="45720">
+                  <a:tcPr>
                     <a:lnL w="6350" cap="flat" cmpd="sng" algn="ctr">
                       <a:solidFill>
                         <a:srgbClr val="E8EDF3"/>
@@ -9841,6 +10263,11 @@
                     </a:solidFill>
                   </a:tcPr>
                 </a:tc>
+                <a:extLst>
+                  <a:ext uri="{0D108BD9-81ED-4DB2-BD59-A6C34878D82A}">
+                    <a16:rowId xmlns:a16="http://schemas.microsoft.com/office/drawing/2014/main" val="10005"/>
+                  </a:ext>
+                </a:extLst>
               </a:tr>
               <a:tr h="265176">
                 <a:tc>
@@ -9848,7 +10275,7 @@
                     <a:bodyPr/>
                     <a:lstStyle/>
                     <a:p>
-                      <a:pPr algn="l" indent="0" marL="0">
+                      <a:pPr marL="0" indent="0" algn="l">
                         <a:buNone/>
                       </a:pPr>
                       <a:r>
@@ -9862,7 +10289,7 @@
                       <a:endParaRPr lang="en-US" sz="900" dirty="0"/>
                     </a:p>
                   </a:txBody>
-                  <a:tcPr marL="91440" marR="91440" marT="45720" marB="45720">
+                  <a:tcPr>
                     <a:lnL w="6350" cap="flat" cmpd="sng" algn="ctr">
                       <a:solidFill>
                         <a:srgbClr val="E8EDF3"/>
@@ -9909,7 +10336,7 @@
                     <a:bodyPr/>
                     <a:lstStyle/>
                     <a:p>
-                      <a:pPr algn="ctr" indent="0" marL="0">
+                      <a:pPr marL="0" indent="0" algn="ctr">
                         <a:buNone/>
                       </a:pPr>
                       <a:r>
@@ -9923,7 +10350,7 @@
                       <a:endParaRPr lang="en-US" sz="900" dirty="0"/>
                     </a:p>
                   </a:txBody>
-                  <a:tcPr marL="91440" marR="91440" marT="45720" marB="45720">
+                  <a:tcPr>
                     <a:lnL w="6350" cap="flat" cmpd="sng" algn="ctr">
                       <a:solidFill>
                         <a:srgbClr val="E8EDF3"/>
@@ -9970,7 +10397,7 @@
                     <a:bodyPr/>
                     <a:lstStyle/>
                     <a:p>
-                      <a:pPr algn="ctr" indent="0" marL="0">
+                      <a:pPr marL="0" indent="0" algn="ctr">
                         <a:buNone/>
                       </a:pPr>
                       <a:r>
@@ -9984,7 +10411,7 @@
                       <a:endParaRPr lang="en-US" sz="900" dirty="0"/>
                     </a:p>
                   </a:txBody>
-                  <a:tcPr marL="91440" marR="91440" marT="45720" marB="45720">
+                  <a:tcPr>
                     <a:lnL w="6350" cap="flat" cmpd="sng" algn="ctr">
                       <a:solidFill>
                         <a:srgbClr val="E8EDF3"/>
@@ -10026,6 +10453,11 @@
                     </a:solidFill>
                   </a:tcPr>
                 </a:tc>
+                <a:extLst>
+                  <a:ext uri="{0D108BD9-81ED-4DB2-BD59-A6C34878D82A}">
+                    <a16:rowId xmlns:a16="http://schemas.microsoft.com/office/drawing/2014/main" val="10006"/>
+                  </a:ext>
+                </a:extLst>
               </a:tr>
               <a:tr h="265176">
                 <a:tc>
@@ -10033,7 +10465,7 @@
                     <a:bodyPr/>
                     <a:lstStyle/>
                     <a:p>
-                      <a:pPr algn="l" indent="0" marL="0">
+                      <a:pPr marL="0" indent="0" algn="l">
                         <a:buNone/>
                       </a:pPr>
                       <a:r>
@@ -10047,7 +10479,7 @@
                       <a:endParaRPr lang="en-US" sz="900" dirty="0"/>
                     </a:p>
                   </a:txBody>
-                  <a:tcPr marL="91440" marR="91440" marT="45720" marB="45720">
+                  <a:tcPr>
                     <a:lnL w="6350" cap="flat" cmpd="sng" algn="ctr">
                       <a:solidFill>
                         <a:srgbClr val="E8EDF3"/>
@@ -10094,7 +10526,7 @@
                     <a:bodyPr/>
                     <a:lstStyle/>
                     <a:p>
-                      <a:pPr algn="ctr" indent="0" marL="0">
+                      <a:pPr marL="0" indent="0" algn="ctr">
                         <a:buNone/>
                       </a:pPr>
                       <a:r>
@@ -10108,7 +10540,7 @@
                       <a:endParaRPr lang="en-US" sz="900" dirty="0"/>
                     </a:p>
                   </a:txBody>
-                  <a:tcPr marL="91440" marR="91440" marT="45720" marB="45720">
+                  <a:tcPr>
                     <a:lnL w="6350" cap="flat" cmpd="sng" algn="ctr">
                       <a:solidFill>
                         <a:srgbClr val="E8EDF3"/>
@@ -10155,7 +10587,7 @@
                     <a:bodyPr/>
                     <a:lstStyle/>
                     <a:p>
-                      <a:pPr algn="ctr" indent="0" marL="0">
+                      <a:pPr marL="0" indent="0" algn="ctr">
                         <a:buNone/>
                       </a:pPr>
                       <a:r>
@@ -10169,7 +10601,7 @@
                       <a:endParaRPr lang="en-US" sz="900" dirty="0"/>
                     </a:p>
                   </a:txBody>
-                  <a:tcPr marL="91440" marR="91440" marT="45720" marB="45720">
+                  <a:tcPr>
                     <a:lnL w="6350" cap="flat" cmpd="sng" algn="ctr">
                       <a:solidFill>
                         <a:srgbClr val="E8EDF3"/>
@@ -10211,6 +10643,11 @@
                     </a:solidFill>
                   </a:tcPr>
                 </a:tc>
+                <a:extLst>
+                  <a:ext uri="{0D108BD9-81ED-4DB2-BD59-A6C34878D82A}">
+                    <a16:rowId xmlns:a16="http://schemas.microsoft.com/office/drawing/2014/main" val="10007"/>
+                  </a:ext>
+                </a:extLst>
               </a:tr>
               <a:tr h="265176">
                 <a:tc>
@@ -10218,7 +10655,7 @@
                     <a:bodyPr/>
                     <a:lstStyle/>
                     <a:p>
-                      <a:pPr algn="l" indent="0" marL="0">
+                      <a:pPr marL="0" indent="0" algn="l">
                         <a:buNone/>
                       </a:pPr>
                       <a:r>
@@ -10232,7 +10669,7 @@
                       <a:endParaRPr lang="en-US" sz="900" dirty="0"/>
                     </a:p>
                   </a:txBody>
-                  <a:tcPr marL="91440" marR="91440" marT="45720" marB="45720">
+                  <a:tcPr>
                     <a:lnL w="6350" cap="flat" cmpd="sng" algn="ctr">
                       <a:solidFill>
                         <a:srgbClr val="E8EDF3"/>
@@ -10279,7 +10716,7 @@
                     <a:bodyPr/>
                     <a:lstStyle/>
                     <a:p>
-                      <a:pPr algn="ctr" indent="0" marL="0">
+                      <a:pPr marL="0" indent="0" algn="ctr">
                         <a:buNone/>
                       </a:pPr>
                       <a:r>
@@ -10293,7 +10730,7 @@
                       <a:endParaRPr lang="en-US" sz="900" dirty="0"/>
                     </a:p>
                   </a:txBody>
-                  <a:tcPr marL="91440" marR="91440" marT="45720" marB="45720">
+                  <a:tcPr>
                     <a:lnL w="6350" cap="flat" cmpd="sng" algn="ctr">
                       <a:solidFill>
                         <a:srgbClr val="E8EDF3"/>
@@ -10340,7 +10777,7 @@
                     <a:bodyPr/>
                     <a:lstStyle/>
                     <a:p>
-                      <a:pPr algn="ctr" indent="0" marL="0">
+                      <a:pPr marL="0" indent="0" algn="ctr">
                         <a:buNone/>
                       </a:pPr>
                       <a:r>
@@ -10354,7 +10791,7 @@
                       <a:endParaRPr lang="en-US" sz="900" dirty="0"/>
                     </a:p>
                   </a:txBody>
-                  <a:tcPr marL="91440" marR="91440" marT="45720" marB="45720">
+                  <a:tcPr>
                     <a:lnL w="6350" cap="flat" cmpd="sng" algn="ctr">
                       <a:solidFill>
                         <a:srgbClr val="E8EDF3"/>
@@ -10396,6 +10833,11 @@
                     </a:solidFill>
                   </a:tcPr>
                 </a:tc>
+                <a:extLst>
+                  <a:ext uri="{0D108BD9-81ED-4DB2-BD59-A6C34878D82A}">
+                    <a16:rowId xmlns:a16="http://schemas.microsoft.com/office/drawing/2014/main" val="10008"/>
+                  </a:ext>
+                </a:extLst>
               </a:tr>
               <a:tr h="265176">
                 <a:tc>
@@ -10403,7 +10845,7 @@
                     <a:bodyPr/>
                     <a:lstStyle/>
                     <a:p>
-                      <a:pPr algn="l" indent="0" marL="0">
+                      <a:pPr marL="0" indent="0" algn="l">
                         <a:buNone/>
                       </a:pPr>
                       <a:r>
@@ -10417,7 +10859,7 @@
                       <a:endParaRPr lang="en-US" sz="900" dirty="0"/>
                     </a:p>
                   </a:txBody>
-                  <a:tcPr marL="91440" marR="91440" marT="45720" marB="45720">
+                  <a:tcPr>
                     <a:lnL w="6350" cap="flat" cmpd="sng" algn="ctr">
                       <a:solidFill>
                         <a:srgbClr val="E8EDF3"/>
@@ -10464,7 +10906,7 @@
                     <a:bodyPr/>
                     <a:lstStyle/>
                     <a:p>
-                      <a:pPr algn="ctr" indent="0" marL="0">
+                      <a:pPr marL="0" indent="0" algn="ctr">
                         <a:buNone/>
                       </a:pPr>
                       <a:r>
@@ -10478,7 +10920,7 @@
                       <a:endParaRPr lang="en-US" sz="900" dirty="0"/>
                     </a:p>
                   </a:txBody>
-                  <a:tcPr marL="91440" marR="91440" marT="45720" marB="45720">
+                  <a:tcPr>
                     <a:lnL w="6350" cap="flat" cmpd="sng" algn="ctr">
                       <a:solidFill>
                         <a:srgbClr val="E8EDF3"/>
@@ -10525,7 +10967,7 @@
                     <a:bodyPr/>
                     <a:lstStyle/>
                     <a:p>
-                      <a:pPr algn="ctr" indent="0" marL="0">
+                      <a:pPr marL="0" indent="0" algn="ctr">
                         <a:buNone/>
                       </a:pPr>
                       <a:r>
@@ -10539,7 +10981,7 @@
                       <a:endParaRPr lang="en-US" sz="900" dirty="0"/>
                     </a:p>
                   </a:txBody>
-                  <a:tcPr marL="91440" marR="91440" marT="45720" marB="45720">
+                  <a:tcPr>
                     <a:lnL w="6350" cap="flat" cmpd="sng" algn="ctr">
                       <a:solidFill>
                         <a:srgbClr val="E8EDF3"/>
@@ -10581,6 +11023,11 @@
                     </a:solidFill>
                   </a:tcPr>
                 </a:tc>
+                <a:extLst>
+                  <a:ext uri="{0D108BD9-81ED-4DB2-BD59-A6C34878D82A}">
+                    <a16:rowId xmlns:a16="http://schemas.microsoft.com/office/drawing/2014/main" val="10009"/>
+                  </a:ext>
+                </a:extLst>
               </a:tr>
               <a:tr h="265176">
                 <a:tc>
@@ -10588,7 +11035,7 @@
                     <a:bodyPr/>
                     <a:lstStyle/>
                     <a:p>
-                      <a:pPr algn="l" indent="0" marL="0">
+                      <a:pPr marL="0" indent="0" algn="l">
                         <a:buNone/>
                       </a:pPr>
                       <a:r>
@@ -10602,7 +11049,7 @@
                       <a:endParaRPr lang="en-US" sz="900" dirty="0"/>
                     </a:p>
                   </a:txBody>
-                  <a:tcPr marL="91440" marR="91440" marT="45720" marB="45720">
+                  <a:tcPr>
                     <a:lnL w="6350" cap="flat" cmpd="sng" algn="ctr">
                       <a:solidFill>
                         <a:srgbClr val="E8EDF3"/>
@@ -10649,7 +11096,7 @@
                     <a:bodyPr/>
                     <a:lstStyle/>
                     <a:p>
-                      <a:pPr algn="ctr" indent="0" marL="0">
+                      <a:pPr marL="0" indent="0" algn="ctr">
                         <a:buNone/>
                       </a:pPr>
                       <a:r>
@@ -10663,7 +11110,7 @@
                       <a:endParaRPr lang="en-US" sz="900" dirty="0"/>
                     </a:p>
                   </a:txBody>
-                  <a:tcPr marL="91440" marR="91440" marT="45720" marB="45720">
+                  <a:tcPr>
                     <a:lnL w="6350" cap="flat" cmpd="sng" algn="ctr">
                       <a:solidFill>
                         <a:srgbClr val="E8EDF3"/>
@@ -10710,7 +11157,7 @@
                     <a:bodyPr/>
                     <a:lstStyle/>
                     <a:p>
-                      <a:pPr algn="ctr" indent="0" marL="0">
+                      <a:pPr marL="0" indent="0" algn="ctr">
                         <a:buNone/>
                       </a:pPr>
                       <a:r>
@@ -10724,7 +11171,7 @@
                       <a:endParaRPr lang="en-US" sz="900" dirty="0"/>
                     </a:p>
                   </a:txBody>
-                  <a:tcPr marL="91440" marR="91440" marT="45720" marB="45720">
+                  <a:tcPr>
                     <a:lnL w="6350" cap="flat" cmpd="sng" algn="ctr">
                       <a:solidFill>
                         <a:srgbClr val="E8EDF3"/>
@@ -10766,6 +11213,11 @@
                     </a:solidFill>
                   </a:tcPr>
                 </a:tc>
+                <a:extLst>
+                  <a:ext uri="{0D108BD9-81ED-4DB2-BD59-A6C34878D82A}">
+                    <a16:rowId xmlns:a16="http://schemas.microsoft.com/office/drawing/2014/main" val="10010"/>
+                  </a:ext>
+                </a:extLst>
               </a:tr>
               <a:tr h="265176">
                 <a:tc>
@@ -10773,7 +11225,7 @@
                     <a:bodyPr/>
                     <a:lstStyle/>
                     <a:p>
-                      <a:pPr algn="l" indent="0" marL="0">
+                      <a:pPr marL="0" indent="0" algn="l">
                         <a:buNone/>
                       </a:pPr>
                       <a:r>
@@ -10787,7 +11239,7 @@
                       <a:endParaRPr lang="en-US" sz="900" dirty="0"/>
                     </a:p>
                   </a:txBody>
-                  <a:tcPr marL="91440" marR="91440" marT="45720" marB="45720">
+                  <a:tcPr>
                     <a:lnL w="6350" cap="flat" cmpd="sng" algn="ctr">
                       <a:solidFill>
                         <a:srgbClr val="E8EDF3"/>
@@ -10834,7 +11286,7 @@
                     <a:bodyPr/>
                     <a:lstStyle/>
                     <a:p>
-                      <a:pPr algn="ctr" indent="0" marL="0">
+                      <a:pPr marL="0" indent="0" algn="ctr">
                         <a:buNone/>
                       </a:pPr>
                       <a:r>
@@ -10848,7 +11300,7 @@
                       <a:endParaRPr lang="en-US" sz="900" dirty="0"/>
                     </a:p>
                   </a:txBody>
-                  <a:tcPr marL="91440" marR="91440" marT="45720" marB="45720">
+                  <a:tcPr>
                     <a:lnL w="6350" cap="flat" cmpd="sng" algn="ctr">
                       <a:solidFill>
                         <a:srgbClr val="E8EDF3"/>
@@ -10895,7 +11347,7 @@
                     <a:bodyPr/>
                     <a:lstStyle/>
                     <a:p>
-                      <a:pPr algn="ctr" indent="0" marL="0">
+                      <a:pPr marL="0" indent="0" algn="ctr">
                         <a:buNone/>
                       </a:pPr>
                       <a:r>
@@ -10909,7 +11361,7 @@
                       <a:endParaRPr lang="en-US" sz="900" dirty="0"/>
                     </a:p>
                   </a:txBody>
-                  <a:tcPr marL="91440" marR="91440" marT="45720" marB="45720">
+                  <a:tcPr>
                     <a:lnL w="6350" cap="flat" cmpd="sng" algn="ctr">
                       <a:solidFill>
                         <a:srgbClr val="E8EDF3"/>
@@ -10951,6 +11403,11 @@
                     </a:solidFill>
                   </a:tcPr>
                 </a:tc>
+                <a:extLst>
+                  <a:ext uri="{0D108BD9-81ED-4DB2-BD59-A6C34878D82A}">
+                    <a16:rowId xmlns:a16="http://schemas.microsoft.com/office/drawing/2014/main" val="10011"/>
+                  </a:ext>
+                </a:extLst>
               </a:tr>
               <a:tr h="265176">
                 <a:tc>
@@ -10958,7 +11415,7 @@
                     <a:bodyPr/>
                     <a:lstStyle/>
                     <a:p>
-                      <a:pPr algn="l" indent="0" marL="0">
+                      <a:pPr marL="0" indent="0" algn="l">
                         <a:buNone/>
                       </a:pPr>
                       <a:r>
@@ -10972,7 +11429,7 @@
                       <a:endParaRPr lang="en-US" sz="900" dirty="0"/>
                     </a:p>
                   </a:txBody>
-                  <a:tcPr marL="91440" marR="91440" marT="45720" marB="45720">
+                  <a:tcPr>
                     <a:lnL w="6350" cap="flat" cmpd="sng" algn="ctr">
                       <a:solidFill>
                         <a:srgbClr val="E8EDF3"/>
@@ -11019,7 +11476,7 @@
                     <a:bodyPr/>
                     <a:lstStyle/>
                     <a:p>
-                      <a:pPr algn="ctr" indent="0" marL="0">
+                      <a:pPr marL="0" indent="0" algn="ctr">
                         <a:buNone/>
                       </a:pPr>
                       <a:r>
@@ -11033,7 +11490,7 @@
                       <a:endParaRPr lang="en-US" sz="900" dirty="0"/>
                     </a:p>
                   </a:txBody>
-                  <a:tcPr marL="91440" marR="91440" marT="45720" marB="45720">
+                  <a:tcPr>
                     <a:lnL w="6350" cap="flat" cmpd="sng" algn="ctr">
                       <a:solidFill>
                         <a:srgbClr val="E8EDF3"/>
@@ -11080,7 +11537,7 @@
                     <a:bodyPr/>
                     <a:lstStyle/>
                     <a:p>
-                      <a:pPr algn="ctr" indent="0" marL="0">
+                      <a:pPr marL="0" indent="0" algn="ctr">
                         <a:buNone/>
                       </a:pPr>
                       <a:r>
@@ -11094,7 +11551,7 @@
                       <a:endParaRPr lang="en-US" sz="900" dirty="0"/>
                     </a:p>
                   </a:txBody>
-                  <a:tcPr marL="91440" marR="91440" marT="45720" marB="45720">
+                  <a:tcPr>
                     <a:lnL w="6350" cap="flat" cmpd="sng" algn="ctr">
                       <a:solidFill>
                         <a:srgbClr val="E8EDF3"/>
@@ -11136,6 +11593,11 @@
                     </a:solidFill>
                   </a:tcPr>
                 </a:tc>
+                <a:extLst>
+                  <a:ext uri="{0D108BD9-81ED-4DB2-BD59-A6C34878D82A}">
+                    <a16:rowId xmlns:a16="http://schemas.microsoft.com/office/drawing/2014/main" val="10012"/>
+                  </a:ext>
+                </a:extLst>
               </a:tr>
               <a:tr h="265176">
                 <a:tc>
@@ -11143,7 +11605,7 @@
                     <a:bodyPr/>
                     <a:lstStyle/>
                     <a:p>
-                      <a:pPr algn="l" indent="0" marL="0">
+                      <a:pPr marL="0" indent="0" algn="l">
                         <a:buNone/>
                       </a:pPr>
                       <a:r>
@@ -11157,7 +11619,7 @@
                       <a:endParaRPr lang="en-US" sz="900" dirty="0"/>
                     </a:p>
                   </a:txBody>
-                  <a:tcPr marL="91440" marR="91440" marT="45720" marB="45720">
+                  <a:tcPr>
                     <a:lnL w="6350" cap="flat" cmpd="sng" algn="ctr">
                       <a:solidFill>
                         <a:srgbClr val="E8EDF3"/>
@@ -11204,7 +11666,7 @@
                     <a:bodyPr/>
                     <a:lstStyle/>
                     <a:p>
-                      <a:pPr algn="ctr" indent="0" marL="0">
+                      <a:pPr marL="0" indent="0" algn="ctr">
                         <a:buNone/>
                       </a:pPr>
                       <a:r>
@@ -11218,7 +11680,7 @@
                       <a:endParaRPr lang="en-US" sz="900" dirty="0"/>
                     </a:p>
                   </a:txBody>
-                  <a:tcPr marL="91440" marR="91440" marT="45720" marB="45720">
+                  <a:tcPr>
                     <a:lnL w="6350" cap="flat" cmpd="sng" algn="ctr">
                       <a:solidFill>
                         <a:srgbClr val="E8EDF3"/>
@@ -11265,7 +11727,7 @@
                     <a:bodyPr/>
                     <a:lstStyle/>
                     <a:p>
-                      <a:pPr algn="ctr" indent="0" marL="0">
+                      <a:pPr marL="0" indent="0" algn="ctr">
                         <a:buNone/>
                       </a:pPr>
                       <a:r>
@@ -11279,7 +11741,7 @@
                       <a:endParaRPr lang="en-US" sz="900" dirty="0"/>
                     </a:p>
                   </a:txBody>
-                  <a:tcPr marL="91440" marR="91440" marT="45720" marB="45720">
+                  <a:tcPr>
                     <a:lnL w="6350" cap="flat" cmpd="sng" algn="ctr">
                       <a:solidFill>
                         <a:srgbClr val="E8EDF3"/>
@@ -11321,6 +11783,11 @@
                     </a:solidFill>
                   </a:tcPr>
                 </a:tc>
+                <a:extLst>
+                  <a:ext uri="{0D108BD9-81ED-4DB2-BD59-A6C34878D82A}">
+                    <a16:rowId xmlns:a16="http://schemas.microsoft.com/office/drawing/2014/main" val="10013"/>
+                  </a:ext>
+                </a:extLst>
               </a:tr>
             </a:tbl>
           </a:graphicData>
@@ -11350,13 +11817,20 @@
             <a:prstDash val="solid"/>
           </a:ln>
           <a:effectLst>
-            <a:outerShdw sx="100000" sy="100000" kx="0" ky="0" algn="bl" rotWithShape="0" blurRad="63500" dist="25400" dir="8100000">
+            <a:outerShdw blurRad="63500" dist="25400" dir="8100000" algn="bl" rotWithShape="0">
               <a:srgbClr val="000000">
                 <a:alpha val="10000"/>
               </a:srgbClr>
             </a:outerShdw>
           </a:effectLst>
         </p:spPr>
+        <p:txBody>
+          <a:bodyPr/>
+          <a:lstStyle/>
+          <a:p>
+            <a:endParaRPr lang="en-US"/>
+          </a:p>
+        </p:txBody>
       </p:sp>
       <p:sp>
         <p:nvSpPr>
@@ -11379,7 +11853,7 @@
           <a:bodyPr wrap="square" lIns="0" tIns="0" rIns="0" bIns="0" rtlCol="0" anchor="ctr"/>
           <a:lstStyle/>
           <a:p>
-            <a:pPr indent="0" marL="0">
+            <a:pPr marL="0" indent="0">
               <a:buNone/>
             </a:pPr>
             <a:r>
@@ -11415,7 +11889,7 @@
           <a:bodyPr wrap="square" lIns="0" tIns="0" rIns="0" bIns="0" rtlCol="0" anchor="ctr"/>
           <a:lstStyle/>
           <a:p>
-            <a:pPr indent="0" marL="0">
+            <a:pPr marL="0" indent="0">
               <a:buNone/>
             </a:pPr>
             <a:r>
@@ -11429,7 +11903,7 @@
             <a:endParaRPr lang="en-US" sz="1100" dirty="0"/>
           </a:p>
           <a:p>
-            <a:pPr indent="0" marL="0">
+            <a:pPr marL="0" indent="0">
               <a:buNone/>
             </a:pPr>
             <a:r>
@@ -11443,7 +11917,7 @@
             <a:endParaRPr lang="en-US" sz="1100" dirty="0"/>
           </a:p>
           <a:p>
-            <a:pPr indent="0" marL="0">
+            <a:pPr marL="0" indent="0">
               <a:buNone/>
             </a:pPr>
             <a:r>
@@ -11457,7 +11931,7 @@
             <a:endParaRPr lang="en-US" sz="1100" dirty="0"/>
           </a:p>
           <a:p>
-            <a:pPr indent="0" marL="0">
+            <a:pPr marL="0" indent="0">
               <a:buNone/>
             </a:pPr>
             <a:r>
@@ -11488,6 +11962,7 @@
         <a:solidFill>
           <a:srgbClr val="1A2E4A"/>
         </a:solidFill>
+        <a:effectLst/>
       </p:bgPr>
     </p:bg>
     <p:spTree>
@@ -11530,6 +12005,13 @@
             <a:prstDash val="solid"/>
           </a:ln>
         </p:spPr>
+        <p:txBody>
+          <a:bodyPr/>
+          <a:lstStyle/>
+          <a:p>
+            <a:endParaRPr lang="en-US"/>
+          </a:p>
+        </p:txBody>
       </p:sp>
       <p:sp>
         <p:nvSpPr>
@@ -11552,7 +12034,7 @@
           <a:bodyPr wrap="square" lIns="0" tIns="0" rIns="0" bIns="0" rtlCol="0" anchor="ctr"/>
           <a:lstStyle/>
           <a:p>
-            <a:pPr algn="ctr" indent="0" marL="0">
+            <a:pPr marL="0" indent="0" algn="ctr">
               <a:buNone/>
             </a:pPr>
             <a:r>
@@ -11588,7 +12070,7 @@
           <a:bodyPr wrap="square" lIns="0" tIns="0" rIns="0" bIns="0" rtlCol="0" anchor="ctr"/>
           <a:lstStyle/>
           <a:p>
-            <a:pPr algn="l" indent="0" marL="0">
+            <a:pPr marL="0" indent="0" algn="l">
               <a:buNone/>
             </a:pPr>
             <a:r>
@@ -11624,7 +12106,7 @@
           <a:bodyPr wrap="square" lIns="0" tIns="0" rIns="0" bIns="0" rtlCol="0" anchor="ctr"/>
           <a:lstStyle/>
           <a:p>
-            <a:pPr algn="l" indent="0" marL="0">
+            <a:pPr marL="0" indent="0" algn="l">
               <a:buNone/>
             </a:pPr>
             <a:r>
@@ -11660,7 +12142,7 @@
           <a:bodyPr wrap="square" lIns="0" tIns="0" rIns="0" bIns="0" rtlCol="0" anchor="ctr"/>
           <a:lstStyle/>
           <a:p>
-            <a:pPr indent="0" marL="0">
+            <a:pPr marL="0" indent="0">
               <a:buNone/>
             </a:pPr>
             <a:r>
@@ -11699,13 +12181,20 @@
             <a:prstDash val="solid"/>
           </a:ln>
           <a:effectLst>
-            <a:outerShdw sx="100000" sy="100000" kx="0" ky="0" algn="bl" rotWithShape="0" blurRad="63500" dist="25400" dir="8100000">
+            <a:outerShdw blurRad="63500" dist="25400" dir="8100000" algn="bl" rotWithShape="0">
               <a:srgbClr val="000000">
                 <a:alpha val="10000"/>
               </a:srgbClr>
             </a:outerShdw>
           </a:effectLst>
         </p:spPr>
+        <p:txBody>
+          <a:bodyPr/>
+          <a:lstStyle/>
+          <a:p>
+            <a:endParaRPr lang="en-US"/>
+          </a:p>
+        </p:txBody>
       </p:sp>
       <p:sp>
         <p:nvSpPr>
@@ -11731,6 +12220,13 @@
             <a:prstDash val="solid"/>
           </a:ln>
         </p:spPr>
+        <p:txBody>
+          <a:bodyPr/>
+          <a:lstStyle/>
+          <a:p>
+            <a:endParaRPr lang="en-US"/>
+          </a:p>
+        </p:txBody>
       </p:sp>
       <p:sp>
         <p:nvSpPr>
@@ -11753,7 +12249,7 @@
           <a:bodyPr wrap="square" lIns="0" tIns="0" rIns="0" bIns="0" rtlCol="0" anchor="ctr"/>
           <a:lstStyle/>
           <a:p>
-            <a:pPr algn="ctr" indent="0" marL="0">
+            <a:pPr marL="0" indent="0" algn="ctr">
               <a:buNone/>
             </a:pPr>
             <a:r>
@@ -11789,7 +12285,7 @@
           <a:bodyPr wrap="square" lIns="0" tIns="0" rIns="0" bIns="0" rtlCol="0" anchor="ctr"/>
           <a:lstStyle/>
           <a:p>
-            <a:pPr algn="l" indent="0" marL="0">
+            <a:pPr marL="0" indent="0" algn="l">
               <a:buNone/>
             </a:pPr>
             <a:r>
@@ -11828,13 +12324,20 @@
             <a:prstDash val="solid"/>
           </a:ln>
           <a:effectLst>
-            <a:outerShdw sx="100000" sy="100000" kx="0" ky="0" algn="bl" rotWithShape="0" blurRad="63500" dist="25400" dir="8100000">
+            <a:outerShdw blurRad="63500" dist="25400" dir="8100000" algn="bl" rotWithShape="0">
               <a:srgbClr val="000000">
                 <a:alpha val="10000"/>
               </a:srgbClr>
             </a:outerShdw>
           </a:effectLst>
         </p:spPr>
+        <p:txBody>
+          <a:bodyPr/>
+          <a:lstStyle/>
+          <a:p>
+            <a:endParaRPr lang="en-US"/>
+          </a:p>
+        </p:txBody>
       </p:sp>
       <p:sp>
         <p:nvSpPr>
@@ -11860,6 +12363,13 @@
             <a:prstDash val="solid"/>
           </a:ln>
         </p:spPr>
+        <p:txBody>
+          <a:bodyPr/>
+          <a:lstStyle/>
+          <a:p>
+            <a:endParaRPr lang="en-US"/>
+          </a:p>
+        </p:txBody>
       </p:sp>
       <p:sp>
         <p:nvSpPr>
@@ -11882,7 +12392,7 @@
           <a:bodyPr wrap="square" lIns="0" tIns="0" rIns="0" bIns="0" rtlCol="0" anchor="ctr"/>
           <a:lstStyle/>
           <a:p>
-            <a:pPr algn="ctr" indent="0" marL="0">
+            <a:pPr marL="0" indent="0" algn="ctr">
               <a:buNone/>
             </a:pPr>
             <a:r>
@@ -11918,7 +12428,7 @@
           <a:bodyPr wrap="square" lIns="0" tIns="0" rIns="0" bIns="0" rtlCol="0" anchor="ctr"/>
           <a:lstStyle/>
           <a:p>
-            <a:pPr algn="l" indent="0" marL="0">
+            <a:pPr marL="0" indent="0" algn="l">
               <a:buNone/>
             </a:pPr>
             <a:r>
@@ -11957,13 +12467,20 @@
             <a:prstDash val="solid"/>
           </a:ln>
           <a:effectLst>
-            <a:outerShdw sx="100000" sy="100000" kx="0" ky="0" algn="bl" rotWithShape="0" blurRad="63500" dist="25400" dir="8100000">
+            <a:outerShdw blurRad="63500" dist="25400" dir="8100000" algn="bl" rotWithShape="0">
               <a:srgbClr val="000000">
                 <a:alpha val="10000"/>
               </a:srgbClr>
             </a:outerShdw>
           </a:effectLst>
         </p:spPr>
+        <p:txBody>
+          <a:bodyPr/>
+          <a:lstStyle/>
+          <a:p>
+            <a:endParaRPr lang="en-US"/>
+          </a:p>
+        </p:txBody>
       </p:sp>
       <p:sp>
         <p:nvSpPr>
@@ -11989,6 +12506,13 @@
             <a:prstDash val="solid"/>
           </a:ln>
         </p:spPr>
+        <p:txBody>
+          <a:bodyPr/>
+          <a:lstStyle/>
+          <a:p>
+            <a:endParaRPr lang="en-US"/>
+          </a:p>
+        </p:txBody>
       </p:sp>
       <p:sp>
         <p:nvSpPr>
@@ -12011,7 +12535,7 @@
           <a:bodyPr wrap="square" lIns="0" tIns="0" rIns="0" bIns="0" rtlCol="0" anchor="ctr"/>
           <a:lstStyle/>
           <a:p>
-            <a:pPr algn="ctr" indent="0" marL="0">
+            <a:pPr marL="0" indent="0" algn="ctr">
               <a:buNone/>
             </a:pPr>
             <a:r>
@@ -12047,7 +12571,7 @@
           <a:bodyPr wrap="square" lIns="0" tIns="0" rIns="0" bIns="0" rtlCol="0" anchor="ctr"/>
           <a:lstStyle/>
           <a:p>
-            <a:pPr algn="l" indent="0" marL="0">
+            <a:pPr marL="0" indent="0" algn="l">
               <a:buNone/>
             </a:pPr>
             <a:r>
@@ -12086,13 +12610,20 @@
             <a:prstDash val="solid"/>
           </a:ln>
           <a:effectLst>
-            <a:outerShdw sx="100000" sy="100000" kx="0" ky="0" algn="bl" rotWithShape="0" blurRad="63500" dist="25400" dir="8100000">
+            <a:outerShdw blurRad="63500" dist="25400" dir="8100000" algn="bl" rotWithShape="0">
               <a:srgbClr val="000000">
                 <a:alpha val="10000"/>
               </a:srgbClr>
             </a:outerShdw>
           </a:effectLst>
         </p:spPr>
+        <p:txBody>
+          <a:bodyPr/>
+          <a:lstStyle/>
+          <a:p>
+            <a:endParaRPr lang="en-US"/>
+          </a:p>
+        </p:txBody>
       </p:sp>
       <p:sp>
         <p:nvSpPr>
@@ -12118,6 +12649,13 @@
             <a:prstDash val="solid"/>
           </a:ln>
         </p:spPr>
+        <p:txBody>
+          <a:bodyPr/>
+          <a:lstStyle/>
+          <a:p>
+            <a:endParaRPr lang="en-US"/>
+          </a:p>
+        </p:txBody>
       </p:sp>
       <p:sp>
         <p:nvSpPr>
@@ -12140,7 +12678,7 @@
           <a:bodyPr wrap="square" lIns="0" tIns="0" rIns="0" bIns="0" rtlCol="0" anchor="ctr"/>
           <a:lstStyle/>
           <a:p>
-            <a:pPr algn="ctr" indent="0" marL="0">
+            <a:pPr marL="0" indent="0" algn="ctr">
               <a:buNone/>
             </a:pPr>
             <a:r>
@@ -12176,7 +12714,7 @@
           <a:bodyPr wrap="square" lIns="0" tIns="0" rIns="0" bIns="0" rtlCol="0" anchor="ctr"/>
           <a:lstStyle/>
           <a:p>
-            <a:pPr algn="l" indent="0" marL="0">
+            <a:pPr marL="0" indent="0" algn="l">
               <a:buNone/>
             </a:pPr>
             <a:r>
@@ -12215,13 +12753,20 @@
             <a:prstDash val="solid"/>
           </a:ln>
           <a:effectLst>
-            <a:outerShdw sx="100000" sy="100000" kx="0" ky="0" algn="bl" rotWithShape="0" blurRad="63500" dist="25400" dir="8100000">
+            <a:outerShdw blurRad="63500" dist="25400" dir="8100000" algn="bl" rotWithShape="0">
               <a:srgbClr val="000000">
                 <a:alpha val="10000"/>
               </a:srgbClr>
             </a:outerShdw>
           </a:effectLst>
         </p:spPr>
+        <p:txBody>
+          <a:bodyPr/>
+          <a:lstStyle/>
+          <a:p>
+            <a:endParaRPr lang="en-US"/>
+          </a:p>
+        </p:txBody>
       </p:sp>
       <p:sp>
         <p:nvSpPr>
@@ -12247,6 +12792,13 @@
             <a:prstDash val="solid"/>
           </a:ln>
         </p:spPr>
+        <p:txBody>
+          <a:bodyPr/>
+          <a:lstStyle/>
+          <a:p>
+            <a:endParaRPr lang="en-US"/>
+          </a:p>
+        </p:txBody>
       </p:sp>
       <p:sp>
         <p:nvSpPr>
@@ -12269,7 +12821,7 @@
           <a:bodyPr wrap="square" lIns="0" tIns="0" rIns="0" bIns="0" rtlCol="0" anchor="ctr"/>
           <a:lstStyle/>
           <a:p>
-            <a:pPr algn="ctr" indent="0" marL="0">
+            <a:pPr marL="0" indent="0" algn="ctr">
               <a:buNone/>
             </a:pPr>
             <a:r>
@@ -12305,7 +12857,7 @@
           <a:bodyPr wrap="square" lIns="0" tIns="0" rIns="0" bIns="0" rtlCol="0" anchor="ctr"/>
           <a:lstStyle/>
           <a:p>
-            <a:pPr algn="l" indent="0" marL="0">
+            <a:pPr marL="0" indent="0" algn="l">
               <a:buNone/>
             </a:pPr>
             <a:r>
@@ -12344,13 +12896,20 @@
             <a:prstDash val="solid"/>
           </a:ln>
           <a:effectLst>
-            <a:outerShdw sx="100000" sy="100000" kx="0" ky="0" algn="bl" rotWithShape="0" blurRad="63500" dist="25400" dir="8100000">
+            <a:outerShdw blurRad="63500" dist="25400" dir="8100000" algn="bl" rotWithShape="0">
               <a:srgbClr val="000000">
                 <a:alpha val="10000"/>
               </a:srgbClr>
             </a:outerShdw>
           </a:effectLst>
         </p:spPr>
+        <p:txBody>
+          <a:bodyPr/>
+          <a:lstStyle/>
+          <a:p>
+            <a:endParaRPr lang="en-US"/>
+          </a:p>
+        </p:txBody>
       </p:sp>
       <p:sp>
         <p:nvSpPr>
@@ -12376,6 +12935,13 @@
             <a:prstDash val="solid"/>
           </a:ln>
         </p:spPr>
+        <p:txBody>
+          <a:bodyPr/>
+          <a:lstStyle/>
+          <a:p>
+            <a:endParaRPr lang="en-US"/>
+          </a:p>
+        </p:txBody>
       </p:sp>
       <p:sp>
         <p:nvSpPr>
@@ -12398,7 +12964,7 @@
           <a:bodyPr wrap="square" lIns="0" tIns="0" rIns="0" bIns="0" rtlCol="0" anchor="ctr"/>
           <a:lstStyle/>
           <a:p>
-            <a:pPr algn="ctr" indent="0" marL="0">
+            <a:pPr marL="0" indent="0" algn="ctr">
               <a:buNone/>
             </a:pPr>
             <a:r>
@@ -12434,7 +13000,7 @@
           <a:bodyPr wrap="square" lIns="0" tIns="0" rIns="0" bIns="0" rtlCol="0" anchor="ctr"/>
           <a:lstStyle/>
           <a:p>
-            <a:pPr algn="l" indent="0" marL="0">
+            <a:pPr marL="0" indent="0" algn="l">
               <a:buNone/>
             </a:pPr>
             <a:r>
@@ -12473,13 +13039,20 @@
             <a:prstDash val="solid"/>
           </a:ln>
           <a:effectLst>
-            <a:outerShdw sx="100000" sy="100000" kx="0" ky="0" algn="bl" rotWithShape="0" blurRad="63500" dist="25400" dir="8100000">
+            <a:outerShdw blurRad="63500" dist="25400" dir="8100000" algn="bl" rotWithShape="0">
               <a:srgbClr val="000000">
                 <a:alpha val="10000"/>
               </a:srgbClr>
             </a:outerShdw>
           </a:effectLst>
         </p:spPr>
+        <p:txBody>
+          <a:bodyPr/>
+          <a:lstStyle/>
+          <a:p>
+            <a:endParaRPr lang="en-US"/>
+          </a:p>
+        </p:txBody>
       </p:sp>
       <p:sp>
         <p:nvSpPr>
@@ -12505,6 +13078,13 @@
             <a:prstDash val="solid"/>
           </a:ln>
         </p:spPr>
+        <p:txBody>
+          <a:bodyPr/>
+          <a:lstStyle/>
+          <a:p>
+            <a:endParaRPr lang="en-US"/>
+          </a:p>
+        </p:txBody>
       </p:sp>
       <p:sp>
         <p:nvSpPr>
@@ -12527,7 +13107,7 @@
           <a:bodyPr wrap="square" lIns="0" tIns="0" rIns="0" bIns="0" rtlCol="0" anchor="ctr"/>
           <a:lstStyle/>
           <a:p>
-            <a:pPr algn="ctr" indent="0" marL="0">
+            <a:pPr marL="0" indent="0" algn="ctr">
               <a:buNone/>
             </a:pPr>
             <a:r>
@@ -12563,7 +13143,7 @@
           <a:bodyPr wrap="square" lIns="0" tIns="0" rIns="0" bIns="0" rtlCol="0" anchor="ctr"/>
           <a:lstStyle/>
           <a:p>
-            <a:pPr algn="l" indent="0" marL="0">
+            <a:pPr marL="0" indent="0" algn="l">
               <a:buNone/>
             </a:pPr>
             <a:r>
@@ -12602,13 +13182,20 @@
             <a:prstDash val="solid"/>
           </a:ln>
           <a:effectLst>
-            <a:outerShdw sx="100000" sy="100000" kx="0" ky="0" algn="bl" rotWithShape="0" blurRad="63500" dist="25400" dir="8100000">
+            <a:outerShdw blurRad="63500" dist="25400" dir="8100000" algn="bl" rotWithShape="0">
               <a:srgbClr val="000000">
                 <a:alpha val="10000"/>
               </a:srgbClr>
             </a:outerShdw>
           </a:effectLst>
         </p:spPr>
+        <p:txBody>
+          <a:bodyPr/>
+          <a:lstStyle/>
+          <a:p>
+            <a:endParaRPr lang="en-US"/>
+          </a:p>
+        </p:txBody>
       </p:sp>
       <p:sp>
         <p:nvSpPr>
@@ -12634,6 +13221,13 @@
             <a:prstDash val="solid"/>
           </a:ln>
         </p:spPr>
+        <p:txBody>
+          <a:bodyPr/>
+          <a:lstStyle/>
+          <a:p>
+            <a:endParaRPr lang="en-US"/>
+          </a:p>
+        </p:txBody>
       </p:sp>
       <p:sp>
         <p:nvSpPr>
@@ -12656,7 +13250,7 @@
           <a:bodyPr wrap="square" lIns="0" tIns="0" rIns="0" bIns="0" rtlCol="0" anchor="ctr"/>
           <a:lstStyle/>
           <a:p>
-            <a:pPr algn="ctr" indent="0" marL="0">
+            <a:pPr marL="0" indent="0" algn="ctr">
               <a:buNone/>
             </a:pPr>
             <a:r>
@@ -12692,7 +13286,7 @@
           <a:bodyPr wrap="square" lIns="0" tIns="0" rIns="0" bIns="0" rtlCol="0" anchor="ctr"/>
           <a:lstStyle/>
           <a:p>
-            <a:pPr algn="l" indent="0" marL="0">
+            <a:pPr marL="0" indent="0" algn="l">
               <a:buNone/>
             </a:pPr>
             <a:r>
@@ -12731,13 +13325,20 @@
             <a:prstDash val="solid"/>
           </a:ln>
           <a:effectLst>
-            <a:outerShdw sx="100000" sy="100000" kx="0" ky="0" algn="bl" rotWithShape="0" blurRad="63500" dist="25400" dir="8100000">
+            <a:outerShdw blurRad="63500" dist="25400" dir="8100000" algn="bl" rotWithShape="0">
               <a:srgbClr val="000000">
                 <a:alpha val="10000"/>
               </a:srgbClr>
             </a:outerShdw>
           </a:effectLst>
         </p:spPr>
+        <p:txBody>
+          <a:bodyPr/>
+          <a:lstStyle/>
+          <a:p>
+            <a:endParaRPr lang="en-US"/>
+          </a:p>
+        </p:txBody>
       </p:sp>
       <p:sp>
         <p:nvSpPr>
@@ -12763,6 +13364,13 @@
             <a:prstDash val="solid"/>
           </a:ln>
         </p:spPr>
+        <p:txBody>
+          <a:bodyPr/>
+          <a:lstStyle/>
+          <a:p>
+            <a:endParaRPr lang="en-US"/>
+          </a:p>
+        </p:txBody>
       </p:sp>
       <p:sp>
         <p:nvSpPr>
@@ -12785,7 +13393,7 @@
           <a:bodyPr wrap="square" lIns="0" tIns="0" rIns="0" bIns="0" rtlCol="0" anchor="ctr"/>
           <a:lstStyle/>
           <a:p>
-            <a:pPr algn="ctr" indent="0" marL="0">
+            <a:pPr marL="0" indent="0" algn="ctr">
               <a:buNone/>
             </a:pPr>
             <a:r>
@@ -12821,7 +13429,7 @@
           <a:bodyPr wrap="square" lIns="0" tIns="0" rIns="0" bIns="0" rtlCol="0" anchor="ctr"/>
           <a:lstStyle/>
           <a:p>
-            <a:pPr algn="l" indent="0" marL="0">
+            <a:pPr marL="0" indent="0" algn="l">
               <a:buNone/>
             </a:pPr>
             <a:r>
@@ -12860,13 +13468,20 @@
             <a:prstDash val="solid"/>
           </a:ln>
           <a:effectLst>
-            <a:outerShdw sx="100000" sy="100000" kx="0" ky="0" algn="bl" rotWithShape="0" blurRad="63500" dist="25400" dir="8100000">
+            <a:outerShdw blurRad="63500" dist="25400" dir="8100000" algn="bl" rotWithShape="0">
               <a:srgbClr val="000000">
                 <a:alpha val="10000"/>
               </a:srgbClr>
             </a:outerShdw>
           </a:effectLst>
         </p:spPr>
+        <p:txBody>
+          <a:bodyPr/>
+          <a:lstStyle/>
+          <a:p>
+            <a:endParaRPr lang="en-US"/>
+          </a:p>
+        </p:txBody>
       </p:sp>
       <p:sp>
         <p:nvSpPr>
@@ -12892,6 +13507,13 @@
             <a:prstDash val="solid"/>
           </a:ln>
         </p:spPr>
+        <p:txBody>
+          <a:bodyPr/>
+          <a:lstStyle/>
+          <a:p>
+            <a:endParaRPr lang="en-US"/>
+          </a:p>
+        </p:txBody>
       </p:sp>
       <p:sp>
         <p:nvSpPr>
@@ -12914,7 +13536,7 @@
           <a:bodyPr wrap="square" lIns="0" tIns="0" rIns="0" bIns="0" rtlCol="0" anchor="ctr"/>
           <a:lstStyle/>
           <a:p>
-            <a:pPr algn="ctr" indent="0" marL="0">
+            <a:pPr marL="0" indent="0" algn="ctr">
               <a:buNone/>
             </a:pPr>
             <a:r>
@@ -12950,7 +13572,7 @@
           <a:bodyPr wrap="square" lIns="0" tIns="0" rIns="0" bIns="0" rtlCol="0" anchor="ctr"/>
           <a:lstStyle/>
           <a:p>
-            <a:pPr algn="l" indent="0" marL="0">
+            <a:pPr marL="0" indent="0" algn="l">
               <a:buNone/>
             </a:pPr>
             <a:r>
@@ -12989,13 +13611,20 @@
             <a:prstDash val="solid"/>
           </a:ln>
           <a:effectLst>
-            <a:outerShdw sx="100000" sy="100000" kx="0" ky="0" algn="bl" rotWithShape="0" blurRad="63500" dist="25400" dir="8100000">
+            <a:outerShdw blurRad="63500" dist="25400" dir="8100000" algn="bl" rotWithShape="0">
               <a:srgbClr val="000000">
                 <a:alpha val="10000"/>
               </a:srgbClr>
             </a:outerShdw>
           </a:effectLst>
         </p:spPr>
+        <p:txBody>
+          <a:bodyPr/>
+          <a:lstStyle/>
+          <a:p>
+            <a:endParaRPr lang="en-US"/>
+          </a:p>
+        </p:txBody>
       </p:sp>
       <p:sp>
         <p:nvSpPr>
@@ -13018,7 +13647,7 @@
           <a:bodyPr wrap="square" lIns="0" tIns="0" rIns="0" bIns="0" rtlCol="0" anchor="ctr"/>
           <a:lstStyle/>
           <a:p>
-            <a:pPr indent="0" marL="0">
+            <a:pPr marL="0" indent="0">
               <a:buNone/>
             </a:pPr>
             <a:r>
@@ -13057,13 +13686,20 @@
             <a:prstDash val="solid"/>
           </a:ln>
           <a:effectLst>
-            <a:outerShdw sx="100000" sy="100000" kx="0" ky="0" algn="bl" rotWithShape="0" blurRad="63500" dist="25400" dir="8100000">
+            <a:outerShdw blurRad="63500" dist="25400" dir="8100000" algn="bl" rotWithShape="0">
               <a:srgbClr val="000000">
                 <a:alpha val="10000"/>
               </a:srgbClr>
             </a:outerShdw>
           </a:effectLst>
         </p:spPr>
+        <p:txBody>
+          <a:bodyPr/>
+          <a:lstStyle/>
+          <a:p>
+            <a:endParaRPr lang="en-US"/>
+          </a:p>
+        </p:txBody>
       </p:sp>
       <p:sp>
         <p:nvSpPr>
@@ -13086,18 +13722,17 @@
           <a:bodyPr wrap="square" lIns="0" tIns="0" rIns="0" bIns="0" rtlCol="0" anchor="ctr"/>
           <a:lstStyle/>
           <a:p>
-            <a:pPr indent="0" marL="0">
+            <a:pPr marL="0" indent="0">
               <a:buNone/>
             </a:pPr>
             <a:r>
               <a:rPr lang="en-US" sz="1100" dirty="0">
                 <a:solidFill>
-                  <a:srgbClr val="000000"/>
+                  <a:schemeClr val="bg1"/>
                 </a:solidFill>
               </a:rPr>
               <a:t>guestroom_yes</a:t>
             </a:r>
-            <a:endParaRPr lang="en-US" sz="1100" dirty="0"/>
           </a:p>
         </p:txBody>
       </p:sp>
@@ -13122,7 +13757,7 @@
           <a:bodyPr wrap="square" lIns="0" tIns="0" rIns="0" bIns="0" rtlCol="0" anchor="ctr"/>
           <a:lstStyle/>
           <a:p>
-            <a:pPr algn="r" indent="0" marL="0">
+            <a:pPr marL="0" indent="0" algn="r">
               <a:buNone/>
             </a:pPr>
             <a:r>
@@ -13161,13 +13796,20 @@
             <a:prstDash val="solid"/>
           </a:ln>
           <a:effectLst>
-            <a:outerShdw sx="100000" sy="100000" kx="0" ky="0" algn="bl" rotWithShape="0" blurRad="63500" dist="25400" dir="8100000">
+            <a:outerShdw blurRad="63500" dist="25400" dir="8100000" algn="bl" rotWithShape="0">
               <a:srgbClr val="000000">
                 <a:alpha val="10000"/>
               </a:srgbClr>
             </a:outerShdw>
           </a:effectLst>
         </p:spPr>
+        <p:txBody>
+          <a:bodyPr/>
+          <a:lstStyle/>
+          <a:p>
+            <a:endParaRPr lang="en-US"/>
+          </a:p>
+        </p:txBody>
       </p:sp>
       <p:sp>
         <p:nvSpPr>
@@ -13190,18 +13832,17 @@
           <a:bodyPr wrap="square" lIns="0" tIns="0" rIns="0" bIns="0" rtlCol="0" anchor="ctr"/>
           <a:lstStyle/>
           <a:p>
-            <a:pPr indent="0" marL="0">
+            <a:pPr marL="0" indent="0">
               <a:buNone/>
             </a:pPr>
             <a:r>
               <a:rPr lang="en-US" sz="1100" dirty="0">
                 <a:solidFill>
-                  <a:srgbClr val="000000"/>
+                  <a:schemeClr val="bg1"/>
                 </a:solidFill>
               </a:rPr>
               <a:t>bedrooms</a:t>
             </a:r>
-            <a:endParaRPr lang="en-US" sz="1100" dirty="0"/>
           </a:p>
         </p:txBody>
       </p:sp>
@@ -13226,7 +13867,7 @@
           <a:bodyPr wrap="square" lIns="0" tIns="0" rIns="0" bIns="0" rtlCol="0" anchor="ctr"/>
           <a:lstStyle/>
           <a:p>
-            <a:pPr algn="r" indent="0" marL="0">
+            <a:pPr marL="0" indent="0" algn="r">
               <a:buNone/>
             </a:pPr>
             <a:r>
@@ -13249,7 +13890,7 @@
         </p:nvSpPr>
         <p:spPr>
           <a:xfrm>
-            <a:off x="5440680" y="2999232"/>
+            <a:off x="5440680" y="3015513"/>
             <a:ext cx="3200400" cy="548640"/>
           </a:xfrm>
           <a:prstGeom prst="rect">
@@ -13265,13 +13906,24 @@
             <a:prstDash val="solid"/>
           </a:ln>
           <a:effectLst>
-            <a:outerShdw sx="100000" sy="100000" kx="0" ky="0" algn="bl" rotWithShape="0" blurRad="63500" dist="25400" dir="8100000">
+            <a:outerShdw blurRad="63500" dist="25400" dir="8100000" algn="bl" rotWithShape="0">
               <a:srgbClr val="000000">
                 <a:alpha val="10000"/>
               </a:srgbClr>
             </a:outerShdw>
           </a:effectLst>
         </p:spPr>
+        <p:txBody>
+          <a:bodyPr/>
+          <a:lstStyle/>
+          <a:p>
+            <a:endParaRPr lang="en-US">
+              <a:solidFill>
+                <a:schemeClr val="bg1"/>
+              </a:solidFill>
+            </a:endParaRPr>
+          </a:p>
+        </p:txBody>
       </p:sp>
       <p:sp>
         <p:nvSpPr>
@@ -13294,18 +13946,17 @@
           <a:bodyPr wrap="square" lIns="0" tIns="0" rIns="0" bIns="0" rtlCol="0" anchor="ctr"/>
           <a:lstStyle/>
           <a:p>
-            <a:pPr indent="0" marL="0">
+            <a:pPr marL="0" indent="0">
               <a:buNone/>
             </a:pPr>
             <a:r>
               <a:rPr lang="en-US" sz="1100" dirty="0">
                 <a:solidFill>
-                  <a:srgbClr val="000000"/>
+                  <a:schemeClr val="bg1"/>
                 </a:solidFill>
               </a:rPr>
               <a:t>furnishingstatus_semi-furnished</a:t>
             </a:r>
-            <a:endParaRPr lang="en-US" sz="1100" dirty="0"/>
           </a:p>
         </p:txBody>
       </p:sp>
@@ -13330,7 +13981,7 @@
           <a:bodyPr wrap="square" lIns="0" tIns="0" rIns="0" bIns="0" rtlCol="0" anchor="ctr"/>
           <a:lstStyle/>
           <a:p>
-            <a:pPr algn="r" indent="0" marL="0">
+            <a:pPr marL="0" indent="0" algn="r">
               <a:buNone/>
             </a:pPr>
             <a:r>
@@ -13353,7 +14004,7 @@
         </p:nvSpPr>
         <p:spPr>
           <a:xfrm>
-            <a:off x="5440680" y="3200400"/>
+            <a:off x="5509260" y="3698912"/>
             <a:ext cx="3200400" cy="594360"/>
           </a:xfrm>
           <a:prstGeom prst="rect">
@@ -13366,18 +14017,22 @@
           <a:bodyPr wrap="square" lIns="0" tIns="0" rIns="0" bIns="0" rtlCol="0" anchor="ctr"/>
           <a:lstStyle/>
           <a:p>
-            <a:pPr indent="0" marL="0">
+            <a:pPr marL="0" indent="0">
               <a:buNone/>
             </a:pPr>
             <a:r>
-              <a:rPr lang="en-US" sz="1100" i="1" dirty="0">
-                <a:solidFill>
-                  <a:srgbClr val="2DA562"/>
+              <a:rPr lang="en-US" sz="1400" b="1" i="1" dirty="0">
+                <a:solidFill>
+                  <a:schemeClr val="bg1"/>
                 </a:solidFill>
               </a:rPr>
               <a:t>→  Mô hình được train chỉ trên 10 features được chọn</a:t>
             </a:r>
-            <a:endParaRPr lang="en-US" sz="1100" dirty="0"/>
+            <a:endParaRPr lang="en-US" sz="1400" b="1" dirty="0">
+              <a:solidFill>
+                <a:schemeClr val="bg1"/>
+              </a:solidFill>
+            </a:endParaRPr>
           </a:p>
         </p:txBody>
       </p:sp>
@@ -13389,8 +14044,8 @@
         </p:nvSpPr>
         <p:spPr>
           <a:xfrm>
-            <a:off x="457200" y="4800600"/>
-            <a:ext cx="8229600" cy="228600"/>
+            <a:off x="889139" y="4784681"/>
+            <a:ext cx="4187492" cy="228600"/>
           </a:xfrm>
           <a:prstGeom prst="rect">
             <a:avLst/>
@@ -13402,7 +14057,7 @@
           <a:bodyPr wrap="square" lIns="0" tIns="0" rIns="0" bIns="0" rtlCol="0" anchor="ctr"/>
           <a:lstStyle/>
           <a:p>
-            <a:pPr algn="ctr" indent="0" marL="0">
+            <a:pPr marL="0" indent="0" algn="ctr">
               <a:buNone/>
             </a:pPr>
             <a:r>
@@ -13433,6 +14088,7 @@
         <a:solidFill>
           <a:srgbClr val="F4F6F9"/>
         </a:solidFill>
+        <a:effectLst/>
       </p:bgPr>
     </p:bg>
     <p:spTree>
@@ -13470,7 +14126,7 @@
           <a:bodyPr wrap="square" lIns="0" tIns="0" rIns="0" bIns="0" rtlCol="0" anchor="ctr"/>
           <a:lstStyle/>
           <a:p>
-            <a:pPr algn="l" indent="0" marL="0">
+            <a:pPr marL="0" indent="0" algn="l">
               <a:buNone/>
             </a:pPr>
             <a:r>
@@ -13512,6 +14168,13 @@
             <a:prstDash val="solid"/>
           </a:ln>
         </p:spPr>
+        <p:txBody>
+          <a:bodyPr/>
+          <a:lstStyle/>
+          <a:p>
+            <a:endParaRPr lang="en-US"/>
+          </a:p>
+        </p:txBody>
       </p:sp>
       <p:sp>
         <p:nvSpPr>
@@ -13539,6 +14202,13 @@
             <a:prstDash val="solid"/>
           </a:ln>
         </p:spPr>
+        <p:txBody>
+          <a:bodyPr/>
+          <a:lstStyle/>
+          <a:p>
+            <a:endParaRPr lang="en-US"/>
+          </a:p>
+        </p:txBody>
       </p:sp>
       <p:sp>
         <p:nvSpPr>
@@ -13561,7 +14231,7 @@
           <a:bodyPr wrap="square" lIns="0" tIns="0" rIns="0" bIns="0" rtlCol="0" anchor="ctr"/>
           <a:lstStyle/>
           <a:p>
-            <a:pPr algn="ctr" indent="0" marL="0">
+            <a:pPr marL="0" indent="0" algn="ctr">
               <a:buNone/>
             </a:pPr>
             <a:r>
@@ -13600,13 +14270,20 @@
             <a:prstDash val="solid"/>
           </a:ln>
           <a:effectLst>
-            <a:outerShdw sx="100000" sy="100000" kx="0" ky="0" algn="bl" rotWithShape="0" blurRad="63500" dist="25400" dir="8100000">
+            <a:outerShdw blurRad="63500" dist="25400" dir="8100000" algn="bl" rotWithShape="0">
               <a:srgbClr val="000000">
                 <a:alpha val="10000"/>
               </a:srgbClr>
             </a:outerShdw>
           </a:effectLst>
         </p:spPr>
+        <p:txBody>
+          <a:bodyPr/>
+          <a:lstStyle/>
+          <a:p>
+            <a:endParaRPr lang="en-US"/>
+          </a:p>
+        </p:txBody>
       </p:sp>
       <p:sp>
         <p:nvSpPr>
@@ -13629,7 +14306,7 @@
           <a:bodyPr wrap="square" lIns="0" tIns="0" rIns="0" bIns="0" rtlCol="0" anchor="ctr"/>
           <a:lstStyle/>
           <a:p>
-            <a:pPr algn="ctr" indent="0" marL="0">
+            <a:pPr marL="0" indent="0" algn="ctr">
               <a:buNone/>
             </a:pPr>
             <a:r>
@@ -13668,7 +14345,7 @@
           <a:bodyPr wrap="square" lIns="0" tIns="0" rIns="0" bIns="0" rtlCol="0" anchor="ctr"/>
           <a:lstStyle/>
           <a:p>
-            <a:pPr indent="0" marL="0">
+            <a:pPr marL="0" indent="0">
               <a:buNone/>
             </a:pPr>
             <a:r>
@@ -13692,7 +14369,7 @@
           <p:nvPr>
             <p:extLst>
               <p:ext uri="{D42A27DB-BD31-4B8C-83A1-F6EECF244321}">
-                <p14:modId xmlns:p14="http://schemas.microsoft.com/office/powerpoint/2010/main" val="1579011935"/>
+                <p14:modId xmlns:p14="http://schemas.microsoft.com/office/powerpoint/2010/main" val="145839541"/>
               </p:ext>
             </p:extLst>
           </p:nvPr>
@@ -13706,8 +14383,20 @@
             <a:tbl>
               <a:tblPr/>
               <a:tblGrid>
-                <a:gridCol w="2926080"/>
-                <a:gridCol w="1737360"/>
+                <a:gridCol w="2926080">
+                  <a:extLst>
+                    <a:ext uri="{9D8B030D-6E8A-4147-A177-3AD203B41FA5}">
+                      <a16:colId xmlns:a16="http://schemas.microsoft.com/office/drawing/2014/main" val="20000"/>
+                    </a:ext>
+                  </a:extLst>
+                </a:gridCol>
+                <a:gridCol w="1737360">
+                  <a:extLst>
+                    <a:ext uri="{9D8B030D-6E8A-4147-A177-3AD203B41FA5}">
+                      <a16:colId xmlns:a16="http://schemas.microsoft.com/office/drawing/2014/main" val="20001"/>
+                    </a:ext>
+                  </a:extLst>
+                </a:gridCol>
               </a:tblGrid>
               <a:tr h="228600">
                 <a:tc>
@@ -13715,7 +14404,7 @@
                     <a:bodyPr/>
                     <a:lstStyle/>
                     <a:p>
-                      <a:pPr algn="l" indent="0" marL="0">
+                      <a:pPr marL="0" indent="0" algn="l">
                         <a:buNone/>
                       </a:pPr>
                       <a:r>
@@ -13729,7 +14418,7 @@
                       <a:endParaRPr lang="en-US" sz="900" dirty="0"/>
                     </a:p>
                   </a:txBody>
-                  <a:tcPr marL="91440" marR="91440" marT="45720" marB="45720">
+                  <a:tcPr>
                     <a:lnL w="6350" cap="flat" cmpd="sng" algn="ctr">
                       <a:solidFill>
                         <a:srgbClr val="E8EDF3"/>
@@ -13776,21 +14465,21 @@
                     <a:bodyPr/>
                     <a:lstStyle/>
                     <a:p>
-                      <a:pPr algn="r" indent="0" marL="0">
+                      <a:pPr marL="0" indent="0" algn="r">
                         <a:buNone/>
                       </a:pPr>
                       <a:r>
-                        <a:rPr lang="en-US" sz="900" b="1" dirty="0">
+                        <a:rPr lang="en-US" sz="900" b="1">
                           <a:solidFill>
                             <a:srgbClr val="FFFFFF"/>
                           </a:solidFill>
                         </a:rPr>
-                        <a:t>Coefficient (VND)</a:t>
+                        <a:t>Coefficient</a:t>
                       </a:r>
                       <a:endParaRPr lang="en-US" sz="900" dirty="0"/>
                     </a:p>
                   </a:txBody>
-                  <a:tcPr marL="91440" marR="91440" marT="45720" marB="45720">
+                  <a:tcPr>
                     <a:lnL w="6350" cap="flat" cmpd="sng" algn="ctr">
                       <a:solidFill>
                         <a:srgbClr val="E8EDF3"/>
@@ -13832,6 +14521,11 @@
                     </a:solidFill>
                   </a:tcPr>
                 </a:tc>
+                <a:extLst>
+                  <a:ext uri="{0D108BD9-81ED-4DB2-BD59-A6C34878D82A}">
+                    <a16:rowId xmlns:a16="http://schemas.microsoft.com/office/drawing/2014/main" val="10000"/>
+                  </a:ext>
+                </a:extLst>
               </a:tr>
               <a:tr h="228600">
                 <a:tc>
@@ -13839,7 +14533,7 @@
                     <a:bodyPr/>
                     <a:lstStyle/>
                     <a:p>
-                      <a:pPr algn="l" indent="0" marL="0">
+                      <a:pPr marL="0" indent="0" algn="l">
                         <a:buNone/>
                       </a:pPr>
                       <a:r>
@@ -13853,7 +14547,7 @@
                       <a:endParaRPr lang="en-US" sz="900" dirty="0"/>
                     </a:p>
                   </a:txBody>
-                  <a:tcPr marL="91440" marR="91440" marT="45720" marB="45720">
+                  <a:tcPr>
                     <a:lnL w="6350" cap="flat" cmpd="sng" algn="ctr">
                       <a:solidFill>
                         <a:srgbClr val="E8EDF3"/>
@@ -13900,7 +14594,7 @@
                     <a:bodyPr/>
                     <a:lstStyle/>
                     <a:p>
-                      <a:pPr algn="r" indent="0" marL="0">
+                      <a:pPr marL="0" indent="0" algn="r">
                         <a:buNone/>
                       </a:pPr>
                       <a:r>
@@ -13914,7 +14608,7 @@
                       <a:endParaRPr lang="en-US" sz="900" dirty="0"/>
                     </a:p>
                   </a:txBody>
-                  <a:tcPr marL="91440" marR="91440" marT="45720" marB="45720">
+                  <a:tcPr>
                     <a:lnL w="6350" cap="flat" cmpd="sng" algn="ctr">
                       <a:solidFill>
                         <a:srgbClr val="E8EDF3"/>
@@ -13956,6 +14650,11 @@
                     </a:solidFill>
                   </a:tcPr>
                 </a:tc>
+                <a:extLst>
+                  <a:ext uri="{0D108BD9-81ED-4DB2-BD59-A6C34878D82A}">
+                    <a16:rowId xmlns:a16="http://schemas.microsoft.com/office/drawing/2014/main" val="10001"/>
+                  </a:ext>
+                </a:extLst>
               </a:tr>
               <a:tr h="228600">
                 <a:tc>
@@ -13963,7 +14662,7 @@
                     <a:bodyPr/>
                     <a:lstStyle/>
                     <a:p>
-                      <a:pPr algn="l" indent="0" marL="0">
+                      <a:pPr marL="0" indent="0" algn="l">
                         <a:buNone/>
                       </a:pPr>
                       <a:r>
@@ -13977,7 +14676,7 @@
                       <a:endParaRPr lang="en-US" sz="900" dirty="0"/>
                     </a:p>
                   </a:txBody>
-                  <a:tcPr marL="91440" marR="91440" marT="45720" marB="45720">
+                  <a:tcPr>
                     <a:lnL w="6350" cap="flat" cmpd="sng" algn="ctr">
                       <a:solidFill>
                         <a:srgbClr val="E8EDF3"/>
@@ -14024,7 +14723,7 @@
                     <a:bodyPr/>
                     <a:lstStyle/>
                     <a:p>
-                      <a:pPr algn="r" indent="0" marL="0">
+                      <a:pPr marL="0" indent="0" algn="r">
                         <a:buNone/>
                       </a:pPr>
                       <a:r>
@@ -14038,7 +14737,7 @@
                       <a:endParaRPr lang="en-US" sz="900" dirty="0"/>
                     </a:p>
                   </a:txBody>
-                  <a:tcPr marL="91440" marR="91440" marT="45720" marB="45720">
+                  <a:tcPr>
                     <a:lnL w="6350" cap="flat" cmpd="sng" algn="ctr">
                       <a:solidFill>
                         <a:srgbClr val="E8EDF3"/>
@@ -14080,6 +14779,11 @@
                     </a:solidFill>
                   </a:tcPr>
                 </a:tc>
+                <a:extLst>
+                  <a:ext uri="{0D108BD9-81ED-4DB2-BD59-A6C34878D82A}">
+                    <a16:rowId xmlns:a16="http://schemas.microsoft.com/office/drawing/2014/main" val="10002"/>
+                  </a:ext>
+                </a:extLst>
               </a:tr>
               <a:tr h="228600">
                 <a:tc>
@@ -14087,7 +14791,7 @@
                     <a:bodyPr/>
                     <a:lstStyle/>
                     <a:p>
-                      <a:pPr algn="l" indent="0" marL="0">
+                      <a:pPr marL="0" indent="0" algn="l">
                         <a:buNone/>
                       </a:pPr>
                       <a:r>
@@ -14101,7 +14805,7 @@
                       <a:endParaRPr lang="en-US" sz="900" dirty="0"/>
                     </a:p>
                   </a:txBody>
-                  <a:tcPr marL="91440" marR="91440" marT="45720" marB="45720">
+                  <a:tcPr>
                     <a:lnL w="6350" cap="flat" cmpd="sng" algn="ctr">
                       <a:solidFill>
                         <a:srgbClr val="E8EDF3"/>
@@ -14148,7 +14852,7 @@
                     <a:bodyPr/>
                     <a:lstStyle/>
                     <a:p>
-                      <a:pPr algn="r" indent="0" marL="0">
+                      <a:pPr marL="0" indent="0" algn="r">
                         <a:buNone/>
                       </a:pPr>
                       <a:r>
@@ -14162,7 +14866,7 @@
                       <a:endParaRPr lang="en-US" sz="900" dirty="0"/>
                     </a:p>
                   </a:txBody>
-                  <a:tcPr marL="91440" marR="91440" marT="45720" marB="45720">
+                  <a:tcPr>
                     <a:lnL w="6350" cap="flat" cmpd="sng" algn="ctr">
                       <a:solidFill>
                         <a:srgbClr val="E8EDF3"/>
@@ -14204,6 +14908,11 @@
                     </a:solidFill>
                   </a:tcPr>
                 </a:tc>
+                <a:extLst>
+                  <a:ext uri="{0D108BD9-81ED-4DB2-BD59-A6C34878D82A}">
+                    <a16:rowId xmlns:a16="http://schemas.microsoft.com/office/drawing/2014/main" val="10003"/>
+                  </a:ext>
+                </a:extLst>
               </a:tr>
               <a:tr h="228600">
                 <a:tc>
@@ -14211,7 +14920,7 @@
                     <a:bodyPr/>
                     <a:lstStyle/>
                     <a:p>
-                      <a:pPr algn="l" indent="0" marL="0">
+                      <a:pPr marL="0" indent="0" algn="l">
                         <a:buNone/>
                       </a:pPr>
                       <a:r>
@@ -14225,7 +14934,7 @@
                       <a:endParaRPr lang="en-US" sz="900" dirty="0"/>
                     </a:p>
                   </a:txBody>
-                  <a:tcPr marL="91440" marR="91440" marT="45720" marB="45720">
+                  <a:tcPr>
                     <a:lnL w="6350" cap="flat" cmpd="sng" algn="ctr">
                       <a:solidFill>
                         <a:srgbClr val="E8EDF3"/>
@@ -14272,7 +14981,7 @@
                     <a:bodyPr/>
                     <a:lstStyle/>
                     <a:p>
-                      <a:pPr algn="r" indent="0" marL="0">
+                      <a:pPr marL="0" indent="0" algn="r">
                         <a:buNone/>
                       </a:pPr>
                       <a:r>
@@ -14286,7 +14995,7 @@
                       <a:endParaRPr lang="en-US" sz="900" dirty="0"/>
                     </a:p>
                   </a:txBody>
-                  <a:tcPr marL="91440" marR="91440" marT="45720" marB="45720">
+                  <a:tcPr>
                     <a:lnL w="6350" cap="flat" cmpd="sng" algn="ctr">
                       <a:solidFill>
                         <a:srgbClr val="E8EDF3"/>
@@ -14328,6 +15037,11 @@
                     </a:solidFill>
                   </a:tcPr>
                 </a:tc>
+                <a:extLst>
+                  <a:ext uri="{0D108BD9-81ED-4DB2-BD59-A6C34878D82A}">
+                    <a16:rowId xmlns:a16="http://schemas.microsoft.com/office/drawing/2014/main" val="10004"/>
+                  </a:ext>
+                </a:extLst>
               </a:tr>
               <a:tr h="228600">
                 <a:tc>
@@ -14335,7 +15049,7 @@
                     <a:bodyPr/>
                     <a:lstStyle/>
                     <a:p>
-                      <a:pPr algn="l" indent="0" marL="0">
+                      <a:pPr marL="0" indent="0" algn="l">
                         <a:buNone/>
                       </a:pPr>
                       <a:r>
@@ -14349,7 +15063,7 @@
                       <a:endParaRPr lang="en-US" sz="900" dirty="0"/>
                     </a:p>
                   </a:txBody>
-                  <a:tcPr marL="91440" marR="91440" marT="45720" marB="45720">
+                  <a:tcPr>
                     <a:lnL w="6350" cap="flat" cmpd="sng" algn="ctr">
                       <a:solidFill>
                         <a:srgbClr val="E8EDF3"/>
@@ -14396,7 +15110,7 @@
                     <a:bodyPr/>
                     <a:lstStyle/>
                     <a:p>
-                      <a:pPr algn="r" indent="0" marL="0">
+                      <a:pPr marL="0" indent="0" algn="r">
                         <a:buNone/>
                       </a:pPr>
                       <a:r>
@@ -14410,7 +15124,7 @@
                       <a:endParaRPr lang="en-US" sz="900" dirty="0"/>
                     </a:p>
                   </a:txBody>
-                  <a:tcPr marL="91440" marR="91440" marT="45720" marB="45720">
+                  <a:tcPr>
                     <a:lnL w="6350" cap="flat" cmpd="sng" algn="ctr">
                       <a:solidFill>
                         <a:srgbClr val="E8EDF3"/>
@@ -14452,6 +15166,11 @@
                     </a:solidFill>
                   </a:tcPr>
                 </a:tc>
+                <a:extLst>
+                  <a:ext uri="{0D108BD9-81ED-4DB2-BD59-A6C34878D82A}">
+                    <a16:rowId xmlns:a16="http://schemas.microsoft.com/office/drawing/2014/main" val="10005"/>
+                  </a:ext>
+                </a:extLst>
               </a:tr>
               <a:tr h="228600">
                 <a:tc>
@@ -14459,7 +15178,7 @@
                     <a:bodyPr/>
                     <a:lstStyle/>
                     <a:p>
-                      <a:pPr algn="l" indent="0" marL="0">
+                      <a:pPr marL="0" indent="0" algn="l">
                         <a:buNone/>
                       </a:pPr>
                       <a:r>
@@ -14473,7 +15192,7 @@
                       <a:endParaRPr lang="en-US" sz="900" dirty="0"/>
                     </a:p>
                   </a:txBody>
-                  <a:tcPr marL="91440" marR="91440" marT="45720" marB="45720">
+                  <a:tcPr>
                     <a:lnL w="6350" cap="flat" cmpd="sng" algn="ctr">
                       <a:solidFill>
                         <a:srgbClr val="E8EDF3"/>
@@ -14520,7 +15239,7 @@
                     <a:bodyPr/>
                     <a:lstStyle/>
                     <a:p>
-                      <a:pPr algn="r" indent="0" marL="0">
+                      <a:pPr marL="0" indent="0" algn="r">
                         <a:buNone/>
                       </a:pPr>
                       <a:r>
@@ -14534,7 +15253,7 @@
                       <a:endParaRPr lang="en-US" sz="900" dirty="0"/>
                     </a:p>
                   </a:txBody>
-                  <a:tcPr marL="91440" marR="91440" marT="45720" marB="45720">
+                  <a:tcPr>
                     <a:lnL w="6350" cap="flat" cmpd="sng" algn="ctr">
                       <a:solidFill>
                         <a:srgbClr val="E8EDF3"/>
@@ -14576,6 +15295,11 @@
                     </a:solidFill>
                   </a:tcPr>
                 </a:tc>
+                <a:extLst>
+                  <a:ext uri="{0D108BD9-81ED-4DB2-BD59-A6C34878D82A}">
+                    <a16:rowId xmlns:a16="http://schemas.microsoft.com/office/drawing/2014/main" val="10006"/>
+                  </a:ext>
+                </a:extLst>
               </a:tr>
               <a:tr h="228600">
                 <a:tc>
@@ -14583,7 +15307,7 @@
                     <a:bodyPr/>
                     <a:lstStyle/>
                     <a:p>
-                      <a:pPr algn="l" indent="0" marL="0">
+                      <a:pPr marL="0" indent="0" algn="l">
                         <a:buNone/>
                       </a:pPr>
                       <a:r>
@@ -14597,7 +15321,7 @@
                       <a:endParaRPr lang="en-US" sz="900" dirty="0"/>
                     </a:p>
                   </a:txBody>
-                  <a:tcPr marL="91440" marR="91440" marT="45720" marB="45720">
+                  <a:tcPr>
                     <a:lnL w="6350" cap="flat" cmpd="sng" algn="ctr">
                       <a:solidFill>
                         <a:srgbClr val="E8EDF3"/>
@@ -14644,7 +15368,7 @@
                     <a:bodyPr/>
                     <a:lstStyle/>
                     <a:p>
-                      <a:pPr algn="r" indent="0" marL="0">
+                      <a:pPr marL="0" indent="0" algn="r">
                         <a:buNone/>
                       </a:pPr>
                       <a:r>
@@ -14658,7 +15382,7 @@
                       <a:endParaRPr lang="en-US" sz="900" dirty="0"/>
                     </a:p>
                   </a:txBody>
-                  <a:tcPr marL="91440" marR="91440" marT="45720" marB="45720">
+                  <a:tcPr>
                     <a:lnL w="6350" cap="flat" cmpd="sng" algn="ctr">
                       <a:solidFill>
                         <a:srgbClr val="E8EDF3"/>
@@ -14700,6 +15424,11 @@
                     </a:solidFill>
                   </a:tcPr>
                 </a:tc>
+                <a:extLst>
+                  <a:ext uri="{0D108BD9-81ED-4DB2-BD59-A6C34878D82A}">
+                    <a16:rowId xmlns:a16="http://schemas.microsoft.com/office/drawing/2014/main" val="10007"/>
+                  </a:ext>
+                </a:extLst>
               </a:tr>
               <a:tr h="228600">
                 <a:tc>
@@ -14707,7 +15436,7 @@
                     <a:bodyPr/>
                     <a:lstStyle/>
                     <a:p>
-                      <a:pPr algn="l" indent="0" marL="0">
+                      <a:pPr marL="0" indent="0" algn="l">
                         <a:buNone/>
                       </a:pPr>
                       <a:r>
@@ -14721,7 +15450,7 @@
                       <a:endParaRPr lang="en-US" sz="900" dirty="0"/>
                     </a:p>
                   </a:txBody>
-                  <a:tcPr marL="91440" marR="91440" marT="45720" marB="45720">
+                  <a:tcPr>
                     <a:lnL w="6350" cap="flat" cmpd="sng" algn="ctr">
                       <a:solidFill>
                         <a:srgbClr val="E8EDF3"/>
@@ -14768,7 +15497,7 @@
                     <a:bodyPr/>
                     <a:lstStyle/>
                     <a:p>
-                      <a:pPr algn="r" indent="0" marL="0">
+                      <a:pPr marL="0" indent="0" algn="r">
                         <a:buNone/>
                       </a:pPr>
                       <a:r>
@@ -14782,7 +15511,7 @@
                       <a:endParaRPr lang="en-US" sz="900" dirty="0"/>
                     </a:p>
                   </a:txBody>
-                  <a:tcPr marL="91440" marR="91440" marT="45720" marB="45720">
+                  <a:tcPr>
                     <a:lnL w="6350" cap="flat" cmpd="sng" algn="ctr">
                       <a:solidFill>
                         <a:srgbClr val="E8EDF3"/>
@@ -14824,6 +15553,11 @@
                     </a:solidFill>
                   </a:tcPr>
                 </a:tc>
+                <a:extLst>
+                  <a:ext uri="{0D108BD9-81ED-4DB2-BD59-A6C34878D82A}">
+                    <a16:rowId xmlns:a16="http://schemas.microsoft.com/office/drawing/2014/main" val="10008"/>
+                  </a:ext>
+                </a:extLst>
               </a:tr>
               <a:tr h="228600">
                 <a:tc>
@@ -14831,7 +15565,7 @@
                     <a:bodyPr/>
                     <a:lstStyle/>
                     <a:p>
-                      <a:pPr algn="l" indent="0" marL="0">
+                      <a:pPr marL="0" indent="0" algn="l">
                         <a:buNone/>
                       </a:pPr>
                       <a:r>
@@ -14845,7 +15579,7 @@
                       <a:endParaRPr lang="en-US" sz="900" dirty="0"/>
                     </a:p>
                   </a:txBody>
-                  <a:tcPr marL="91440" marR="91440" marT="45720" marB="45720">
+                  <a:tcPr>
                     <a:lnL w="6350" cap="flat" cmpd="sng" algn="ctr">
                       <a:solidFill>
                         <a:srgbClr val="E8EDF3"/>
@@ -14892,7 +15626,7 @@
                     <a:bodyPr/>
                     <a:lstStyle/>
                     <a:p>
-                      <a:pPr algn="r" indent="0" marL="0">
+                      <a:pPr marL="0" indent="0" algn="r">
                         <a:buNone/>
                       </a:pPr>
                       <a:r>
@@ -14906,7 +15640,7 @@
                       <a:endParaRPr lang="en-US" sz="900" dirty="0"/>
                     </a:p>
                   </a:txBody>
-                  <a:tcPr marL="91440" marR="91440" marT="45720" marB="45720">
+                  <a:tcPr>
                     <a:lnL w="6350" cap="flat" cmpd="sng" algn="ctr">
                       <a:solidFill>
                         <a:srgbClr val="E8EDF3"/>
@@ -14948,6 +15682,11 @@
                     </a:solidFill>
                   </a:tcPr>
                 </a:tc>
+                <a:extLst>
+                  <a:ext uri="{0D108BD9-81ED-4DB2-BD59-A6C34878D82A}">
+                    <a16:rowId xmlns:a16="http://schemas.microsoft.com/office/drawing/2014/main" val="10009"/>
+                  </a:ext>
+                </a:extLst>
               </a:tr>
               <a:tr h="228600">
                 <a:tc>
@@ -14955,7 +15694,7 @@
                     <a:bodyPr/>
                     <a:lstStyle/>
                     <a:p>
-                      <a:pPr algn="l" indent="0" marL="0">
+                      <a:pPr marL="0" indent="0" algn="l">
                         <a:buNone/>
                       </a:pPr>
                       <a:r>
@@ -14969,7 +15708,7 @@
                       <a:endParaRPr lang="en-US" sz="900" dirty="0"/>
                     </a:p>
                   </a:txBody>
-                  <a:tcPr marL="91440" marR="91440" marT="45720" marB="45720">
+                  <a:tcPr>
                     <a:lnL w="6350" cap="flat" cmpd="sng" algn="ctr">
                       <a:solidFill>
                         <a:srgbClr val="E8EDF3"/>
@@ -15016,7 +15755,7 @@
                     <a:bodyPr/>
                     <a:lstStyle/>
                     <a:p>
-                      <a:pPr algn="r" indent="0" marL="0">
+                      <a:pPr marL="0" indent="0" algn="r">
                         <a:buNone/>
                       </a:pPr>
                       <a:r>
@@ -15030,7 +15769,7 @@
                       <a:endParaRPr lang="en-US" sz="900" dirty="0"/>
                     </a:p>
                   </a:txBody>
-                  <a:tcPr marL="91440" marR="91440" marT="45720" marB="45720">
+                  <a:tcPr>
                     <a:lnL w="6350" cap="flat" cmpd="sng" algn="ctr">
                       <a:solidFill>
                         <a:srgbClr val="E8EDF3"/>
@@ -15072,6 +15811,11 @@
                     </a:solidFill>
                   </a:tcPr>
                 </a:tc>
+                <a:extLst>
+                  <a:ext uri="{0D108BD9-81ED-4DB2-BD59-A6C34878D82A}">
+                    <a16:rowId xmlns:a16="http://schemas.microsoft.com/office/drawing/2014/main" val="10010"/>
+                  </a:ext>
+                </a:extLst>
               </a:tr>
               <a:tr h="228600">
                 <a:tc>
@@ -15079,7 +15823,7 @@
                     <a:bodyPr/>
                     <a:lstStyle/>
                     <a:p>
-                      <a:pPr algn="l" indent="0" marL="0">
+                      <a:pPr marL="0" indent="0" algn="l">
                         <a:buNone/>
                       </a:pPr>
                       <a:r>
@@ -15093,7 +15837,7 @@
                       <a:endParaRPr lang="en-US" sz="900" dirty="0"/>
                     </a:p>
                   </a:txBody>
-                  <a:tcPr marL="91440" marR="91440" marT="45720" marB="45720">
+                  <a:tcPr>
                     <a:lnL w="6350" cap="flat" cmpd="sng" algn="ctr">
                       <a:solidFill>
                         <a:srgbClr val="E8EDF3"/>
@@ -15140,7 +15884,7 @@
                     <a:bodyPr/>
                     <a:lstStyle/>
                     <a:p>
-                      <a:pPr algn="r" indent="0" marL="0">
+                      <a:pPr marL="0" indent="0" algn="r">
                         <a:buNone/>
                       </a:pPr>
                       <a:r>
@@ -15154,7 +15898,7 @@
                       <a:endParaRPr lang="en-US" sz="900" dirty="0"/>
                     </a:p>
                   </a:txBody>
-                  <a:tcPr marL="91440" marR="91440" marT="45720" marB="45720">
+                  <a:tcPr>
                     <a:lnL w="6350" cap="flat" cmpd="sng" algn="ctr">
                       <a:solidFill>
                         <a:srgbClr val="E8EDF3"/>
@@ -15196,6 +15940,11 @@
                     </a:solidFill>
                   </a:tcPr>
                 </a:tc>
+                <a:extLst>
+                  <a:ext uri="{0D108BD9-81ED-4DB2-BD59-A6C34878D82A}">
+                    <a16:rowId xmlns:a16="http://schemas.microsoft.com/office/drawing/2014/main" val="10011"/>
+                  </a:ext>
+                </a:extLst>
               </a:tr>
             </a:tbl>
           </a:graphicData>
@@ -15225,13 +15974,20 @@
             <a:prstDash val="solid"/>
           </a:ln>
           <a:effectLst>
-            <a:outerShdw sx="100000" sy="100000" kx="0" ky="0" algn="bl" rotWithShape="0" blurRad="63500" dist="25400" dir="8100000">
+            <a:outerShdw blurRad="63500" dist="25400" dir="8100000" algn="bl" rotWithShape="0">
               <a:srgbClr val="000000">
                 <a:alpha val="10000"/>
               </a:srgbClr>
             </a:outerShdw>
           </a:effectLst>
         </p:spPr>
+        <p:txBody>
+          <a:bodyPr/>
+          <a:lstStyle/>
+          <a:p>
+            <a:endParaRPr lang="en-US"/>
+          </a:p>
+        </p:txBody>
       </p:sp>
       <p:sp>
         <p:nvSpPr>
@@ -15254,7 +16010,7 @@
           <a:bodyPr wrap="square" lIns="0" tIns="0" rIns="0" bIns="0" rtlCol="0" anchor="ctr"/>
           <a:lstStyle/>
           <a:p>
-            <a:pPr indent="0" marL="0">
+            <a:pPr marL="0" indent="0">
               <a:buNone/>
             </a:pPr>
             <a:r>
@@ -15290,7 +16046,7 @@
           <a:bodyPr wrap="square" lIns="0" tIns="0" rIns="0" bIns="0" rtlCol="0" anchor="ctr"/>
           <a:lstStyle/>
           <a:p>
-            <a:pPr indent="0" marL="0">
+            <a:pPr marL="0" indent="0">
               <a:buNone/>
             </a:pPr>
             <a:r>
@@ -15326,7 +16082,7 @@
           <a:bodyPr wrap="square" lIns="0" tIns="0" rIns="0" bIns="0" rtlCol="0" anchor="ctr"/>
           <a:lstStyle/>
           <a:p>
-            <a:pPr indent="0" marL="0">
+            <a:pPr marL="0" indent="0">
               <a:buNone/>
             </a:pPr>
             <a:r>
@@ -15362,7 +16118,7 @@
           <a:bodyPr wrap="square" lIns="0" tIns="0" rIns="0" bIns="0" rtlCol="0" anchor="ctr"/>
           <a:lstStyle/>
           <a:p>
-            <a:pPr indent="0" marL="0">
+            <a:pPr marL="0" indent="0">
               <a:buNone/>
             </a:pPr>
             <a:r>
@@ -15398,7 +16154,7 @@
           <a:bodyPr wrap="square" lIns="0" tIns="0" rIns="0" bIns="0" rtlCol="0" anchor="ctr"/>
           <a:lstStyle/>
           <a:p>
-            <a:pPr indent="0" marL="0">
+            <a:pPr marL="0" indent="0">
               <a:buNone/>
             </a:pPr>
             <a:r>
@@ -15434,7 +16190,7 @@
           <a:bodyPr wrap="square" lIns="0" tIns="0" rIns="0" bIns="0" rtlCol="0" anchor="ctr"/>
           <a:lstStyle/>
           <a:p>
-            <a:pPr indent="0" marL="0">
+            <a:pPr marL="0" indent="0">
               <a:buNone/>
             </a:pPr>
             <a:r>
@@ -15465,6 +16221,7 @@
         <a:solidFill>
           <a:srgbClr val="1A2E4A"/>
         </a:solidFill>
+        <a:effectLst/>
       </p:bgPr>
     </p:bg>
     <p:spTree>
@@ -15507,6 +16264,13 @@
             <a:prstDash val="solid"/>
           </a:ln>
         </p:spPr>
+        <p:txBody>
+          <a:bodyPr/>
+          <a:lstStyle/>
+          <a:p>
+            <a:endParaRPr lang="en-US"/>
+          </a:p>
+        </p:txBody>
       </p:sp>
       <p:sp>
         <p:nvSpPr>
@@ -15529,7 +16293,7 @@
           <a:bodyPr wrap="square" lIns="0" tIns="0" rIns="0" bIns="0" rtlCol="0" anchor="ctr"/>
           <a:lstStyle/>
           <a:p>
-            <a:pPr algn="ctr" indent="0" marL="0">
+            <a:pPr marL="0" indent="0" algn="ctr">
               <a:buNone/>
             </a:pPr>
             <a:r>
@@ -15565,7 +16329,7 @@
           <a:bodyPr wrap="square" lIns="0" tIns="0" rIns="0" bIns="0" rtlCol="0" anchor="ctr"/>
           <a:lstStyle/>
           <a:p>
-            <a:pPr algn="l" indent="0" marL="0">
+            <a:pPr marL="0" indent="0" algn="l">
               <a:buNone/>
             </a:pPr>
             <a:r>
@@ -15604,13 +16368,20 @@
             <a:prstDash val="solid"/>
           </a:ln>
           <a:effectLst>
-            <a:outerShdw sx="100000" sy="100000" kx="0" ky="0" algn="bl" rotWithShape="0" blurRad="63500" dist="25400" dir="8100000">
+            <a:outerShdw blurRad="63500" dist="25400" dir="8100000" algn="bl" rotWithShape="0">
               <a:srgbClr val="000000">
                 <a:alpha val="10000"/>
               </a:srgbClr>
             </a:outerShdw>
           </a:effectLst>
         </p:spPr>
+        <p:txBody>
+          <a:bodyPr/>
+          <a:lstStyle/>
+          <a:p>
+            <a:endParaRPr lang="en-US"/>
+          </a:p>
+        </p:txBody>
       </p:sp>
       <p:sp>
         <p:nvSpPr>
@@ -15636,6 +16407,13 @@
             <a:prstDash val="solid"/>
           </a:ln>
         </p:spPr>
+        <p:txBody>
+          <a:bodyPr/>
+          <a:lstStyle/>
+          <a:p>
+            <a:endParaRPr lang="en-US"/>
+          </a:p>
+        </p:txBody>
       </p:sp>
       <p:sp>
         <p:nvSpPr>
@@ -15658,7 +16436,7 @@
           <a:bodyPr wrap="square" lIns="0" tIns="0" rIns="0" bIns="0" rtlCol="0" anchor="ctr"/>
           <a:lstStyle/>
           <a:p>
-            <a:pPr algn="ctr" indent="0" marL="0">
+            <a:pPr marL="0" indent="0" algn="ctr">
               <a:buNone/>
             </a:pPr>
             <a:r>
@@ -15694,7 +16472,7 @@
           <a:bodyPr wrap="square" lIns="0" tIns="0" rIns="0" bIns="0" rtlCol="0" anchor="ctr"/>
           <a:lstStyle/>
           <a:p>
-            <a:pPr algn="ctr" indent="0" marL="0">
+            <a:pPr marL="0" indent="0" algn="ctr">
               <a:buNone/>
             </a:pPr>
             <a:r>
@@ -15730,7 +16508,7 @@
           <a:bodyPr wrap="square" lIns="0" tIns="0" rIns="0" bIns="0" rtlCol="0" anchor="ctr"/>
           <a:lstStyle/>
           <a:p>
-            <a:pPr algn="ctr" indent="0" marL="0">
+            <a:pPr marL="0" indent="0" algn="ctr">
               <a:buNone/>
             </a:pPr>
             <a:r>
@@ -15769,13 +16547,20 @@
             <a:prstDash val="solid"/>
           </a:ln>
           <a:effectLst>
-            <a:outerShdw sx="100000" sy="100000" kx="0" ky="0" algn="bl" rotWithShape="0" blurRad="63500" dist="25400" dir="8100000">
+            <a:outerShdw blurRad="63500" dist="25400" dir="8100000" algn="bl" rotWithShape="0">
               <a:srgbClr val="000000">
                 <a:alpha val="10000"/>
               </a:srgbClr>
             </a:outerShdw>
           </a:effectLst>
         </p:spPr>
+        <p:txBody>
+          <a:bodyPr/>
+          <a:lstStyle/>
+          <a:p>
+            <a:endParaRPr lang="en-US"/>
+          </a:p>
+        </p:txBody>
       </p:sp>
       <p:sp>
         <p:nvSpPr>
@@ -15801,6 +16586,13 @@
             <a:prstDash val="solid"/>
           </a:ln>
         </p:spPr>
+        <p:txBody>
+          <a:bodyPr/>
+          <a:lstStyle/>
+          <a:p>
+            <a:endParaRPr lang="en-US"/>
+          </a:p>
+        </p:txBody>
       </p:sp>
       <p:sp>
         <p:nvSpPr>
@@ -15823,7 +16615,7 @@
           <a:bodyPr wrap="square" lIns="0" tIns="0" rIns="0" bIns="0" rtlCol="0" anchor="ctr"/>
           <a:lstStyle/>
           <a:p>
-            <a:pPr algn="ctr" indent="0" marL="0">
+            <a:pPr marL="0" indent="0" algn="ctr">
               <a:buNone/>
             </a:pPr>
             <a:r>
@@ -15859,7 +16651,7 @@
           <a:bodyPr wrap="square" lIns="0" tIns="0" rIns="0" bIns="0" rtlCol="0" anchor="ctr"/>
           <a:lstStyle/>
           <a:p>
-            <a:pPr algn="ctr" indent="0" marL="0">
+            <a:pPr marL="0" indent="0" algn="ctr">
               <a:buNone/>
             </a:pPr>
             <a:r>
@@ -15895,7 +16687,7 @@
           <a:bodyPr wrap="square" lIns="0" tIns="0" rIns="0" bIns="0" rtlCol="0" anchor="ctr"/>
           <a:lstStyle/>
           <a:p>
-            <a:pPr algn="ctr" indent="0" marL="0">
+            <a:pPr marL="0" indent="0" algn="ctr">
               <a:buNone/>
             </a:pPr>
             <a:r>
@@ -15934,13 +16726,20 @@
             <a:prstDash val="solid"/>
           </a:ln>
           <a:effectLst>
-            <a:outerShdw sx="100000" sy="100000" kx="0" ky="0" algn="bl" rotWithShape="0" blurRad="63500" dist="25400" dir="8100000">
+            <a:outerShdw blurRad="63500" dist="25400" dir="8100000" algn="bl" rotWithShape="0">
               <a:srgbClr val="000000">
                 <a:alpha val="10000"/>
               </a:srgbClr>
             </a:outerShdw>
           </a:effectLst>
         </p:spPr>
+        <p:txBody>
+          <a:bodyPr/>
+          <a:lstStyle/>
+          <a:p>
+            <a:endParaRPr lang="en-US"/>
+          </a:p>
+        </p:txBody>
       </p:sp>
       <p:sp>
         <p:nvSpPr>
@@ -15966,6 +16765,13 @@
             <a:prstDash val="solid"/>
           </a:ln>
         </p:spPr>
+        <p:txBody>
+          <a:bodyPr/>
+          <a:lstStyle/>
+          <a:p>
+            <a:endParaRPr lang="en-US"/>
+          </a:p>
+        </p:txBody>
       </p:sp>
       <p:sp>
         <p:nvSpPr>
@@ -15988,7 +16794,7 @@
           <a:bodyPr wrap="square" lIns="0" tIns="0" rIns="0" bIns="0" rtlCol="0" anchor="ctr"/>
           <a:lstStyle/>
           <a:p>
-            <a:pPr algn="ctr" indent="0" marL="0">
+            <a:pPr marL="0" indent="0" algn="ctr">
               <a:buNone/>
             </a:pPr>
             <a:r>
@@ -16024,7 +16830,7 @@
           <a:bodyPr wrap="square" lIns="0" tIns="0" rIns="0" bIns="0" rtlCol="0" anchor="ctr"/>
           <a:lstStyle/>
           <a:p>
-            <a:pPr algn="ctr" indent="0" marL="0">
+            <a:pPr marL="0" indent="0" algn="ctr">
               <a:buNone/>
             </a:pPr>
             <a:r>
@@ -16060,16 +16866,24 @@
           <a:bodyPr wrap="square" lIns="0" tIns="0" rIns="0" bIns="0" rtlCol="0" anchor="ctr"/>
           <a:lstStyle/>
           <a:p>
-            <a:pPr algn="ctr" indent="0" marL="0">
+            <a:pPr marL="0" indent="0" algn="ctr">
               <a:buNone/>
             </a:pPr>
             <a:r>
+              <a:rPr lang="en-US" sz="900" i="1">
+                <a:solidFill>
+                  <a:srgbClr val="8FA0B2"/>
+                </a:solidFill>
+              </a:rPr>
+              <a:t>Error (</a:t>
+            </a:r>
+            <a:r>
               <a:rPr lang="en-US" sz="900" i="1" dirty="0">
                 <a:solidFill>
                   <a:srgbClr val="8FA0B2"/>
                 </a:solidFill>
               </a:rPr>
-              <a:t>Error in VND (train)</a:t>
+              <a:t>train)</a:t>
             </a:r>
             <a:endParaRPr lang="en-US" sz="900" dirty="0"/>
           </a:p>
@@ -16099,13 +16913,20 @@
             <a:prstDash val="solid"/>
           </a:ln>
           <a:effectLst>
-            <a:outerShdw sx="100000" sy="100000" kx="0" ky="0" algn="bl" rotWithShape="0" blurRad="63500" dist="25400" dir="8100000">
+            <a:outerShdw blurRad="63500" dist="25400" dir="8100000" algn="bl" rotWithShape="0">
               <a:srgbClr val="000000">
                 <a:alpha val="10000"/>
               </a:srgbClr>
             </a:outerShdw>
           </a:effectLst>
         </p:spPr>
+        <p:txBody>
+          <a:bodyPr/>
+          <a:lstStyle/>
+          <a:p>
+            <a:endParaRPr lang="en-US"/>
+          </a:p>
+        </p:txBody>
       </p:sp>
       <p:sp>
         <p:nvSpPr>
@@ -16131,6 +16952,13 @@
             <a:prstDash val="solid"/>
           </a:ln>
         </p:spPr>
+        <p:txBody>
+          <a:bodyPr/>
+          <a:lstStyle/>
+          <a:p>
+            <a:endParaRPr lang="en-US"/>
+          </a:p>
+        </p:txBody>
       </p:sp>
       <p:sp>
         <p:nvSpPr>
@@ -16153,7 +16981,7 @@
           <a:bodyPr wrap="square" lIns="0" tIns="0" rIns="0" bIns="0" rtlCol="0" anchor="ctr"/>
           <a:lstStyle/>
           <a:p>
-            <a:pPr algn="ctr" indent="0" marL="0">
+            <a:pPr marL="0" indent="0" algn="ctr">
               <a:buNone/>
             </a:pPr>
             <a:r>
@@ -16189,7 +17017,7 @@
           <a:bodyPr wrap="square" lIns="0" tIns="0" rIns="0" bIns="0" rtlCol="0" anchor="ctr"/>
           <a:lstStyle/>
           <a:p>
-            <a:pPr algn="ctr" indent="0" marL="0">
+            <a:pPr marL="0" indent="0" algn="ctr">
               <a:buNone/>
             </a:pPr>
             <a:r>
@@ -16225,16 +17053,24 @@
           <a:bodyPr wrap="square" lIns="0" tIns="0" rIns="0" bIns="0" rtlCol="0" anchor="ctr"/>
           <a:lstStyle/>
           <a:p>
-            <a:pPr algn="ctr" indent="0" marL="0">
+            <a:pPr marL="0" indent="0" algn="ctr">
               <a:buNone/>
             </a:pPr>
             <a:r>
+              <a:rPr lang="en-US" sz="900" i="1">
+                <a:solidFill>
+                  <a:srgbClr val="8FA0B2"/>
+                </a:solidFill>
+              </a:rPr>
+              <a:t>Error (</a:t>
+            </a:r>
+            <a:r>
               <a:rPr lang="en-US" sz="900" i="1" dirty="0">
                 <a:solidFill>
                   <a:srgbClr val="8FA0B2"/>
                 </a:solidFill>
               </a:rPr>
-              <a:t>Error in VND (test)</a:t>
+              <a:t>test)</a:t>
             </a:r>
             <a:endParaRPr lang="en-US" sz="900" dirty="0"/>
           </a:p>
@@ -16261,7 +17097,7 @@
           <a:bodyPr wrap="square" lIns="0" tIns="0" rIns="0" bIns="0" rtlCol="0" anchor="ctr"/>
           <a:lstStyle/>
           <a:p>
-            <a:pPr indent="0" marL="0">
+            <a:pPr marL="0" indent="0">
               <a:buNone/>
             </a:pPr>
             <a:r>
@@ -16278,7 +17114,7 @@
       </p:sp>
       <p:graphicFrame>
         <p:nvGraphicFramePr>
-          <p:cNvPr id="10" name="Table 0"/>
+          <p:cNvPr id="26" name="Table 0"/>
           <p:cNvGraphicFramePr>
             <a:graphicFrameLocks noGrp="1"/>
           </p:cNvGraphicFramePr>
@@ -16292,16 +17128,34 @@
         </p:nvGraphicFramePr>
         <p:xfrm>
           <a:off x="457200" y="2788920"/>
-          <a:ext cx="8229600" cy="1920240"/>
+          <a:ext cx="8229600" cy="1737360"/>
         </p:xfrm>
         <a:graphic>
           <a:graphicData uri="http://schemas.openxmlformats.org/drawingml/2006/table">
             <a:tbl>
               <a:tblPr/>
               <a:tblGrid>
-                <a:gridCol w="2743200"/>
-                <a:gridCol w="2743200"/>
-                <a:gridCol w="2743200"/>
+                <a:gridCol w="2743200">
+                  <a:extLst>
+                    <a:ext uri="{9D8B030D-6E8A-4147-A177-3AD203B41FA5}">
+                      <a16:colId xmlns:a16="http://schemas.microsoft.com/office/drawing/2014/main" val="20000"/>
+                    </a:ext>
+                  </a:extLst>
+                </a:gridCol>
+                <a:gridCol w="2743200">
+                  <a:extLst>
+                    <a:ext uri="{9D8B030D-6E8A-4147-A177-3AD203B41FA5}">
+                      <a16:colId xmlns:a16="http://schemas.microsoft.com/office/drawing/2014/main" val="20001"/>
+                    </a:ext>
+                  </a:extLst>
+                </a:gridCol>
+                <a:gridCol w="2743200">
+                  <a:extLst>
+                    <a:ext uri="{9D8B030D-6E8A-4147-A177-3AD203B41FA5}">
+                      <a16:colId xmlns:a16="http://schemas.microsoft.com/office/drawing/2014/main" val="20002"/>
+                    </a:ext>
+                  </a:extLst>
+                </a:gridCol>
               </a:tblGrid>
               <a:tr h="347472">
                 <a:tc>
@@ -16309,7 +17163,7 @@
                     <a:bodyPr/>
                     <a:lstStyle/>
                     <a:p>
-                      <a:pPr algn="ctr" indent="0" marL="0">
+                      <a:pPr marL="0" indent="0" algn="ctr">
                         <a:buNone/>
                       </a:pPr>
                       <a:r>
@@ -16323,7 +17177,7 @@
                       <a:endParaRPr lang="en-US" sz="1000" dirty="0"/>
                     </a:p>
                   </a:txBody>
-                  <a:tcPr marL="91440" marR="91440" marT="45720" marB="45720">
+                  <a:tcPr>
                     <a:lnL w="6350" cap="flat" cmpd="sng" algn="ctr">
                       <a:solidFill>
                         <a:srgbClr val="2B5A7A"/>
@@ -16370,7 +17224,7 @@
                     <a:bodyPr/>
                     <a:lstStyle/>
                     <a:p>
-                      <a:pPr algn="ctr" indent="0" marL="0">
+                      <a:pPr marL="0" indent="0" algn="ctr">
                         <a:buNone/>
                       </a:pPr>
                       <a:r>
@@ -16384,7 +17238,7 @@
                       <a:endParaRPr lang="en-US" sz="1000" dirty="0"/>
                     </a:p>
                   </a:txBody>
-                  <a:tcPr marL="91440" marR="91440" marT="45720" marB="45720">
+                  <a:tcPr>
                     <a:lnL w="6350" cap="flat" cmpd="sng" algn="ctr">
                       <a:solidFill>
                         <a:srgbClr val="2B5A7A"/>
@@ -16431,7 +17285,7 @@
                     <a:bodyPr/>
                     <a:lstStyle/>
                     <a:p>
-                      <a:pPr algn="ctr" indent="0" marL="0">
+                      <a:pPr marL="0" indent="0" algn="ctr">
                         <a:buNone/>
                       </a:pPr>
                       <a:r>
@@ -16445,7 +17299,7 @@
                       <a:endParaRPr lang="en-US" sz="1000" dirty="0"/>
                     </a:p>
                   </a:txBody>
-                  <a:tcPr marL="91440" marR="91440" marT="45720" marB="45720">
+                  <a:tcPr>
                     <a:lnL w="6350" cap="flat" cmpd="sng" algn="ctr">
                       <a:solidFill>
                         <a:srgbClr val="2B5A7A"/>
@@ -16487,6 +17341,11 @@
                     </a:solidFill>
                   </a:tcPr>
                 </a:tc>
+                <a:extLst>
+                  <a:ext uri="{0D108BD9-81ED-4DB2-BD59-A6C34878D82A}">
+                    <a16:rowId xmlns:a16="http://schemas.microsoft.com/office/drawing/2014/main" val="10000"/>
+                  </a:ext>
+                </a:extLst>
               </a:tr>
               <a:tr h="347472">
                 <a:tc>
@@ -16494,7 +17353,7 @@
                     <a:bodyPr/>
                     <a:lstStyle/>
                     <a:p>
-                      <a:pPr algn="ctr" indent="0" marL="0">
+                      <a:pPr marL="0" indent="0" algn="ctr">
                         <a:buNone/>
                       </a:pPr>
                       <a:r>
@@ -16508,7 +17367,7 @@
                       <a:endParaRPr lang="en-US" sz="1100" dirty="0"/>
                     </a:p>
                   </a:txBody>
-                  <a:tcPr marL="91440" marR="91440" marT="45720" marB="45720">
+                  <a:tcPr>
                     <a:lnL w="6350" cap="flat" cmpd="sng" algn="ctr">
                       <a:solidFill>
                         <a:srgbClr val="2B5A7A"/>
@@ -16555,7 +17414,7 @@
                     <a:bodyPr/>
                     <a:lstStyle/>
                     <a:p>
-                      <a:pPr algn="ctr" indent="0" marL="0">
+                      <a:pPr marL="0" indent="0" algn="ctr">
                         <a:buNone/>
                       </a:pPr>
                       <a:r>
@@ -16569,7 +17428,7 @@
                       <a:endParaRPr lang="en-US" sz="1100" dirty="0"/>
                     </a:p>
                   </a:txBody>
-                  <a:tcPr marL="91440" marR="91440" marT="45720" marB="45720">
+                  <a:tcPr>
                     <a:lnL w="6350" cap="flat" cmpd="sng" algn="ctr">
                       <a:solidFill>
                         <a:srgbClr val="2B5A7A"/>
@@ -16616,7 +17475,7 @@
                     <a:bodyPr/>
                     <a:lstStyle/>
                     <a:p>
-                      <a:pPr algn="ctr" indent="0" marL="0">
+                      <a:pPr marL="0" indent="0" algn="ctr">
                         <a:buNone/>
                       </a:pPr>
                       <a:r>
@@ -16630,7 +17489,7 @@
                       <a:endParaRPr lang="en-US" sz="1100" dirty="0"/>
                     </a:p>
                   </a:txBody>
-                  <a:tcPr marL="91440" marR="91440" marT="45720" marB="45720">
+                  <a:tcPr>
                     <a:lnL w="6350" cap="flat" cmpd="sng" algn="ctr">
                       <a:solidFill>
                         <a:srgbClr val="2B5A7A"/>
@@ -16672,6 +17531,11 @@
                     </a:solidFill>
                   </a:tcPr>
                 </a:tc>
+                <a:extLst>
+                  <a:ext uri="{0D108BD9-81ED-4DB2-BD59-A6C34878D82A}">
+                    <a16:rowId xmlns:a16="http://schemas.microsoft.com/office/drawing/2014/main" val="10001"/>
+                  </a:ext>
+                </a:extLst>
               </a:tr>
               <a:tr h="347472">
                 <a:tc>
@@ -16679,7 +17543,7 @@
                     <a:bodyPr/>
                     <a:lstStyle/>
                     <a:p>
-                      <a:pPr algn="ctr" indent="0" marL="0">
+                      <a:pPr marL="0" indent="0" algn="ctr">
                         <a:buNone/>
                       </a:pPr>
                       <a:r>
@@ -16693,7 +17557,7 @@
                       <a:endParaRPr lang="en-US" sz="1000" dirty="0"/>
                     </a:p>
                   </a:txBody>
-                  <a:tcPr marL="91440" marR="91440" marT="45720" marB="45720">
+                  <a:tcPr>
                     <a:lnL w="6350" cap="flat" cmpd="sng" algn="ctr">
                       <a:solidFill>
                         <a:srgbClr val="2B5A7A"/>
@@ -16740,7 +17604,7 @@
                     <a:bodyPr/>
                     <a:lstStyle/>
                     <a:p>
-                      <a:pPr algn="ctr" indent="0" marL="0">
+                      <a:pPr marL="0" indent="0" algn="ctr">
                         <a:buNone/>
                       </a:pPr>
                       <a:r>
@@ -16754,7 +17618,7 @@
                       <a:endParaRPr lang="en-US" sz="1000" dirty="0"/>
                     </a:p>
                   </a:txBody>
-                  <a:tcPr marL="91440" marR="91440" marT="45720" marB="45720">
+                  <a:tcPr>
                     <a:lnL w="6350" cap="flat" cmpd="sng" algn="ctr">
                       <a:solidFill>
                         <a:srgbClr val="2B5A7A"/>
@@ -16801,7 +17665,7 @@
                     <a:bodyPr/>
                     <a:lstStyle/>
                     <a:p>
-                      <a:pPr algn="ctr" indent="0" marL="0">
+                      <a:pPr marL="0" indent="0" algn="ctr">
                         <a:buNone/>
                       </a:pPr>
                       <a:r>
@@ -16815,7 +17679,7 @@
                       <a:endParaRPr lang="en-US" sz="1000" dirty="0"/>
                     </a:p>
                   </a:txBody>
-                  <a:tcPr marL="91440" marR="91440" marT="45720" marB="45720">
+                  <a:tcPr>
                     <a:lnL w="6350" cap="flat" cmpd="sng" algn="ctr">
                       <a:solidFill>
                         <a:srgbClr val="2B5A7A"/>
@@ -16857,6 +17721,11 @@
                     </a:solidFill>
                   </a:tcPr>
                 </a:tc>
+                <a:extLst>
+                  <a:ext uri="{0D108BD9-81ED-4DB2-BD59-A6C34878D82A}">
+                    <a16:rowId xmlns:a16="http://schemas.microsoft.com/office/drawing/2014/main" val="10002"/>
+                  </a:ext>
+                </a:extLst>
               </a:tr>
               <a:tr h="347472">
                 <a:tc>
@@ -16864,7 +17733,7 @@
                     <a:bodyPr/>
                     <a:lstStyle/>
                     <a:p>
-                      <a:pPr algn="ctr" indent="0" marL="0">
+                      <a:pPr marL="0" indent="0" algn="ctr">
                         <a:buNone/>
                       </a:pPr>
                       <a:r>
@@ -16878,7 +17747,7 @@
                       <a:endParaRPr lang="en-US" sz="1000" dirty="0"/>
                     </a:p>
                   </a:txBody>
-                  <a:tcPr marL="91440" marR="91440" marT="45720" marB="45720">
+                  <a:tcPr>
                     <a:lnL w="6350" cap="flat" cmpd="sng" algn="ctr">
                       <a:solidFill>
                         <a:srgbClr val="2B5A7A"/>
@@ -16925,7 +17794,7 @@
                     <a:bodyPr/>
                     <a:lstStyle/>
                     <a:p>
-                      <a:pPr algn="ctr" indent="0" marL="0">
+                      <a:pPr marL="0" indent="0" algn="ctr">
                         <a:buNone/>
                       </a:pPr>
                       <a:r>
@@ -16939,7 +17808,7 @@
                       <a:endParaRPr lang="en-US" sz="1000" dirty="0"/>
                     </a:p>
                   </a:txBody>
-                  <a:tcPr marL="91440" marR="91440" marT="45720" marB="45720">
+                  <a:tcPr>
                     <a:lnL w="6350" cap="flat" cmpd="sng" algn="ctr">
                       <a:solidFill>
                         <a:srgbClr val="2B5A7A"/>
@@ -16986,7 +17855,7 @@
                     <a:bodyPr/>
                     <a:lstStyle/>
                     <a:p>
-                      <a:pPr algn="ctr" indent="0" marL="0">
+                      <a:pPr marL="0" indent="0" algn="ctr">
                         <a:buNone/>
                       </a:pPr>
                       <a:r>
@@ -17000,7 +17869,7 @@
                       <a:endParaRPr lang="en-US" sz="1000" dirty="0"/>
                     </a:p>
                   </a:txBody>
-                  <a:tcPr marL="91440" marR="91440" marT="45720" marB="45720">
+                  <a:tcPr>
                     <a:lnL w="6350" cap="flat" cmpd="sng" algn="ctr">
                       <a:solidFill>
                         <a:srgbClr val="2B5A7A"/>
@@ -17042,6 +17911,11 @@
                     </a:solidFill>
                   </a:tcPr>
                 </a:tc>
+                <a:extLst>
+                  <a:ext uri="{0D108BD9-81ED-4DB2-BD59-A6C34878D82A}">
+                    <a16:rowId xmlns:a16="http://schemas.microsoft.com/office/drawing/2014/main" val="10003"/>
+                  </a:ext>
+                </a:extLst>
               </a:tr>
               <a:tr h="347472">
                 <a:tc>
@@ -17049,7 +17923,7 @@
                     <a:bodyPr/>
                     <a:lstStyle/>
                     <a:p>
-                      <a:pPr algn="ctr" indent="0" marL="0">
+                      <a:pPr marL="0" indent="0" algn="ctr">
                         <a:buNone/>
                       </a:pPr>
                       <a:r>
@@ -17063,7 +17937,7 @@
                       <a:endParaRPr lang="en-US" sz="1100" dirty="0"/>
                     </a:p>
                   </a:txBody>
-                  <a:tcPr marL="91440" marR="91440" marT="45720" marB="45720">
+                  <a:tcPr>
                     <a:lnL w="6350" cap="flat" cmpd="sng" algn="ctr">
                       <a:solidFill>
                         <a:srgbClr val="2B5A7A"/>
@@ -17110,7 +17984,7 @@
                     <a:bodyPr/>
                     <a:lstStyle/>
                     <a:p>
-                      <a:pPr algn="ctr" indent="0" marL="0">
+                      <a:pPr marL="0" indent="0" algn="ctr">
                         <a:buNone/>
                       </a:pPr>
                       <a:r>
@@ -17124,7 +17998,7 @@
                       <a:endParaRPr lang="en-US" sz="1100" dirty="0"/>
                     </a:p>
                   </a:txBody>
-                  <a:tcPr marL="91440" marR="91440" marT="45720" marB="45720">
+                  <a:tcPr>
                     <a:lnL w="6350" cap="flat" cmpd="sng" algn="ctr">
                       <a:solidFill>
                         <a:srgbClr val="2B5A7A"/>
@@ -17171,7 +18045,7 @@
                     <a:bodyPr/>
                     <a:lstStyle/>
                     <a:p>
-                      <a:pPr algn="ctr" indent="0" marL="0">
+                      <a:pPr marL="0" indent="0" algn="ctr">
                         <a:buNone/>
                       </a:pPr>
                       <a:r>
@@ -17185,7 +18059,7 @@
                       <a:endParaRPr lang="en-US" sz="1100" dirty="0"/>
                     </a:p>
                   </a:txBody>
-                  <a:tcPr marL="91440" marR="91440" marT="45720" marB="45720">
+                  <a:tcPr>
                     <a:lnL w="6350" cap="flat" cmpd="sng" algn="ctr">
                       <a:solidFill>
                         <a:srgbClr val="2B5A7A"/>
@@ -17227,6 +18101,11 @@
                     </a:solidFill>
                   </a:tcPr>
                 </a:tc>
+                <a:extLst>
+                  <a:ext uri="{0D108BD9-81ED-4DB2-BD59-A6C34878D82A}">
+                    <a16:rowId xmlns:a16="http://schemas.microsoft.com/office/drawing/2014/main" val="10004"/>
+                  </a:ext>
+                </a:extLst>
               </a:tr>
             </a:tbl>
           </a:graphicData>
@@ -17253,7 +18132,7 @@
           <a:bodyPr wrap="square" lIns="0" tIns="0" rIns="0" bIns="0" rtlCol="0" anchor="ctr"/>
           <a:lstStyle/>
           <a:p>
-            <a:pPr algn="ctr" indent="0" marL="0">
+            <a:pPr marL="0" indent="0" algn="ctr">
               <a:buNone/>
             </a:pPr>
             <a:r>
@@ -17569,4 +18448,319 @@
     </a:ext>
   </a:extLst>
 </a:theme>
+</file>
+
+<file path=ppt/theme/theme2.xml><?xml version="1.0" encoding="utf-8"?>
+<a:theme xmlns:a="http://schemas.openxmlformats.org/drawingml/2006/main" name="Office Theme">
+  <a:themeElements>
+    <a:clrScheme name="Office">
+      <a:dk1>
+        <a:sysClr val="windowText" lastClr="000000"/>
+      </a:dk1>
+      <a:lt1>
+        <a:sysClr val="window" lastClr="FFFFFF"/>
+      </a:lt1>
+      <a:dk2>
+        <a:srgbClr val="0E2841"/>
+      </a:dk2>
+      <a:lt2>
+        <a:srgbClr val="E8E8E8"/>
+      </a:lt2>
+      <a:accent1>
+        <a:srgbClr val="156082"/>
+      </a:accent1>
+      <a:accent2>
+        <a:srgbClr val="E97132"/>
+      </a:accent2>
+      <a:accent3>
+        <a:srgbClr val="196B24"/>
+      </a:accent3>
+      <a:accent4>
+        <a:srgbClr val="0F9ED5"/>
+      </a:accent4>
+      <a:accent5>
+        <a:srgbClr val="A02B93"/>
+      </a:accent5>
+      <a:accent6>
+        <a:srgbClr val="4EA72E"/>
+      </a:accent6>
+      <a:hlink>
+        <a:srgbClr val="467886"/>
+      </a:hlink>
+      <a:folHlink>
+        <a:srgbClr val="96607D"/>
+      </a:folHlink>
+    </a:clrScheme>
+    <a:fontScheme name="Office">
+      <a:majorFont>
+        <a:latin typeface="Aptos Display" panose="02110004020202020204"/>
+        <a:ea typeface=""/>
+        <a:cs typeface=""/>
+        <a:font script="Jpan" typeface="游ゴシック Light"/>
+        <a:font script="Hang" typeface="맑은 고딕"/>
+        <a:font script="Hans" typeface="等线 Light"/>
+        <a:font script="Hant" typeface="新細明體"/>
+        <a:font script="Arab" typeface="Times New Roman"/>
+        <a:font script="Hebr" typeface="Times New Roman"/>
+        <a:font script="Thai" typeface="Angsana New"/>
+        <a:font script="Ethi" typeface="Nyala"/>
+        <a:font script="Beng" typeface="Vrinda"/>
+        <a:font script="Gujr" typeface="Shruti"/>
+        <a:font script="Khmr" typeface="MoolBoran"/>
+        <a:font script="Knda" typeface="Tunga"/>
+        <a:font script="Guru" typeface="Raavi"/>
+        <a:font script="Cans" typeface="Euphemia"/>
+        <a:font script="Cher" typeface="Plantagenet Cherokee"/>
+        <a:font script="Yiii" typeface="Microsoft Yi Baiti"/>
+        <a:font script="Tibt" typeface="Microsoft Himalaya"/>
+        <a:font script="Thaa" typeface="MV Boli"/>
+        <a:font script="Deva" typeface="Mangal"/>
+        <a:font script="Telu" typeface="Gautami"/>
+        <a:font script="Taml" typeface="Latha"/>
+        <a:font script="Syrc" typeface="Estrangelo Edessa"/>
+        <a:font script="Orya" typeface="Kalinga"/>
+        <a:font script="Mlym" typeface="Kartika"/>
+        <a:font script="Laoo" typeface="DokChampa"/>
+        <a:font script="Sinh" typeface="Iskoola Pota"/>
+        <a:font script="Mong" typeface="Mongolian Baiti"/>
+        <a:font script="Viet" typeface="Times New Roman"/>
+        <a:font script="Uigh" typeface="Microsoft Uighur"/>
+        <a:font script="Geor" typeface="Sylfaen"/>
+        <a:font script="Armn" typeface="Arial"/>
+        <a:font script="Bugi" typeface="Leelawadee UI"/>
+        <a:font script="Bopo" typeface="Microsoft JhengHei"/>
+        <a:font script="Java" typeface="Javanese Text"/>
+        <a:font script="Lisu" typeface="Segoe UI"/>
+        <a:font script="Mymr" typeface="Myanmar Text"/>
+        <a:font script="Nkoo" typeface="Ebrima"/>
+        <a:font script="Olck" typeface="Nirmala UI"/>
+        <a:font script="Osma" typeface="Ebrima"/>
+        <a:font script="Phag" typeface="Phagspa"/>
+        <a:font script="Syrn" typeface="Estrangelo Edessa"/>
+        <a:font script="Syrj" typeface="Estrangelo Edessa"/>
+        <a:font script="Syre" typeface="Estrangelo Edessa"/>
+        <a:font script="Sora" typeface="Nirmala UI"/>
+        <a:font script="Tale" typeface="Microsoft Tai Le"/>
+        <a:font script="Talu" typeface="Microsoft New Tai Lue"/>
+        <a:font script="Tfng" typeface="Ebrima"/>
+      </a:majorFont>
+      <a:minorFont>
+        <a:latin typeface="Aptos" panose="02110004020202020204"/>
+        <a:ea typeface=""/>
+        <a:cs typeface=""/>
+        <a:font script="Jpan" typeface="游ゴシック"/>
+        <a:font script="Hang" typeface="맑은 고딕"/>
+        <a:font script="Hans" typeface="等线"/>
+        <a:font script="Hant" typeface="新細明體"/>
+        <a:font script="Arab" typeface="Arial"/>
+        <a:font script="Hebr" typeface="Arial"/>
+        <a:font script="Thai" typeface="Cordia New"/>
+        <a:font script="Ethi" typeface="Nyala"/>
+        <a:font script="Beng" typeface="Vrinda"/>
+        <a:font script="Gujr" typeface="Shruti"/>
+        <a:font script="Khmr" typeface="DaunPenh"/>
+        <a:font script="Knda" typeface="Tunga"/>
+        <a:font script="Guru" typeface="Raavi"/>
+        <a:font script="Cans" typeface="Euphemia"/>
+        <a:font script="Cher" typeface="Plantagenet Cherokee"/>
+        <a:font script="Yiii" typeface="Microsoft Yi Baiti"/>
+        <a:font script="Tibt" typeface="Microsoft Himalaya"/>
+        <a:font script="Thaa" typeface="MV Boli"/>
+        <a:font script="Deva" typeface="Mangal"/>
+        <a:font script="Telu" typeface="Gautami"/>
+        <a:font script="Taml" typeface="Latha"/>
+        <a:font script="Syrc" typeface="Estrangelo Edessa"/>
+        <a:font script="Orya" typeface="Kalinga"/>
+        <a:font script="Mlym" typeface="Kartika"/>
+        <a:font script="Laoo" typeface="DokChampa"/>
+        <a:font script="Sinh" typeface="Iskoola Pota"/>
+        <a:font script="Mong" typeface="Mongolian Baiti"/>
+        <a:font script="Viet" typeface="Arial"/>
+        <a:font script="Uigh" typeface="Microsoft Uighur"/>
+        <a:font script="Geor" typeface="Sylfaen"/>
+        <a:font script="Armn" typeface="Arial"/>
+        <a:font script="Bugi" typeface="Leelawadee UI"/>
+        <a:font script="Bopo" typeface="Microsoft JhengHei"/>
+        <a:font script="Java" typeface="Javanese Text"/>
+        <a:font script="Lisu" typeface="Segoe UI"/>
+        <a:font script="Mymr" typeface="Myanmar Text"/>
+        <a:font script="Nkoo" typeface="Ebrima"/>
+        <a:font script="Olck" typeface="Nirmala UI"/>
+        <a:font script="Osma" typeface="Ebrima"/>
+        <a:font script="Phag" typeface="Phagspa"/>
+        <a:font script="Syrn" typeface="Estrangelo Edessa"/>
+        <a:font script="Syrj" typeface="Estrangelo Edessa"/>
+        <a:font script="Syre" typeface="Estrangelo Edessa"/>
+        <a:font script="Sora" typeface="Nirmala UI"/>
+        <a:font script="Tale" typeface="Microsoft Tai Le"/>
+        <a:font script="Talu" typeface="Microsoft New Tai Lue"/>
+        <a:font script="Tfng" typeface="Ebrima"/>
+      </a:minorFont>
+    </a:fontScheme>
+    <a:fmtScheme name="Office">
+      <a:fillStyleLst>
+        <a:solidFill>
+          <a:schemeClr val="phClr"/>
+        </a:solidFill>
+        <a:gradFill rotWithShape="1">
+          <a:gsLst>
+            <a:gs pos="0">
+              <a:schemeClr val="phClr">
+                <a:lumMod val="110000"/>
+                <a:satMod val="105000"/>
+                <a:tint val="67000"/>
+              </a:schemeClr>
+            </a:gs>
+            <a:gs pos="50000">
+              <a:schemeClr val="phClr">
+                <a:lumMod val="105000"/>
+                <a:satMod val="103000"/>
+                <a:tint val="73000"/>
+              </a:schemeClr>
+            </a:gs>
+            <a:gs pos="100000">
+              <a:schemeClr val="phClr">
+                <a:lumMod val="105000"/>
+                <a:satMod val="109000"/>
+                <a:tint val="81000"/>
+              </a:schemeClr>
+            </a:gs>
+          </a:gsLst>
+          <a:lin ang="5400000" scaled="0"/>
+        </a:gradFill>
+        <a:gradFill rotWithShape="1">
+          <a:gsLst>
+            <a:gs pos="0">
+              <a:schemeClr val="phClr">
+                <a:satMod val="103000"/>
+                <a:lumMod val="102000"/>
+                <a:tint val="94000"/>
+              </a:schemeClr>
+            </a:gs>
+            <a:gs pos="50000">
+              <a:schemeClr val="phClr">
+                <a:satMod val="110000"/>
+                <a:lumMod val="100000"/>
+                <a:shade val="100000"/>
+              </a:schemeClr>
+            </a:gs>
+            <a:gs pos="100000">
+              <a:schemeClr val="phClr">
+                <a:lumMod val="99000"/>
+                <a:satMod val="120000"/>
+                <a:shade val="78000"/>
+              </a:schemeClr>
+            </a:gs>
+          </a:gsLst>
+          <a:lin ang="5400000" scaled="0"/>
+        </a:gradFill>
+      </a:fillStyleLst>
+      <a:lnStyleLst>
+        <a:ln w="12700" cap="flat" cmpd="sng" algn="ctr">
+          <a:solidFill>
+            <a:schemeClr val="phClr"/>
+          </a:solidFill>
+          <a:prstDash val="solid"/>
+          <a:miter lim="800000"/>
+        </a:ln>
+        <a:ln w="19050" cap="flat" cmpd="sng" algn="ctr">
+          <a:solidFill>
+            <a:schemeClr val="phClr"/>
+          </a:solidFill>
+          <a:prstDash val="solid"/>
+          <a:miter lim="800000"/>
+        </a:ln>
+        <a:ln w="25400" cap="flat" cmpd="sng" algn="ctr">
+          <a:solidFill>
+            <a:schemeClr val="phClr"/>
+          </a:solidFill>
+          <a:prstDash val="solid"/>
+          <a:miter lim="800000"/>
+        </a:ln>
+      </a:lnStyleLst>
+      <a:effectStyleLst>
+        <a:effectStyle>
+          <a:effectLst/>
+        </a:effectStyle>
+        <a:effectStyle>
+          <a:effectLst/>
+        </a:effectStyle>
+        <a:effectStyle>
+          <a:effectLst>
+            <a:outerShdw blurRad="57150" dist="19050" dir="5400000" algn="ctr" rotWithShape="0">
+              <a:srgbClr val="000000">
+                <a:alpha val="63000"/>
+              </a:srgbClr>
+            </a:outerShdw>
+          </a:effectLst>
+        </a:effectStyle>
+      </a:effectStyleLst>
+      <a:bgFillStyleLst>
+        <a:solidFill>
+          <a:schemeClr val="phClr"/>
+        </a:solidFill>
+        <a:solidFill>
+          <a:schemeClr val="phClr">
+            <a:tint val="95000"/>
+            <a:satMod val="170000"/>
+          </a:schemeClr>
+        </a:solidFill>
+        <a:gradFill rotWithShape="1">
+          <a:gsLst>
+            <a:gs pos="0">
+              <a:schemeClr val="phClr">
+                <a:tint val="93000"/>
+                <a:satMod val="150000"/>
+                <a:shade val="98000"/>
+                <a:lumMod val="102000"/>
+              </a:schemeClr>
+            </a:gs>
+            <a:gs pos="50000">
+              <a:schemeClr val="phClr">
+                <a:tint val="98000"/>
+                <a:satMod val="130000"/>
+                <a:shade val="90000"/>
+                <a:lumMod val="103000"/>
+              </a:schemeClr>
+            </a:gs>
+            <a:gs pos="100000">
+              <a:schemeClr val="phClr">
+                <a:shade val="63000"/>
+                <a:satMod val="120000"/>
+              </a:schemeClr>
+            </a:gs>
+          </a:gsLst>
+          <a:lin ang="5400000" scaled="0"/>
+        </a:gradFill>
+      </a:bgFillStyleLst>
+    </a:fmtScheme>
+  </a:themeElements>
+  <a:objectDefaults>
+    <a:lnDef>
+      <a:spPr/>
+      <a:bodyPr/>
+      <a:lstStyle/>
+      <a:style>
+        <a:lnRef idx="2">
+          <a:schemeClr val="accent1"/>
+        </a:lnRef>
+        <a:fillRef idx="0">
+          <a:schemeClr val="accent1"/>
+        </a:fillRef>
+        <a:effectRef idx="1">
+          <a:schemeClr val="accent1"/>
+        </a:effectRef>
+        <a:fontRef idx="minor">
+          <a:schemeClr val="tx1"/>
+        </a:fontRef>
+      </a:style>
+    </a:lnDef>
+  </a:objectDefaults>
+  <a:extraClrSchemeLst/>
+  <a:extLst>
+    <a:ext uri="{05A4C25C-085E-4340-85A3-A5531E510DB2}">
+      <thm15:themeFamily xmlns:thm15="http://schemas.microsoft.com/office/thememl/2012/main" name="Office Theme" id="{2E142A2C-CD16-42D6-873A-C26D2A0506FA}" vid="{1BDDFF52-6CD6-40A5-AB3C-68EB2F1E4D0A}"/>
+    </a:ext>
+  </a:extLst>
+</a:theme>
 </file>